--- a/MTN_DAO_TAO_XE_CU_HOAN_CHINH.pptx
+++ b/MTN_DAO_TAO_XE_CU_HOAN_CHINH.pptx
@@ -22263,6 +22263,1330 @@
 </file>
 
 <file path=ppt/slides/slide22.xml><?xml version="1.0" encoding="utf-8"?>
+<p:sld xmlns:a="http://schemas.openxmlformats.org/drawingml/2006/main" xmlns:p="http://schemas.openxmlformats.org/presentationml/2006/main" xmlns:r="http://schemas.openxmlformats.org/officeDocument/2006/relationships">
+  <p:cSld>
+    <p:spTree>
+      <p:nvGrpSpPr>
+        <p:cNvPr id="1" name=""/>
+        <p:cNvGrpSpPr/>
+        <p:nvPr/>
+      </p:nvGrpSpPr>
+      <p:grpSpPr/>
+      <p:sp>
+        <p:nvSpPr>
+          <p:cNvPr id="716" name="RedBar"/>
+          <p:cNvSpPr/>
+          <p:nvPr/>
+        </p:nvSpPr>
+        <p:spPr>
+          <a:xfrm>
+            <a:off x="548640" y="411480"/>
+            <a:ext cx="457200" cy="54864"/>
+          </a:xfrm>
+          <a:prstGeom prst="rect">
+            <a:avLst/>
+          </a:prstGeom>
+          <a:solidFill>
+            <a:srgbClr val="E60012"/>
+          </a:solidFill>
+          <a:ln>
+            <a:noFill/>
+          </a:ln>
+        </p:spPr>
+      </p:sp>
+      <p:sp>
+        <p:nvSpPr>
+          <p:cNvPr id="717" name="Phan"/>
+          <p:cNvSpPr/>
+          <p:nvPr/>
+        </p:nvSpPr>
+        <p:spPr>
+          <a:xfrm>
+            <a:off x="1097280" y="320040"/>
+            <a:ext cx="9144000" cy="274320"/>
+          </a:xfrm>
+          <a:prstGeom prst="rect">
+            <a:avLst/>
+          </a:prstGeom>
+          <a:noFill/>
+          <a:ln>
+            <a:noFill/>
+          </a:ln>
+        </p:spPr>
+        <p:txBody>
+          <a:bodyPr wrap="square" lIns="0" tIns="0" rIns="0" bIns="0" rtlCol="0" anchor="ctr"/>
+          <a:lstStyle/>
+          <a:p>
+            <a:pPr algn="l" indent="0" marL="0">
+              <a:buNone/>
+            </a:pPr>
+            <a:r>
+              <a:rPr lang="vi-VN" sz="1200" b="1" kern="0" dirty="0">
+                <a:solidFill>
+                  <a:srgbClr val="E60012"/>
+                </a:solidFill>
+                <a:latin typeface="Calibri" pitchFamily="34" charset="0"/>
+                <a:ea typeface="Calibri" pitchFamily="34" charset="-122"/>
+                <a:cs typeface="Calibri" pitchFamily="34" charset="-120"/>
+              </a:rPr>
+              <a:t>PHẦN 05</a:t>
+            </a:r>
+          </a:p>
+        </p:txBody>
+      </p:sp>
+      <p:sp>
+        <p:nvSpPr>
+          <p:cNvPr id="718" name="Title"/>
+          <p:cNvSpPr/>
+          <p:nvPr/>
+        </p:nvSpPr>
+        <p:spPr>
+          <a:xfrm>
+            <a:off x="548640" y="580000"/>
+            <a:ext cx="10972800" cy="620000"/>
+          </a:xfrm>
+          <a:prstGeom prst="rect">
+            <a:avLst/>
+          </a:prstGeom>
+          <a:noFill/>
+          <a:ln>
+            <a:noFill/>
+          </a:ln>
+        </p:spPr>
+        <p:txBody>
+          <a:bodyPr wrap="square" lIns="0" tIns="0" rIns="0" bIns="0" rtlCol="0" anchor="ctr"/>
+          <a:lstStyle/>
+          <a:p>
+            <a:pPr algn="l" indent="0" marL="0">
+              <a:buNone/>
+            </a:pPr>
+            <a:r>
+              <a:rPr lang="vi-VN" sz="2800" b="1" kern="0" dirty="0">
+                <a:solidFill>
+                  <a:srgbClr val="1A1F36"/>
+                </a:solidFill>
+                <a:latin typeface="Calibri" pitchFamily="34" charset="0"/>
+                <a:ea typeface="Calibri" pitchFamily="34" charset="-122"/>
+                <a:cs typeface="Calibri" pitchFamily="34" charset="-120"/>
+              </a:rPr>
+              <a:t>Quy trình lái thử xe</a:t>
+            </a:r>
+          </a:p>
+        </p:txBody>
+      </p:sp>
+      <p:sp>
+        <p:nvSpPr>
+          <p:cNvPr id="719" name="Sub"/>
+          <p:cNvSpPr/>
+          <p:nvPr/>
+        </p:nvSpPr>
+        <p:spPr>
+          <a:xfrm>
+            <a:off x="548640" y="1200000"/>
+            <a:ext cx="10972800" cy="310000"/>
+          </a:xfrm>
+          <a:prstGeom prst="rect">
+            <a:avLst/>
+          </a:prstGeom>
+          <a:noFill/>
+          <a:ln>
+            <a:noFill/>
+          </a:ln>
+        </p:spPr>
+        <p:txBody>
+          <a:bodyPr wrap="square" lIns="0" tIns="0" rIns="0" bIns="0" rtlCol="0" anchor="ctr"/>
+          <a:lstStyle/>
+          <a:p>
+            <a:pPr algn="l" indent="0" marL="0">
+              <a:buNone/>
+            </a:pPr>
+            <a:r>
+              <a:rPr lang="vi-VN" sz="1200" b="0" kern="0" dirty="0">
+                <a:solidFill>
+                  <a:srgbClr val="4A4A4A"/>
+                </a:solidFill>
+                <a:latin typeface="Calibri" pitchFamily="34" charset="0"/>
+                <a:ea typeface="Calibri" pitchFamily="34" charset="-122"/>
+                <a:cs typeface="Calibri" pitchFamily="34" charset="-120"/>
+              </a:rPr>
+              <a:t>Để KH trải nghiệm trực tiếp – lái thử đúng cách tăng tỷ lệ chốt deal</a:t>
+            </a:r>
+          </a:p>
+        </p:txBody>
+      </p:sp>
+      <p:sp>
+        <p:nvSpPr>
+          <p:cNvPr id="720" name="Line"/>
+          <p:cNvSpPr/>
+          <p:nvPr/>
+        </p:nvSpPr>
+        <p:spPr>
+          <a:xfrm>
+            <a:off x="548640" y="1530000"/>
+            <a:ext cx="10972800" cy="16000"/>
+          </a:xfrm>
+          <a:prstGeom prst="rect">
+            <a:avLst/>
+          </a:prstGeom>
+          <a:solidFill>
+            <a:srgbClr val="E0E3E8"/>
+          </a:solidFill>
+          <a:ln>
+            <a:noFill/>
+          </a:ln>
+        </p:spPr>
+      </p:sp>
+      <p:sp>
+        <p:nvSpPr>
+          <p:cNvPr id="721" name="RowBg1"/>
+          <p:cNvSpPr/>
+          <p:nvPr/>
+        </p:nvSpPr>
+        <p:spPr>
+          <a:xfrm>
+            <a:off x="280000" y="1590000"/>
+            <a:ext cx="11632000" cy="760000"/>
+          </a:xfrm>
+          <a:prstGeom prst="rect">
+            <a:avLst/>
+          </a:prstGeom>
+          <a:solidFill>
+            <a:srgbClr val="F0F2F5"/>
+          </a:solidFill>
+          <a:ln>
+            <a:noFill/>
+          </a:ln>
+        </p:spPr>
+      </p:sp>
+      <p:sp>
+        <p:nvSpPr>
+          <p:cNvPr id="722" name="NumBg1"/>
+          <p:cNvSpPr/>
+          <p:nvPr/>
+        </p:nvSpPr>
+        <p:spPr>
+          <a:xfrm>
+            <a:off x="280000" y="1590000"/>
+            <a:ext cx="320000" cy="760000"/>
+          </a:xfrm>
+          <a:prstGeom prst="rect">
+            <a:avLst/>
+          </a:prstGeom>
+          <a:solidFill>
+            <a:srgbClr val="E60012"/>
+          </a:solidFill>
+          <a:ln>
+            <a:noFill/>
+          </a:ln>
+        </p:spPr>
+      </p:sp>
+      <p:sp>
+        <p:nvSpPr>
+          <p:cNvPr id="723" name="NumT1"/>
+          <p:cNvSpPr/>
+          <p:nvPr/>
+        </p:nvSpPr>
+        <p:spPr>
+          <a:xfrm>
+            <a:off x="280000" y="1590000"/>
+            <a:ext cx="320000" cy="760000"/>
+          </a:xfrm>
+          <a:prstGeom prst="rect">
+            <a:avLst/>
+          </a:prstGeom>
+          <a:noFill/>
+          <a:ln>
+            <a:noFill/>
+          </a:ln>
+        </p:spPr>
+        <p:txBody>
+          <a:bodyPr wrap="square" lIns="0" tIns="0" rIns="0" bIns="0" rtlCol="0" anchor="ctr"/>
+          <a:lstStyle/>
+          <a:p>
+            <a:pPr algn="ctr" indent="0" marL="0">
+              <a:buNone/>
+            </a:pPr>
+            <a:r>
+              <a:rPr lang="vi-VN" sz="1800" b="1" kern="0" dirty="0">
+                <a:solidFill>
+                  <a:srgbClr val="FFFFFF"/>
+                </a:solidFill>
+                <a:latin typeface="Calibri" pitchFamily="34" charset="0"/>
+                <a:ea typeface="Calibri" pitchFamily="34" charset="-122"/>
+                <a:cs typeface="Calibri" pitchFamily="34" charset="-120"/>
+              </a:rPr>
+              <a:t>1</a:t>
+            </a:r>
+          </a:p>
+        </p:txBody>
+      </p:sp>
+      <p:sp>
+        <p:nvSpPr>
+          <p:cNvPr id="724" name="Bar1"/>
+          <p:cNvSpPr/>
+          <p:nvPr/>
+        </p:nvSpPr>
+        <p:spPr>
+          <a:xfrm>
+            <a:off x="600000" y="1590000"/>
+            <a:ext cx="12000" cy="760000"/>
+          </a:xfrm>
+          <a:prstGeom prst="rect">
+            <a:avLst/>
+          </a:prstGeom>
+          <a:solidFill>
+            <a:srgbClr val="E60012"/>
+          </a:solidFill>
+          <a:ln>
+            <a:noFill/>
+          </a:ln>
+        </p:spPr>
+      </p:sp>
+      <p:sp>
+        <p:nvSpPr>
+          <p:cNvPr id="725" name="StepT1"/>
+          <p:cNvSpPr/>
+          <p:nvPr/>
+        </p:nvSpPr>
+        <p:spPr>
+          <a:xfrm>
+            <a:off x="692000" y="1590000"/>
+            <a:ext cx="3200000" cy="760000"/>
+          </a:xfrm>
+          <a:prstGeom prst="rect">
+            <a:avLst/>
+          </a:prstGeom>
+          <a:noFill/>
+          <a:ln>
+            <a:noFill/>
+          </a:ln>
+        </p:spPr>
+        <p:txBody>
+          <a:bodyPr wrap="square" lIns="0" tIns="0" rIns="0" bIns="0" rtlCol="0" anchor="ctr"/>
+          <a:lstStyle/>
+          <a:p>
+            <a:pPr algn="l" indent="0" marL="0">
+              <a:buNone/>
+            </a:pPr>
+            <a:r>
+              <a:rPr lang="vi-VN" sz="1200" b="1" kern="0" dirty="0">
+                <a:solidFill>
+                  <a:srgbClr val="1A1F36"/>
+                </a:solidFill>
+                <a:latin typeface="Calibri" pitchFamily="34" charset="0"/>
+                <a:ea typeface="Calibri" pitchFamily="34" charset="-122"/>
+                <a:cs typeface="Calibri" pitchFamily="34" charset="-120"/>
+              </a:rPr>
+              <a:t>ĐÁNH GIÁ THỜI ĐIỂM</a:t>
+            </a:r>
+          </a:p>
+        </p:txBody>
+      </p:sp>
+      <p:sp>
+        <p:nvSpPr>
+          <p:cNvPr id="726" name="StepD1"/>
+          <p:cNvSpPr/>
+          <p:nvPr/>
+        </p:nvSpPr>
+        <p:spPr>
+          <a:xfrm>
+            <a:off x="3952000" y="1590000"/>
+            <a:ext cx="7960000" cy="760000"/>
+          </a:xfrm>
+          <a:prstGeom prst="rect">
+            <a:avLst/>
+          </a:prstGeom>
+          <a:noFill/>
+          <a:ln>
+            <a:noFill/>
+          </a:ln>
+        </p:spPr>
+        <p:txBody>
+          <a:bodyPr wrap="square" lIns="0" tIns="0" rIns="0" bIns="0" rtlCol="0" anchor="ctr"/>
+          <a:lstStyle/>
+          <a:p>
+            <a:pPr algn="l" indent="0" marL="0">
+              <a:buNone/>
+            </a:pPr>
+            <a:r>
+              <a:rPr lang="vi-VN" sz="1080" b="0" kern="0" dirty="0">
+                <a:solidFill>
+                  <a:srgbClr val="2C2C2C"/>
+                </a:solidFill>
+                <a:latin typeface="Calibri" pitchFamily="34" charset="0"/>
+                <a:ea typeface="Calibri" pitchFamily="34" charset="-122"/>
+                <a:cs typeface="Calibri" pitchFamily="34" charset="-120"/>
+              </a:rPr>
+              <a:t>KH đã xem xe và thích – muốn lái thử để quyết định cuối. Không cho lái thử quá sớm khi KH chưa quan tâm rõ ràng.</a:t>
+            </a:r>
+          </a:p>
+        </p:txBody>
+      </p:sp>
+      <p:sp>
+        <p:nvSpPr>
+          <p:cNvPr id="727" name="Sep1"/>
+          <p:cNvSpPr/>
+          <p:nvPr/>
+        </p:nvSpPr>
+        <p:spPr>
+          <a:xfrm>
+            <a:off x="280000" y="2340000"/>
+            <a:ext cx="11632000" cy="10000"/>
+          </a:xfrm>
+          <a:prstGeom prst="rect">
+            <a:avLst/>
+          </a:prstGeom>
+          <a:solidFill>
+            <a:srgbClr val="E0E3E8"/>
+          </a:solidFill>
+          <a:ln>
+            <a:noFill/>
+          </a:ln>
+        </p:spPr>
+      </p:sp>
+      <p:sp>
+        <p:nvSpPr>
+          <p:cNvPr id="728" name="RowBg2"/>
+          <p:cNvSpPr/>
+          <p:nvPr/>
+        </p:nvSpPr>
+        <p:spPr>
+          <a:xfrm>
+            <a:off x="280000" y="2350000"/>
+            <a:ext cx="11632000" cy="760000"/>
+          </a:xfrm>
+          <a:prstGeom prst="rect">
+            <a:avLst/>
+          </a:prstGeom>
+          <a:solidFill>
+            <a:srgbClr val="F0F2F5"/>
+          </a:solidFill>
+          <a:ln>
+            <a:noFill/>
+          </a:ln>
+        </p:spPr>
+      </p:sp>
+      <p:sp>
+        <p:nvSpPr>
+          <p:cNvPr id="729" name="NumBg2"/>
+          <p:cNvSpPr/>
+          <p:nvPr/>
+        </p:nvSpPr>
+        <p:spPr>
+          <a:xfrm>
+            <a:off x="280000" y="2350000"/>
+            <a:ext cx="320000" cy="760000"/>
+          </a:xfrm>
+          <a:prstGeom prst="rect">
+            <a:avLst/>
+          </a:prstGeom>
+          <a:solidFill>
+            <a:srgbClr val="1A1F36"/>
+          </a:solidFill>
+          <a:ln>
+            <a:noFill/>
+          </a:ln>
+        </p:spPr>
+      </p:sp>
+      <p:sp>
+        <p:nvSpPr>
+          <p:cNvPr id="730" name="NumT2"/>
+          <p:cNvSpPr/>
+          <p:nvPr/>
+        </p:nvSpPr>
+        <p:spPr>
+          <a:xfrm>
+            <a:off x="280000" y="2350000"/>
+            <a:ext cx="320000" cy="760000"/>
+          </a:xfrm>
+          <a:prstGeom prst="rect">
+            <a:avLst/>
+          </a:prstGeom>
+          <a:noFill/>
+          <a:ln>
+            <a:noFill/>
+          </a:ln>
+        </p:spPr>
+        <p:txBody>
+          <a:bodyPr wrap="square" lIns="0" tIns="0" rIns="0" bIns="0" rtlCol="0" anchor="ctr"/>
+          <a:lstStyle/>
+          <a:p>
+            <a:pPr algn="ctr" indent="0" marL="0">
+              <a:buNone/>
+            </a:pPr>
+            <a:r>
+              <a:rPr lang="vi-VN" sz="1800" b="1" kern="0" dirty="0">
+                <a:solidFill>
+                  <a:srgbClr val="FFFFFF"/>
+                </a:solidFill>
+                <a:latin typeface="Calibri" pitchFamily="34" charset="0"/>
+                <a:ea typeface="Calibri" pitchFamily="34" charset="-122"/>
+                <a:cs typeface="Calibri" pitchFamily="34" charset="-120"/>
+              </a:rPr>
+              <a:t>2</a:t>
+            </a:r>
+          </a:p>
+        </p:txBody>
+      </p:sp>
+      <p:sp>
+        <p:nvSpPr>
+          <p:cNvPr id="731" name="Bar2"/>
+          <p:cNvSpPr/>
+          <p:nvPr/>
+        </p:nvSpPr>
+        <p:spPr>
+          <a:xfrm>
+            <a:off x="600000" y="2350000"/>
+            <a:ext cx="12000" cy="760000"/>
+          </a:xfrm>
+          <a:prstGeom prst="rect">
+            <a:avLst/>
+          </a:prstGeom>
+          <a:solidFill>
+            <a:srgbClr val="1A1F36"/>
+          </a:solidFill>
+          <a:ln>
+            <a:noFill/>
+          </a:ln>
+        </p:spPr>
+      </p:sp>
+      <p:sp>
+        <p:nvSpPr>
+          <p:cNvPr id="732" name="StepT2"/>
+          <p:cNvSpPr/>
+          <p:nvPr/>
+        </p:nvSpPr>
+        <p:spPr>
+          <a:xfrm>
+            <a:off x="692000" y="2350000"/>
+            <a:ext cx="3200000" cy="760000"/>
+          </a:xfrm>
+          <a:prstGeom prst="rect">
+            <a:avLst/>
+          </a:prstGeom>
+          <a:noFill/>
+          <a:ln>
+            <a:noFill/>
+          </a:ln>
+        </p:spPr>
+        <p:txBody>
+          <a:bodyPr wrap="square" lIns="0" tIns="0" rIns="0" bIns="0" rtlCol="0" anchor="ctr"/>
+          <a:lstStyle/>
+          <a:p>
+            <a:pPr algn="l" indent="0" marL="0">
+              <a:buNone/>
+            </a:pPr>
+            <a:r>
+              <a:rPr lang="vi-VN" sz="1200" b="1" kern="0" dirty="0">
+                <a:solidFill>
+                  <a:srgbClr val="1A1F36"/>
+                </a:solidFill>
+                <a:latin typeface="Calibri" pitchFamily="34" charset="0"/>
+                <a:ea typeface="Calibri" pitchFamily="34" charset="-122"/>
+                <a:cs typeface="Calibri" pitchFamily="34" charset="-120"/>
+              </a:rPr>
+              <a:t>LÀM GIẤY ĐỀ XUẤT</a:t>
+            </a:r>
+          </a:p>
+        </p:txBody>
+      </p:sp>
+      <p:sp>
+        <p:nvSpPr>
+          <p:cNvPr id="733" name="StepD2"/>
+          <p:cNvSpPr/>
+          <p:nvPr/>
+        </p:nvSpPr>
+        <p:spPr>
+          <a:xfrm>
+            <a:off x="3952000" y="2350000"/>
+            <a:ext cx="7960000" cy="760000"/>
+          </a:xfrm>
+          <a:prstGeom prst="rect">
+            <a:avLst/>
+          </a:prstGeom>
+          <a:noFill/>
+          <a:ln>
+            <a:noFill/>
+          </a:ln>
+        </p:spPr>
+        <p:txBody>
+          <a:bodyPr wrap="square" lIns="0" tIns="0" rIns="0" bIns="0" rtlCol="0" anchor="ctr"/>
+          <a:lstStyle/>
+          <a:p>
+            <a:pPr algn="l" indent="0" marL="0">
+              <a:buNone/>
+            </a:pPr>
+            <a:r>
+              <a:rPr lang="vi-VN" sz="1080" b="0" kern="0" dirty="0">
+                <a:solidFill>
+                  <a:srgbClr val="2C2C2C"/>
+                </a:solidFill>
+                <a:latin typeface="Calibri" pitchFamily="34" charset="0"/>
+                <a:ea typeface="Calibri" pitchFamily="34" charset="-122"/>
+                <a:cs typeface="Calibri" pitchFamily="34" charset="-120"/>
+              </a:rPr>
+              <a:t>Điền đầy đủ thông tin xe và thông tin KH vào form nội bộ. Liên hệ admin xe cũ để chuẩn bị thủ tục trước.</a:t>
+            </a:r>
+          </a:p>
+        </p:txBody>
+      </p:sp>
+      <p:sp>
+        <p:nvSpPr>
+          <p:cNvPr id="734" name="Sep2"/>
+          <p:cNvSpPr/>
+          <p:nvPr/>
+        </p:nvSpPr>
+        <p:spPr>
+          <a:xfrm>
+            <a:off x="280000" y="3100000"/>
+            <a:ext cx="11632000" cy="10000"/>
+          </a:xfrm>
+          <a:prstGeom prst="rect">
+            <a:avLst/>
+          </a:prstGeom>
+          <a:solidFill>
+            <a:srgbClr val="E0E3E8"/>
+          </a:solidFill>
+          <a:ln>
+            <a:noFill/>
+          </a:ln>
+        </p:spPr>
+      </p:sp>
+      <p:sp>
+        <p:nvSpPr>
+          <p:cNvPr id="735" name="RowBg3"/>
+          <p:cNvSpPr/>
+          <p:nvPr/>
+        </p:nvSpPr>
+        <p:spPr>
+          <a:xfrm>
+            <a:off x="280000" y="3110000"/>
+            <a:ext cx="11632000" cy="760000"/>
+          </a:xfrm>
+          <a:prstGeom prst="rect">
+            <a:avLst/>
+          </a:prstGeom>
+          <a:solidFill>
+            <a:srgbClr val="F0F2F5"/>
+          </a:solidFill>
+          <a:ln>
+            <a:noFill/>
+          </a:ln>
+        </p:spPr>
+      </p:sp>
+      <p:sp>
+        <p:nvSpPr>
+          <p:cNvPr id="736" name="NumBg3"/>
+          <p:cNvSpPr/>
+          <p:nvPr/>
+        </p:nvSpPr>
+        <p:spPr>
+          <a:xfrm>
+            <a:off x="280000" y="3110000"/>
+            <a:ext cx="320000" cy="760000"/>
+          </a:xfrm>
+          <a:prstGeom prst="rect">
+            <a:avLst/>
+          </a:prstGeom>
+          <a:solidFill>
+            <a:srgbClr val="E60012"/>
+          </a:solidFill>
+          <a:ln>
+            <a:noFill/>
+          </a:ln>
+        </p:spPr>
+      </p:sp>
+      <p:sp>
+        <p:nvSpPr>
+          <p:cNvPr id="737" name="NumT3"/>
+          <p:cNvSpPr/>
+          <p:nvPr/>
+        </p:nvSpPr>
+        <p:spPr>
+          <a:xfrm>
+            <a:off x="280000" y="3110000"/>
+            <a:ext cx="320000" cy="760000"/>
+          </a:xfrm>
+          <a:prstGeom prst="rect">
+            <a:avLst/>
+          </a:prstGeom>
+          <a:noFill/>
+          <a:ln>
+            <a:noFill/>
+          </a:ln>
+        </p:spPr>
+        <p:txBody>
+          <a:bodyPr wrap="square" lIns="0" tIns="0" rIns="0" bIns="0" rtlCol="0" anchor="ctr"/>
+          <a:lstStyle/>
+          <a:p>
+            <a:pPr algn="ctr" indent="0" marL="0">
+              <a:buNone/>
+            </a:pPr>
+            <a:r>
+              <a:rPr lang="vi-VN" sz="1800" b="1" kern="0" dirty="0">
+                <a:solidFill>
+                  <a:srgbClr val="FFFFFF"/>
+                </a:solidFill>
+                <a:latin typeface="Calibri" pitchFamily="34" charset="0"/>
+                <a:ea typeface="Calibri" pitchFamily="34" charset="-122"/>
+                <a:cs typeface="Calibri" pitchFamily="34" charset="-120"/>
+              </a:rPr>
+              <a:t>3</a:t>
+            </a:r>
+          </a:p>
+        </p:txBody>
+      </p:sp>
+      <p:sp>
+        <p:nvSpPr>
+          <p:cNvPr id="738" name="Bar3"/>
+          <p:cNvSpPr/>
+          <p:nvPr/>
+        </p:nvSpPr>
+        <p:spPr>
+          <a:xfrm>
+            <a:off x="600000" y="3110000"/>
+            <a:ext cx="12000" cy="760000"/>
+          </a:xfrm>
+          <a:prstGeom prst="rect">
+            <a:avLst/>
+          </a:prstGeom>
+          <a:solidFill>
+            <a:srgbClr val="E60012"/>
+          </a:solidFill>
+          <a:ln>
+            <a:noFill/>
+          </a:ln>
+        </p:spPr>
+      </p:sp>
+      <p:sp>
+        <p:nvSpPr>
+          <p:cNvPr id="739" name="StepT3"/>
+          <p:cNvSpPr/>
+          <p:nvPr/>
+        </p:nvSpPr>
+        <p:spPr>
+          <a:xfrm>
+            <a:off x="692000" y="3110000"/>
+            <a:ext cx="3200000" cy="760000"/>
+          </a:xfrm>
+          <a:prstGeom prst="rect">
+            <a:avLst/>
+          </a:prstGeom>
+          <a:noFill/>
+          <a:ln>
+            <a:noFill/>
+          </a:ln>
+        </p:spPr>
+        <p:txBody>
+          <a:bodyPr wrap="square" lIns="0" tIns="0" rIns="0" bIns="0" rtlCol="0" anchor="ctr"/>
+          <a:lstStyle/>
+          <a:p>
+            <a:pPr algn="l" indent="0" marL="0">
+              <a:buNone/>
+            </a:pPr>
+            <a:r>
+              <a:rPr lang="vi-VN" sz="1200" b="1" kern="0" dirty="0">
+                <a:solidFill>
+                  <a:srgbClr val="1A1F36"/>
+                </a:solidFill>
+                <a:latin typeface="Calibri" pitchFamily="34" charset="0"/>
+                <a:ea typeface="Calibri" pitchFamily="34" charset="-122"/>
+                <a:cs typeface="Calibri" pitchFamily="34" charset="-120"/>
+              </a:rPr>
+              <a:t>KH KÝ CAM KẾT</a:t>
+            </a:r>
+          </a:p>
+        </p:txBody>
+      </p:sp>
+      <p:sp>
+        <p:nvSpPr>
+          <p:cNvPr id="740" name="StepD3"/>
+          <p:cNvSpPr/>
+          <p:nvPr/>
+        </p:nvSpPr>
+        <p:spPr>
+          <a:xfrm>
+            <a:off x="3952000" y="3110000"/>
+            <a:ext cx="7960000" cy="760000"/>
+          </a:xfrm>
+          <a:prstGeom prst="rect">
+            <a:avLst/>
+          </a:prstGeom>
+          <a:noFill/>
+          <a:ln>
+            <a:noFill/>
+          </a:ln>
+        </p:spPr>
+        <p:txBody>
+          <a:bodyPr wrap="square" lIns="0" tIns="0" rIns="0" bIns="0" rtlCol="0" anchor="ctr"/>
+          <a:lstStyle/>
+          <a:p>
+            <a:pPr algn="l" indent="0" marL="0">
+              <a:buNone/>
+            </a:pPr>
+            <a:r>
+              <a:rPr lang="vi-VN" sz="1080" b="0" kern="0" dirty="0">
+                <a:solidFill>
+                  <a:srgbClr val="2C2C2C"/>
+                </a:solidFill>
+                <a:latin typeface="Calibri" pitchFamily="34" charset="0"/>
+                <a:ea typeface="Calibri" pitchFamily="34" charset="-122"/>
+                <a:cs typeface="Calibri" pitchFamily="34" charset="-120"/>
+              </a:rPr>
+              <a:t>KH ký giấy yêu cầu chạy thử. ⚠ LƯU Ý: xe cũ KHÔNG có bảo hiểm vật chất – tổn thất trong lái thử KH chịu.</a:t>
+            </a:r>
+          </a:p>
+        </p:txBody>
+      </p:sp>
+      <p:sp>
+        <p:nvSpPr>
+          <p:cNvPr id="741" name="Sep3"/>
+          <p:cNvSpPr/>
+          <p:nvPr/>
+        </p:nvSpPr>
+        <p:spPr>
+          <a:xfrm>
+            <a:off x="280000" y="3860000"/>
+            <a:ext cx="11632000" cy="10000"/>
+          </a:xfrm>
+          <a:prstGeom prst="rect">
+            <a:avLst/>
+          </a:prstGeom>
+          <a:solidFill>
+            <a:srgbClr val="E0E3E8"/>
+          </a:solidFill>
+          <a:ln>
+            <a:noFill/>
+          </a:ln>
+        </p:spPr>
+      </p:sp>
+      <p:sp>
+        <p:nvSpPr>
+          <p:cNvPr id="742" name="RowBg4"/>
+          <p:cNvSpPr/>
+          <p:nvPr/>
+        </p:nvSpPr>
+        <p:spPr>
+          <a:xfrm>
+            <a:off x="280000" y="3870000"/>
+            <a:ext cx="11632000" cy="760000"/>
+          </a:xfrm>
+          <a:prstGeom prst="rect">
+            <a:avLst/>
+          </a:prstGeom>
+          <a:solidFill>
+            <a:srgbClr val="F0F2F5"/>
+          </a:solidFill>
+          <a:ln>
+            <a:noFill/>
+          </a:ln>
+        </p:spPr>
+      </p:sp>
+      <p:sp>
+        <p:nvSpPr>
+          <p:cNvPr id="743" name="NumBg4"/>
+          <p:cNvSpPr/>
+          <p:nvPr/>
+        </p:nvSpPr>
+        <p:spPr>
+          <a:xfrm>
+            <a:off x="280000" y="3870000"/>
+            <a:ext cx="320000" cy="760000"/>
+          </a:xfrm>
+          <a:prstGeom prst="rect">
+            <a:avLst/>
+          </a:prstGeom>
+          <a:solidFill>
+            <a:srgbClr val="1A1F36"/>
+          </a:solidFill>
+          <a:ln>
+            <a:noFill/>
+          </a:ln>
+        </p:spPr>
+      </p:sp>
+      <p:sp>
+        <p:nvSpPr>
+          <p:cNvPr id="744" name="NumT4"/>
+          <p:cNvSpPr/>
+          <p:nvPr/>
+        </p:nvSpPr>
+        <p:spPr>
+          <a:xfrm>
+            <a:off x="280000" y="3870000"/>
+            <a:ext cx="320000" cy="760000"/>
+          </a:xfrm>
+          <a:prstGeom prst="rect">
+            <a:avLst/>
+          </a:prstGeom>
+          <a:noFill/>
+          <a:ln>
+            <a:noFill/>
+          </a:ln>
+        </p:spPr>
+        <p:txBody>
+          <a:bodyPr wrap="square" lIns="0" tIns="0" rIns="0" bIns="0" rtlCol="0" anchor="ctr"/>
+          <a:lstStyle/>
+          <a:p>
+            <a:pPr algn="ctr" indent="0" marL="0">
+              <a:buNone/>
+            </a:pPr>
+            <a:r>
+              <a:rPr lang="vi-VN" sz="1800" b="1" kern="0" dirty="0">
+                <a:solidFill>
+                  <a:srgbClr val="FFFFFF"/>
+                </a:solidFill>
+                <a:latin typeface="Calibri" pitchFamily="34" charset="0"/>
+                <a:ea typeface="Calibri" pitchFamily="34" charset="-122"/>
+                <a:cs typeface="Calibri" pitchFamily="34" charset="-120"/>
+              </a:rPr>
+              <a:t>4</a:t>
+            </a:r>
+          </a:p>
+        </p:txBody>
+      </p:sp>
+      <p:sp>
+        <p:nvSpPr>
+          <p:cNvPr id="745" name="Bar4"/>
+          <p:cNvSpPr/>
+          <p:nvPr/>
+        </p:nvSpPr>
+        <p:spPr>
+          <a:xfrm>
+            <a:off x="600000" y="3870000"/>
+            <a:ext cx="12000" cy="760000"/>
+          </a:xfrm>
+          <a:prstGeom prst="rect">
+            <a:avLst/>
+          </a:prstGeom>
+          <a:solidFill>
+            <a:srgbClr val="1A1F36"/>
+          </a:solidFill>
+          <a:ln>
+            <a:noFill/>
+          </a:ln>
+        </p:spPr>
+      </p:sp>
+      <p:sp>
+        <p:nvSpPr>
+          <p:cNvPr id="746" name="StepT4"/>
+          <p:cNvSpPr/>
+          <p:nvPr/>
+        </p:nvSpPr>
+        <p:spPr>
+          <a:xfrm>
+            <a:off x="692000" y="3870000"/>
+            <a:ext cx="3200000" cy="760000"/>
+          </a:xfrm>
+          <a:prstGeom prst="rect">
+            <a:avLst/>
+          </a:prstGeom>
+          <a:noFill/>
+          <a:ln>
+            <a:noFill/>
+          </a:ln>
+        </p:spPr>
+        <p:txBody>
+          <a:bodyPr wrap="square" lIns="0" tIns="0" rIns="0" bIns="0" rtlCol="0" anchor="ctr"/>
+          <a:lstStyle/>
+          <a:p>
+            <a:pPr algn="l" indent="0" marL="0">
+              <a:buNone/>
+            </a:pPr>
+            <a:r>
+              <a:rPr lang="vi-VN" sz="1200" b="1" kern="0" dirty="0">
+                <a:solidFill>
+                  <a:srgbClr val="1A1F36"/>
+                </a:solidFill>
+                <a:latin typeface="Calibri" pitchFamily="34" charset="0"/>
+                <a:ea typeface="Calibri" pitchFamily="34" charset="-122"/>
+                <a:cs typeface="Calibri" pitchFamily="34" charset="-120"/>
+              </a:rPr>
+              <a:t>DẪN KH TRẢI NGHIỆM</a:t>
+            </a:r>
+          </a:p>
+        </p:txBody>
+      </p:sp>
+      <p:sp>
+        <p:nvSpPr>
+          <p:cNvPr id="747" name="StepD4"/>
+          <p:cNvSpPr/>
+          <p:nvPr/>
+        </p:nvSpPr>
+        <p:spPr>
+          <a:xfrm>
+            <a:off x="3952000" y="3870000"/>
+            <a:ext cx="7960000" cy="760000"/>
+          </a:xfrm>
+          <a:prstGeom prst="rect">
+            <a:avLst/>
+          </a:prstGeom>
+          <a:noFill/>
+          <a:ln>
+            <a:noFill/>
+          </a:ln>
+        </p:spPr>
+        <p:txBody>
+          <a:bodyPr wrap="square" lIns="0" tIns="0" rIns="0" bIns="0" rtlCol="0" anchor="ctr"/>
+          <a:lstStyle/>
+          <a:p>
+            <a:pPr algn="l" indent="0" marL="0">
+              <a:buNone/>
+            </a:pPr>
+            <a:r>
+              <a:rPr lang="vi-VN" sz="1080" b="0" kern="0" dirty="0">
+                <a:solidFill>
+                  <a:srgbClr val="2C2C2C"/>
+                </a:solidFill>
+                <a:latin typeface="Calibri" pitchFamily="34" charset="0"/>
+                <a:ea typeface="Calibri" pitchFamily="34" charset="-122"/>
+                <a:cs typeface="Calibri" pitchFamily="34" charset="-120"/>
+              </a:rPr>
+              <a:t>Chạy đường thực tế. Giới thiệu: hệ thống âm thanh, điều hòa, cảm giác lái, phanh, khả năng tăng tốc.</a:t>
+            </a:r>
+          </a:p>
+        </p:txBody>
+      </p:sp>
+      <p:sp>
+        <p:nvSpPr>
+          <p:cNvPr id="748" name="Sep4"/>
+          <p:cNvSpPr/>
+          <p:nvPr/>
+        </p:nvSpPr>
+        <p:spPr>
+          <a:xfrm>
+            <a:off x="280000" y="4620000"/>
+            <a:ext cx="11632000" cy="10000"/>
+          </a:xfrm>
+          <a:prstGeom prst="rect">
+            <a:avLst/>
+          </a:prstGeom>
+          <a:solidFill>
+            <a:srgbClr val="E0E3E8"/>
+          </a:solidFill>
+          <a:ln>
+            <a:noFill/>
+          </a:ln>
+        </p:spPr>
+      </p:sp>
+      <p:sp>
+        <p:nvSpPr>
+          <p:cNvPr id="749" name="RowBg5"/>
+          <p:cNvSpPr/>
+          <p:nvPr/>
+        </p:nvSpPr>
+        <p:spPr>
+          <a:xfrm>
+            <a:off x="280000" y="4630000"/>
+            <a:ext cx="11632000" cy="760000"/>
+          </a:xfrm>
+          <a:prstGeom prst="rect">
+            <a:avLst/>
+          </a:prstGeom>
+          <a:solidFill>
+            <a:srgbClr val="F0F2F5"/>
+          </a:solidFill>
+          <a:ln>
+            <a:noFill/>
+          </a:ln>
+        </p:spPr>
+      </p:sp>
+      <p:sp>
+        <p:nvSpPr>
+          <p:cNvPr id="750" name="NumBg5"/>
+          <p:cNvSpPr/>
+          <p:nvPr/>
+        </p:nvSpPr>
+        <p:spPr>
+          <a:xfrm>
+            <a:off x="280000" y="4630000"/>
+            <a:ext cx="320000" cy="760000"/>
+          </a:xfrm>
+          <a:prstGeom prst="rect">
+            <a:avLst/>
+          </a:prstGeom>
+          <a:solidFill>
+            <a:srgbClr val="E60012"/>
+          </a:solidFill>
+          <a:ln>
+            <a:noFill/>
+          </a:ln>
+        </p:spPr>
+      </p:sp>
+      <p:sp>
+        <p:nvSpPr>
+          <p:cNvPr id="751" name="NumT5"/>
+          <p:cNvSpPr/>
+          <p:nvPr/>
+        </p:nvSpPr>
+        <p:spPr>
+          <a:xfrm>
+            <a:off x="280000" y="4630000"/>
+            <a:ext cx="320000" cy="760000"/>
+          </a:xfrm>
+          <a:prstGeom prst="rect">
+            <a:avLst/>
+          </a:prstGeom>
+          <a:noFill/>
+          <a:ln>
+            <a:noFill/>
+          </a:ln>
+        </p:spPr>
+        <p:txBody>
+          <a:bodyPr wrap="square" lIns="0" tIns="0" rIns="0" bIns="0" rtlCol="0" anchor="ctr"/>
+          <a:lstStyle/>
+          <a:p>
+            <a:pPr algn="ctr" indent="0" marL="0">
+              <a:buNone/>
+            </a:pPr>
+            <a:r>
+              <a:rPr lang="vi-VN" sz="1800" b="1" kern="0" dirty="0">
+                <a:solidFill>
+                  <a:srgbClr val="FFFFFF"/>
+                </a:solidFill>
+                <a:latin typeface="Calibri" pitchFamily="34" charset="0"/>
+                <a:ea typeface="Calibri" pitchFamily="34" charset="-122"/>
+                <a:cs typeface="Calibri" pitchFamily="34" charset="-120"/>
+              </a:rPr>
+              <a:t>5</a:t>
+            </a:r>
+          </a:p>
+        </p:txBody>
+      </p:sp>
+      <p:sp>
+        <p:nvSpPr>
+          <p:cNvPr id="752" name="Bar5"/>
+          <p:cNvSpPr/>
+          <p:nvPr/>
+        </p:nvSpPr>
+        <p:spPr>
+          <a:xfrm>
+            <a:off x="600000" y="4630000"/>
+            <a:ext cx="12000" cy="760000"/>
+          </a:xfrm>
+          <a:prstGeom prst="rect">
+            <a:avLst/>
+          </a:prstGeom>
+          <a:solidFill>
+            <a:srgbClr val="E60012"/>
+          </a:solidFill>
+          <a:ln>
+            <a:noFill/>
+          </a:ln>
+        </p:spPr>
+      </p:sp>
+      <p:sp>
+        <p:nvSpPr>
+          <p:cNvPr id="753" name="StepT5"/>
+          <p:cNvSpPr/>
+          <p:nvPr/>
+        </p:nvSpPr>
+        <p:spPr>
+          <a:xfrm>
+            <a:off x="692000" y="4630000"/>
+            <a:ext cx="3200000" cy="760000"/>
+          </a:xfrm>
+          <a:prstGeom prst="rect">
+            <a:avLst/>
+          </a:prstGeom>
+          <a:noFill/>
+          <a:ln>
+            <a:noFill/>
+          </a:ln>
+        </p:spPr>
+        <p:txBody>
+          <a:bodyPr wrap="square" lIns="0" tIns="0" rIns="0" bIns="0" rtlCol="0" anchor="ctr"/>
+          <a:lstStyle/>
+          <a:p>
+            <a:pPr algn="l" indent="0" marL="0">
+              <a:buNone/>
+            </a:pPr>
+            <a:r>
+              <a:rPr lang="vi-VN" sz="1200" b="1" kern="0" dirty="0">
+                <a:solidFill>
+                  <a:srgbClr val="1A1F36"/>
+                </a:solidFill>
+                <a:latin typeface="Calibri" pitchFamily="34" charset="0"/>
+                <a:ea typeface="Calibri" pitchFamily="34" charset="-122"/>
+                <a:cs typeface="Calibri" pitchFamily="34" charset="-120"/>
+              </a:rPr>
+              <a:t>KẾT THÚC &amp; CHỐT DEAL</a:t>
+            </a:r>
+          </a:p>
+        </p:txBody>
+      </p:sp>
+      <p:sp>
+        <p:nvSpPr>
+          <p:cNvPr id="754" name="StepD5"/>
+          <p:cNvSpPr/>
+          <p:nvPr/>
+        </p:nvSpPr>
+        <p:spPr>
+          <a:xfrm>
+            <a:off x="3952000" y="4630000"/>
+            <a:ext cx="7960000" cy="760000"/>
+          </a:xfrm>
+          <a:prstGeom prst="rect">
+            <a:avLst/>
+          </a:prstGeom>
+          <a:noFill/>
+          <a:ln>
+            <a:noFill/>
+          </a:ln>
+        </p:spPr>
+        <p:txBody>
+          <a:bodyPr wrap="square" lIns="0" tIns="0" rIns="0" bIns="0" rtlCol="0" anchor="ctr"/>
+          <a:lstStyle/>
+          <a:p>
+            <a:pPr algn="l" indent="0" marL="0">
+              <a:buNone/>
+            </a:pPr>
+            <a:r>
+              <a:rPr lang="vi-VN" sz="1080" b="0" kern="0" dirty="0">
+                <a:solidFill>
+                  <a:srgbClr val="2C2C2C"/>
+                </a:solidFill>
+                <a:latin typeface="Calibri" pitchFamily="34" charset="0"/>
+                <a:ea typeface="Calibri" pitchFamily="34" charset="-122"/>
+                <a:cs typeface="Calibri" pitchFamily="34" charset="-120"/>
+              </a:rPr>
+              <a:t>Hỏi cảm nhận ngay sau khi lái. Giải đáp thắc mắc. Đề nghị ký hợp đồng – xác định ngày &amp; giờ thanh toán.</a:t>
+            </a:r>
+          </a:p>
+        </p:txBody>
+      </p:sp>
+      <p:sp>
+        <p:nvSpPr>
+          <p:cNvPr id="755" name="Sep5"/>
+          <p:cNvSpPr/>
+          <p:nvPr/>
+        </p:nvSpPr>
+        <p:spPr>
+          <a:xfrm>
+            <a:off x="280000" y="5380000"/>
+            <a:ext cx="11632000" cy="10000"/>
+          </a:xfrm>
+          <a:prstGeom prst="rect">
+            <a:avLst/>
+          </a:prstGeom>
+          <a:solidFill>
+            <a:srgbClr val="E0E3E8"/>
+          </a:solidFill>
+          <a:ln>
+            <a:noFill/>
+          </a:ln>
+        </p:spPr>
+      </p:sp>
+      <p:sp>
+        <p:nvSpPr>
+          <p:cNvPr id="756" name="FBar"/>
+          <p:cNvSpPr/>
+          <p:nvPr/>
+        </p:nvSpPr>
+        <p:spPr>
+          <a:xfrm>
+            <a:off x="365760" y="6446520"/>
+            <a:ext cx="91440" cy="274320"/>
+          </a:xfrm>
+          <a:prstGeom prst="rect">
+            <a:avLst/>
+          </a:prstGeom>
+          <a:solidFill>
+            <a:srgbClr val="E60012"/>
+          </a:solidFill>
+          <a:ln>
+            <a:noFill/>
+          </a:ln>
+        </p:spPr>
+      </p:sp>
+      <p:sp>
+        <p:nvSpPr>
+          <p:cNvPr id="757" name="FTxt"/>
+          <p:cNvSpPr/>
+          <p:nvPr/>
+        </p:nvSpPr>
+        <p:spPr>
+          <a:xfrm>
+            <a:off x="548640" y="6446520"/>
+            <a:ext cx="7315200" cy="274320"/>
+          </a:xfrm>
+          <a:prstGeom prst="rect">
+            <a:avLst/>
+          </a:prstGeom>
+          <a:noFill/>
+          <a:ln>
+            <a:noFill/>
+          </a:ln>
+        </p:spPr>
+        <p:txBody>
+          <a:bodyPr wrap="square" lIns="0" tIns="0" rIns="0" bIns="0" rtlCol="0" anchor="ctr"/>
+          <a:lstStyle/>
+          <a:p>
+            <a:pPr algn="l" indent="0" marL="0">
+              <a:buNone/>
+            </a:pPr>
+            <a:r>
+              <a:rPr lang="vi-VN" sz="1000" b="0" kern="0" dirty="0">
+                <a:solidFill>
+                  <a:srgbClr val="4A4A4A"/>
+                </a:solidFill>
+                <a:latin typeface="Calibri" pitchFamily="34" charset="0"/>
+                <a:ea typeface="Calibri" pitchFamily="34" charset="-122"/>
+                <a:cs typeface="Calibri" pitchFamily="34" charset="-120"/>
+              </a:rPr>
+              <a:t>MITSUBISHI TÂY NINH  ·  Kỹ năng Bán hàng Xe đã qua sử dụng</a:t>
+            </a:r>
+          </a:p>
+        </p:txBody>
+      </p:sp>
+      <p:sp>
+        <p:nvSpPr>
+          <p:cNvPr id="758" name="FPg"/>
+          <p:cNvSpPr/>
+          <p:nvPr/>
+        </p:nvSpPr>
+        <p:spPr>
+          <a:xfrm>
+            <a:off x="11338560" y="6446520"/>
+            <a:ext cx="731520" cy="274320"/>
+          </a:xfrm>
+          <a:prstGeom prst="rect">
+            <a:avLst/>
+          </a:prstGeom>
+          <a:noFill/>
+          <a:ln>
+            <a:noFill/>
+          </a:ln>
+        </p:spPr>
+        <p:txBody>
+          <a:bodyPr wrap="square" lIns="0" tIns="0" rIns="0" bIns="0" rtlCol="0" anchor="ctr"/>
+          <a:lstStyle/>
+          <a:p>
+            <a:pPr algn="r" indent="0" marL="0">
+              <a:buNone/>
+            </a:pPr>
+            <a:r>
+              <a:rPr lang="vi-VN" sz="1000" b="0" kern="0" dirty="0">
+                <a:solidFill>
+                  <a:srgbClr val="B8BDC4"/>
+                </a:solidFill>
+                <a:latin typeface="Calibri" pitchFamily="34" charset="0"/>
+                <a:ea typeface="Calibri" pitchFamily="34" charset="-122"/>
+                <a:cs typeface="Calibri" pitchFamily="34" charset="-120"/>
+              </a:rPr>
+              <a:t>22 / 30</a:t>
+            </a:r>
+          </a:p>
+        </p:txBody>
+      </p:sp>
+    </p:spTree>
+  </p:cSld>
+  <p:clrMapOvr>
+    <a:masterClrMapping/>
+  </p:clrMapOvr>
+</p:sld>
+</file>
+
+<file path=ppt/slides/slide23.xml><?xml version="1.0" encoding="utf-8"?>
 <p:sld xmlns:a="http://schemas.openxmlformats.org/drawingml/2006/main" xmlns:r="http://schemas.openxmlformats.org/officeDocument/2006/relationships" xmlns:p="http://schemas.openxmlformats.org/presentationml/2006/main">
   <p:cSld name="Slide 22">
     <p:bg>
@@ -23741,7 +25065,7 @@
 </p:sld>
 </file>
 
-<file path=ppt/slides/slide23.xml><?xml version="1.0" encoding="utf-8"?>
+<file path=ppt/slides/slide24.xml><?xml version="1.0" encoding="utf-8"?>
 <p:sld xmlns:a="http://schemas.openxmlformats.org/drawingml/2006/main" xmlns:r="http://schemas.openxmlformats.org/officeDocument/2006/relationships" xmlns:p="http://schemas.openxmlformats.org/presentationml/2006/main">
   <p:cSld name="Slide 23">
     <p:bg>
@@ -25659,7 +26983,7 @@
 </p:sld>
 </file>
 
-<file path=ppt/slides/slide24.xml><?xml version="1.0" encoding="utf-8"?>
+<file path=ppt/slides/slide25.xml><?xml version="1.0" encoding="utf-8"?>
 <p:sld xmlns:a="http://schemas.openxmlformats.org/drawingml/2006/main" xmlns:r="http://schemas.openxmlformats.org/officeDocument/2006/relationships" xmlns:p="http://schemas.openxmlformats.org/presentationml/2006/main">
   <p:cSld name="Slide 24">
     <p:bg>
@@ -28050,1333 +29374,6 @@
 </p:sld>
 </file>
 
-<file path=ppt/slides/slide25.xml><?xml version="1.0" encoding="utf-8"?>
-<p:sld xmlns:a="http://schemas.openxmlformats.org/drawingml/2006/main" xmlns:p="http://schemas.openxmlformats.org/presentationml/2006/main" xmlns:r="http://schemas.openxmlformats.org/officeDocument/2006/relationships">
-  <p:cSld>
-    <p:spTree>
-      <p:nvGrpSpPr>
-        <p:cNvPr id="1" name=""/>
-        <p:cNvGrpSpPr/>
-        <p:nvPr/>
-      </p:nvGrpSpPr>
-      <p:grpSpPr/>
-      <p:sp>
-        <p:nvSpPr>
-          <p:cNvPr id="101" name="RedBar"/>
-          <p:cNvSpPr/>
-          <p:nvPr/>
-        </p:nvSpPr>
-        <p:spPr>
-          <a:xfrm>
-            <a:off x="548640" y="411480"/>
-            <a:ext cx="457200" cy="54864"/>
-          </a:xfrm>
-          <a:prstGeom prst="rect">
-            <a:avLst/>
-          </a:prstGeom>
-          <a:solidFill>
-            <a:srgbClr val="E60012"/>
-          </a:solidFill>
-          <a:ln>
-            <a:noFill/>
-          </a:ln>
-        </p:spPr>
-      </p:sp>
-      <p:sp>
-        <p:nvSpPr>
-          <p:cNvPr id="102" name="PhanLbl"/>
-          <p:cNvSpPr/>
-          <p:nvPr/>
-        </p:nvSpPr>
-        <p:spPr>
-          <a:xfrm>
-            <a:off x="1097280" y="320040"/>
-            <a:ext cx="9144000" cy="274320"/>
-          </a:xfrm>
-          <a:prstGeom prst="rect">
-            <a:avLst/>
-          </a:prstGeom>
-          <a:noFill/>
-          <a:ln>
-            <a:noFill/>
-          </a:ln>
-        </p:spPr>
-        <p:txBody>
-          <a:bodyPr wrap="square" lIns="0" tIns="0" rIns="0" bIns="0" rtlCol="0" anchor="ctr"/>
-          <a:lstStyle/>
-          <a:p>
-            <a:pPr algn="l" indent="0" marL="0">
-              <a:buNone/>
-            </a:pPr>
-            <a:r>
-              <a:rPr lang="vi-VN" sz="1200" b="1" i="0" kern="0" dirty="0">
-                <a:solidFill>
-                  <a:srgbClr val="E60012"/>
-                </a:solidFill>
-                <a:latin typeface="Calibri" pitchFamily="34" charset="0"/>
-                <a:ea typeface="Calibri" pitchFamily="34" charset="-122"/>
-                <a:cs typeface="Calibri" pitchFamily="34" charset="-120"/>
-              </a:rPr>
-              <a:t>PHẦN 05</a:t>
-            </a:r>
-          </a:p>
-        </p:txBody>
-      </p:sp>
-      <p:sp>
-        <p:nvSpPr>
-          <p:cNvPr id="103" name="Title"/>
-          <p:cNvSpPr/>
-          <p:nvPr/>
-        </p:nvSpPr>
-        <p:spPr>
-          <a:xfrm>
-            <a:off x="548640" y="580000"/>
-            <a:ext cx="10972800" cy="620000"/>
-          </a:xfrm>
-          <a:prstGeom prst="rect">
-            <a:avLst/>
-          </a:prstGeom>
-          <a:noFill/>
-          <a:ln>
-            <a:noFill/>
-          </a:ln>
-        </p:spPr>
-        <p:txBody>
-          <a:bodyPr wrap="square" lIns="0" tIns="0" rIns="0" bIns="0" rtlCol="0" anchor="ctr"/>
-          <a:lstStyle/>
-          <a:p>
-            <a:pPr algn="l" indent="0" marL="0">
-              <a:buNone/>
-            </a:pPr>
-            <a:r>
-              <a:rPr lang="vi-VN" sz="2800" b="1" i="0" kern="0" dirty="0">
-                <a:solidFill>
-                  <a:srgbClr val="1A1F36"/>
-                </a:solidFill>
-                <a:latin typeface="Calibri" pitchFamily="34" charset="0"/>
-                <a:ea typeface="Calibri" pitchFamily="34" charset="-122"/>
-                <a:cs typeface="Calibri" pitchFamily="34" charset="-120"/>
-              </a:rPr>
-              <a:t>Quy trình lái thử xe</a:t>
-            </a:r>
-          </a:p>
-        </p:txBody>
-      </p:sp>
-      <p:sp>
-        <p:nvSpPr>
-          <p:cNvPr id="104" name="Sub"/>
-          <p:cNvSpPr/>
-          <p:nvPr/>
-        </p:nvSpPr>
-        <p:spPr>
-          <a:xfrm>
-            <a:off x="548640" y="1200000"/>
-            <a:ext cx="10972800" cy="310000"/>
-          </a:xfrm>
-          <a:prstGeom prst="rect">
-            <a:avLst/>
-          </a:prstGeom>
-          <a:noFill/>
-          <a:ln>
-            <a:noFill/>
-          </a:ln>
-        </p:spPr>
-        <p:txBody>
-          <a:bodyPr wrap="square" lIns="0" tIns="0" rIns="0" bIns="0" rtlCol="0" anchor="ctr"/>
-          <a:lstStyle/>
-          <a:p>
-            <a:pPr algn="l" indent="0" marL="0">
-              <a:buNone/>
-            </a:pPr>
-            <a:r>
-              <a:rPr lang="vi-VN" sz="1200" b="0" i="0" kern="0" dirty="0">
-                <a:solidFill>
-                  <a:srgbClr val="4A4A4A"/>
-                </a:solidFill>
-                <a:latin typeface="Calibri" pitchFamily="34" charset="0"/>
-                <a:ea typeface="Calibri" pitchFamily="34" charset="-122"/>
-                <a:cs typeface="Calibri" pitchFamily="34" charset="-120"/>
-              </a:rPr>
-              <a:t>Để KH trải nghiệm trực tiếp – lái thử đúng cách tăng tỷ lệ chốt deal</a:t>
-            </a:r>
-          </a:p>
-        </p:txBody>
-      </p:sp>
-      <p:sp>
-        <p:nvSpPr>
-          <p:cNvPr id="105" name="AccLine"/>
-          <p:cNvSpPr/>
-          <p:nvPr/>
-        </p:nvSpPr>
-        <p:spPr>
-          <a:xfrm>
-            <a:off x="548640" y="1520000"/>
-            <a:ext cx="10972800" cy="18000"/>
-          </a:xfrm>
-          <a:prstGeom prst="rect">
-            <a:avLst/>
-          </a:prstGeom>
-          <a:solidFill>
-            <a:srgbClr val="E8EBF0"/>
-          </a:solidFill>
-          <a:ln>
-            <a:noFill/>
-          </a:ln>
-        </p:spPr>
-      </p:sp>
-      <p:sp>
-        <p:nvSpPr>
-          <p:cNvPr id="106" name="CardBg"/>
-          <p:cNvSpPr/>
-          <p:nvPr/>
-        </p:nvSpPr>
-        <p:spPr>
-          <a:xfrm>
-            <a:off x="300000" y="1610000"/>
-            <a:ext cx="2174400" cy="4560000"/>
-          </a:xfrm>
-          <a:prstGeom prst="roundRect">
-            <a:avLst>
-              <a:gd name="adj" fmla="val 16667"/>
-            </a:avLst>
-          </a:prstGeom>
-          <a:solidFill>
-            <a:srgbClr val="FFFFFF"/>
-          </a:solidFill>
-          <a:ln w="9144">
-            <a:solidFill>
-              <a:srgbClr val="E8EBF0"/>
-            </a:solidFill>
-          </a:ln>
-        </p:spPr>
-      </p:sp>
-      <p:sp>
-        <p:nvSpPr>
-          <p:cNvPr id="107" name="CardHdr"/>
-          <p:cNvSpPr/>
-          <p:nvPr/>
-        </p:nvSpPr>
-        <p:spPr>
-          <a:xfrm>
-            <a:off x="300000" y="1610000"/>
-            <a:ext cx="2174400" cy="460000"/>
-          </a:xfrm>
-          <a:prstGeom prst="rect">
-            <a:avLst/>
-          </a:prstGeom>
-          <a:solidFill>
-            <a:srgbClr val="E60012"/>
-          </a:solidFill>
-          <a:ln>
-            <a:noFill/>
-          </a:ln>
-        </p:spPr>
-      </p:sp>
-      <p:sp>
-        <p:nvSpPr>
-          <p:cNvPr id="108" name="Cir"/>
-          <p:cNvSpPr/>
-          <p:nvPr/>
-        </p:nvSpPr>
-        <p:spPr>
-          <a:xfrm>
-            <a:off x="400000" y="1670000"/>
-            <a:ext cx="340000" cy="340000"/>
-          </a:xfrm>
-          <a:prstGeom prst="ellipse">
-            <a:avLst/>
-          </a:prstGeom>
-          <a:solidFill>
-            <a:srgbClr val="FFFFFF"/>
-          </a:solidFill>
-          <a:ln>
-            <a:noFill/>
-          </a:ln>
-        </p:spPr>
-      </p:sp>
-      <p:sp>
-        <p:nvSpPr>
-          <p:cNvPr id="109" name="CirN"/>
-          <p:cNvSpPr/>
-          <p:nvPr/>
-        </p:nvSpPr>
-        <p:spPr>
-          <a:xfrm>
-            <a:off x="400000" y="1670000"/>
-            <a:ext cx="340000" cy="340000"/>
-          </a:xfrm>
-          <a:prstGeom prst="rect">
-            <a:avLst/>
-          </a:prstGeom>
-          <a:noFill/>
-          <a:ln>
-            <a:noFill/>
-          </a:ln>
-        </p:spPr>
-        <p:txBody>
-          <a:bodyPr wrap="square" lIns="0" tIns="0" rIns="0" bIns="0" rtlCol="0" anchor="ctr"/>
-          <a:lstStyle/>
-          <a:p>
-            <a:pPr algn="c" indent="0" marL="0">
-              <a:buNone/>
-            </a:pPr>
-            <a:r>
-              <a:rPr lang="vi-VN" sz="1600" b="1" i="0" kern="0" dirty="0">
-                <a:solidFill>
-                  <a:srgbClr val="E60012"/>
-                </a:solidFill>
-                <a:latin typeface="Calibri" pitchFamily="34" charset="0"/>
-                <a:ea typeface="Calibri" pitchFamily="34" charset="-122"/>
-                <a:cs typeface="Calibri" pitchFamily="34" charset="-120"/>
-              </a:rPr>
-              <a:t>1</a:t>
-            </a:r>
-          </a:p>
-        </p:txBody>
-      </p:sp>
-      <p:sp>
-        <p:nvSpPr>
-          <p:cNvPr id="110" name="HdrTxt"/>
-          <p:cNvSpPr/>
-          <p:nvPr/>
-        </p:nvSpPr>
-        <p:spPr>
-          <a:xfrm>
-            <a:off x="820000" y="1610000"/>
-            <a:ext cx="1614400" cy="460000"/>
-          </a:xfrm>
-          <a:prstGeom prst="rect">
-            <a:avLst/>
-          </a:prstGeom>
-          <a:noFill/>
-          <a:ln>
-            <a:noFill/>
-          </a:ln>
-        </p:spPr>
-        <p:txBody>
-          <a:bodyPr wrap="square" lIns="0" tIns="0" rIns="0" bIns="0" rtlCol="0" anchor="ctr"/>
-          <a:lstStyle/>
-          <a:p>
-            <a:pPr algn="l" indent="0" marL="0">
-              <a:buNone/>
-            </a:pPr>
-            <a:r>
-              <a:rPr lang="vi-VN" sz="1050" b="1" i="0" kern="0" dirty="0">
-                <a:solidFill>
-                  <a:srgbClr val="FFFFFF"/>
-                </a:solidFill>
-                <a:latin typeface="Calibri" pitchFamily="34" charset="0"/>
-                <a:ea typeface="Calibri" pitchFamily="34" charset="-122"/>
-                <a:cs typeface="Calibri" pitchFamily="34" charset="-120"/>
-              </a:rPr>
-              <a:t>ĐÁNH GIÁ
-THỜI ĐIỂM</a:t>
-            </a:r>
-          </a:p>
-        </p:txBody>
-      </p:sp>
-      <p:sp>
-        <p:nvSpPr>
-          <p:cNvPr id="111" name="Desc"/>
-          <p:cNvSpPr/>
-          <p:nvPr/>
-        </p:nvSpPr>
-        <p:spPr>
-          <a:xfrm>
-            <a:off x="380000" y="2110000"/>
-            <a:ext cx="2014400" cy="4020000"/>
-          </a:xfrm>
-          <a:prstGeom prst="rect">
-            <a:avLst/>
-          </a:prstGeom>
-          <a:noFill/>
-          <a:ln>
-            <a:noFill/>
-          </a:ln>
-        </p:spPr>
-        <p:txBody>
-          <a:bodyPr wrap="square" lIns="0" tIns="0" rIns="0" bIns="0" rtlCol="0" anchor="t"/>
-          <a:lstStyle/>
-          <a:p>
-            <a:pPr algn="l" indent="0" marL="0">
-              <a:buNone/>
-            </a:pPr>
-            <a:r>
-              <a:rPr lang="vi-VN" sz="1000" b="0" i="0" kern="0" dirty="0">
-                <a:solidFill>
-                  <a:srgbClr val="2C2C2C"/>
-                </a:solidFill>
-                <a:latin typeface="Calibri" pitchFamily="34" charset="0"/>
-                <a:ea typeface="Calibri" pitchFamily="34" charset="-122"/>
-                <a:cs typeface="Calibri" pitchFamily="34" charset="-120"/>
-              </a:rPr>
-              <a:t>KH đã xem xe và thích – muốn lái thử để quyết định cuối. Không cho lái thử quá sớm khi KH chưa có hứng thú rõ ràng.</a:t>
-            </a:r>
-          </a:p>
-        </p:txBody>
-      </p:sp>
-      <p:sp>
-        <p:nvSpPr>
-          <p:cNvPr id="112" name="Arrow"/>
-          <p:cNvSpPr/>
-          <p:nvPr/>
-        </p:nvSpPr>
-        <p:spPr>
-          <a:xfrm>
-            <a:off x="2454400" y="3780000"/>
-            <a:ext cx="220000" cy="220000"/>
-          </a:xfrm>
-          <a:prstGeom prst="rightArrow">
-            <a:avLst/>
-          </a:prstGeom>
-          <a:solidFill>
-            <a:srgbClr val="B8BDC4"/>
-          </a:solidFill>
-          <a:ln>
-            <a:noFill/>
-          </a:ln>
-        </p:spPr>
-      </p:sp>
-      <p:sp>
-        <p:nvSpPr>
-          <p:cNvPr id="113" name="CardBg"/>
-          <p:cNvSpPr/>
-          <p:nvPr/>
-        </p:nvSpPr>
-        <p:spPr>
-          <a:xfrm>
-            <a:off x="2654400" y="1610000"/>
-            <a:ext cx="2174400" cy="4560000"/>
-          </a:xfrm>
-          <a:prstGeom prst="roundRect">
-            <a:avLst>
-              <a:gd name="adj" fmla="val 16667"/>
-            </a:avLst>
-          </a:prstGeom>
-          <a:solidFill>
-            <a:srgbClr val="FFFFFF"/>
-          </a:solidFill>
-          <a:ln w="9144">
-            <a:solidFill>
-              <a:srgbClr val="E8EBF0"/>
-            </a:solidFill>
-          </a:ln>
-        </p:spPr>
-      </p:sp>
-      <p:sp>
-        <p:nvSpPr>
-          <p:cNvPr id="114" name="CardHdr"/>
-          <p:cNvSpPr/>
-          <p:nvPr/>
-        </p:nvSpPr>
-        <p:spPr>
-          <a:xfrm>
-            <a:off x="2654400" y="1610000"/>
-            <a:ext cx="2174400" cy="460000"/>
-          </a:xfrm>
-          <a:prstGeom prst="rect">
-            <a:avLst/>
-          </a:prstGeom>
-          <a:solidFill>
-            <a:srgbClr val="1A1F36"/>
-          </a:solidFill>
-          <a:ln>
-            <a:noFill/>
-          </a:ln>
-        </p:spPr>
-      </p:sp>
-      <p:sp>
-        <p:nvSpPr>
-          <p:cNvPr id="115" name="Cir"/>
-          <p:cNvSpPr/>
-          <p:nvPr/>
-        </p:nvSpPr>
-        <p:spPr>
-          <a:xfrm>
-            <a:off x="2754400" y="1670000"/>
-            <a:ext cx="340000" cy="340000"/>
-          </a:xfrm>
-          <a:prstGeom prst="ellipse">
-            <a:avLst/>
-          </a:prstGeom>
-          <a:solidFill>
-            <a:srgbClr val="FFFFFF"/>
-          </a:solidFill>
-          <a:ln>
-            <a:noFill/>
-          </a:ln>
-        </p:spPr>
-      </p:sp>
-      <p:sp>
-        <p:nvSpPr>
-          <p:cNvPr id="116" name="CirN"/>
-          <p:cNvSpPr/>
-          <p:nvPr/>
-        </p:nvSpPr>
-        <p:spPr>
-          <a:xfrm>
-            <a:off x="2754400" y="1670000"/>
-            <a:ext cx="340000" cy="340000"/>
-          </a:xfrm>
-          <a:prstGeom prst="rect">
-            <a:avLst/>
-          </a:prstGeom>
-          <a:noFill/>
-          <a:ln>
-            <a:noFill/>
-          </a:ln>
-        </p:spPr>
-        <p:txBody>
-          <a:bodyPr wrap="square" lIns="0" tIns="0" rIns="0" bIns="0" rtlCol="0" anchor="ctr"/>
-          <a:lstStyle/>
-          <a:p>
-            <a:pPr algn="c" indent="0" marL="0">
-              <a:buNone/>
-            </a:pPr>
-            <a:r>
-              <a:rPr lang="vi-VN" sz="1600" b="1" i="0" kern="0" dirty="0">
-                <a:solidFill>
-                  <a:srgbClr val="1A1F36"/>
-                </a:solidFill>
-                <a:latin typeface="Calibri" pitchFamily="34" charset="0"/>
-                <a:ea typeface="Calibri" pitchFamily="34" charset="-122"/>
-                <a:cs typeface="Calibri" pitchFamily="34" charset="-120"/>
-              </a:rPr>
-              <a:t>2</a:t>
-            </a:r>
-          </a:p>
-        </p:txBody>
-      </p:sp>
-      <p:sp>
-        <p:nvSpPr>
-          <p:cNvPr id="117" name="HdrTxt"/>
-          <p:cNvSpPr/>
-          <p:nvPr/>
-        </p:nvSpPr>
-        <p:spPr>
-          <a:xfrm>
-            <a:off x="3174400" y="1610000"/>
-            <a:ext cx="1614400" cy="460000"/>
-          </a:xfrm>
-          <a:prstGeom prst="rect">
-            <a:avLst/>
-          </a:prstGeom>
-          <a:noFill/>
-          <a:ln>
-            <a:noFill/>
-          </a:ln>
-        </p:spPr>
-        <p:txBody>
-          <a:bodyPr wrap="square" lIns="0" tIns="0" rIns="0" bIns="0" rtlCol="0" anchor="ctr"/>
-          <a:lstStyle/>
-          <a:p>
-            <a:pPr algn="l" indent="0" marL="0">
-              <a:buNone/>
-            </a:pPr>
-            <a:r>
-              <a:rPr lang="vi-VN" sz="1050" b="1" i="0" kern="0" dirty="0">
-                <a:solidFill>
-                  <a:srgbClr val="FFFFFF"/>
-                </a:solidFill>
-                <a:latin typeface="Calibri" pitchFamily="34" charset="0"/>
-                <a:ea typeface="Calibri" pitchFamily="34" charset="-122"/>
-                <a:cs typeface="Calibri" pitchFamily="34" charset="-120"/>
-              </a:rPr>
-              <a:t>LÀM GIẤY
-ĐỀ XUẤT</a:t>
-            </a:r>
-          </a:p>
-        </p:txBody>
-      </p:sp>
-      <p:sp>
-        <p:nvSpPr>
-          <p:cNvPr id="118" name="Desc"/>
-          <p:cNvSpPr/>
-          <p:nvPr/>
-        </p:nvSpPr>
-        <p:spPr>
-          <a:xfrm>
-            <a:off x="2734400" y="2110000"/>
-            <a:ext cx="2014400" cy="4020000"/>
-          </a:xfrm>
-          <a:prstGeom prst="rect">
-            <a:avLst/>
-          </a:prstGeom>
-          <a:noFill/>
-          <a:ln>
-            <a:noFill/>
-          </a:ln>
-        </p:spPr>
-        <p:txBody>
-          <a:bodyPr wrap="square" lIns="0" tIns="0" rIns="0" bIns="0" rtlCol="0" anchor="t"/>
-          <a:lstStyle/>
-          <a:p>
-            <a:pPr algn="l" indent="0" marL="0">
-              <a:buNone/>
-            </a:pPr>
-            <a:r>
-              <a:rPr lang="vi-VN" sz="1000" b="0" i="0" kern="0" dirty="0">
-                <a:solidFill>
-                  <a:srgbClr val="2C2C2C"/>
-                </a:solidFill>
-                <a:latin typeface="Calibri" pitchFamily="34" charset="0"/>
-                <a:ea typeface="Calibri" pitchFamily="34" charset="-122"/>
-                <a:cs typeface="Calibri" pitchFamily="34" charset="-120"/>
-              </a:rPr>
-              <a:t>Điền đầy đủ thông tin xe và thông tin KH vào form nội bộ. Liên hệ admin xe cũ để xử lý thủ tục trước.</a:t>
-            </a:r>
-          </a:p>
-        </p:txBody>
-      </p:sp>
-      <p:sp>
-        <p:nvSpPr>
-          <p:cNvPr id="119" name="Arrow"/>
-          <p:cNvSpPr/>
-          <p:nvPr/>
-        </p:nvSpPr>
-        <p:spPr>
-          <a:xfrm>
-            <a:off x="4808800" y="3780000"/>
-            <a:ext cx="220000" cy="220000"/>
-          </a:xfrm>
-          <a:prstGeom prst="rightArrow">
-            <a:avLst/>
-          </a:prstGeom>
-          <a:solidFill>
-            <a:srgbClr val="B8BDC4"/>
-          </a:solidFill>
-          <a:ln>
-            <a:noFill/>
-          </a:ln>
-        </p:spPr>
-      </p:sp>
-      <p:sp>
-        <p:nvSpPr>
-          <p:cNvPr id="120" name="CardBg"/>
-          <p:cNvSpPr/>
-          <p:nvPr/>
-        </p:nvSpPr>
-        <p:spPr>
-          <a:xfrm>
-            <a:off x="5008800" y="1610000"/>
-            <a:ext cx="2174400" cy="4560000"/>
-          </a:xfrm>
-          <a:prstGeom prst="roundRect">
-            <a:avLst>
-              <a:gd name="adj" fmla="val 16667"/>
-            </a:avLst>
-          </a:prstGeom>
-          <a:solidFill>
-            <a:srgbClr val="FFFFFF"/>
-          </a:solidFill>
-          <a:ln w="9144">
-            <a:solidFill>
-              <a:srgbClr val="E8EBF0"/>
-            </a:solidFill>
-          </a:ln>
-        </p:spPr>
-      </p:sp>
-      <p:sp>
-        <p:nvSpPr>
-          <p:cNvPr id="121" name="CardHdr"/>
-          <p:cNvSpPr/>
-          <p:nvPr/>
-        </p:nvSpPr>
-        <p:spPr>
-          <a:xfrm>
-            <a:off x="5008800" y="1610000"/>
-            <a:ext cx="2174400" cy="460000"/>
-          </a:xfrm>
-          <a:prstGeom prst="rect">
-            <a:avLst/>
-          </a:prstGeom>
-          <a:solidFill>
-            <a:srgbClr val="E60012"/>
-          </a:solidFill>
-          <a:ln>
-            <a:noFill/>
-          </a:ln>
-        </p:spPr>
-      </p:sp>
-      <p:sp>
-        <p:nvSpPr>
-          <p:cNvPr id="122" name="Cir"/>
-          <p:cNvSpPr/>
-          <p:nvPr/>
-        </p:nvSpPr>
-        <p:spPr>
-          <a:xfrm>
-            <a:off x="5108800" y="1670000"/>
-            <a:ext cx="340000" cy="340000"/>
-          </a:xfrm>
-          <a:prstGeom prst="ellipse">
-            <a:avLst/>
-          </a:prstGeom>
-          <a:solidFill>
-            <a:srgbClr val="FFFFFF"/>
-          </a:solidFill>
-          <a:ln>
-            <a:noFill/>
-          </a:ln>
-        </p:spPr>
-      </p:sp>
-      <p:sp>
-        <p:nvSpPr>
-          <p:cNvPr id="123" name="CirN"/>
-          <p:cNvSpPr/>
-          <p:nvPr/>
-        </p:nvSpPr>
-        <p:spPr>
-          <a:xfrm>
-            <a:off x="5108800" y="1670000"/>
-            <a:ext cx="340000" cy="340000"/>
-          </a:xfrm>
-          <a:prstGeom prst="rect">
-            <a:avLst/>
-          </a:prstGeom>
-          <a:noFill/>
-          <a:ln>
-            <a:noFill/>
-          </a:ln>
-        </p:spPr>
-        <p:txBody>
-          <a:bodyPr wrap="square" lIns="0" tIns="0" rIns="0" bIns="0" rtlCol="0" anchor="ctr"/>
-          <a:lstStyle/>
-          <a:p>
-            <a:pPr algn="c" indent="0" marL="0">
-              <a:buNone/>
-            </a:pPr>
-            <a:r>
-              <a:rPr lang="vi-VN" sz="1600" b="1" i="0" kern="0" dirty="0">
-                <a:solidFill>
-                  <a:srgbClr val="E60012"/>
-                </a:solidFill>
-                <a:latin typeface="Calibri" pitchFamily="34" charset="0"/>
-                <a:ea typeface="Calibri" pitchFamily="34" charset="-122"/>
-                <a:cs typeface="Calibri" pitchFamily="34" charset="-120"/>
-              </a:rPr>
-              <a:t>3</a:t>
-            </a:r>
-          </a:p>
-        </p:txBody>
-      </p:sp>
-      <p:sp>
-        <p:nvSpPr>
-          <p:cNvPr id="124" name="HdrTxt"/>
-          <p:cNvSpPr/>
-          <p:nvPr/>
-        </p:nvSpPr>
-        <p:spPr>
-          <a:xfrm>
-            <a:off x="5528800" y="1610000"/>
-            <a:ext cx="1614400" cy="460000"/>
-          </a:xfrm>
-          <a:prstGeom prst="rect">
-            <a:avLst/>
-          </a:prstGeom>
-          <a:noFill/>
-          <a:ln>
-            <a:noFill/>
-          </a:ln>
-        </p:spPr>
-        <p:txBody>
-          <a:bodyPr wrap="square" lIns="0" tIns="0" rIns="0" bIns="0" rtlCol="0" anchor="ctr"/>
-          <a:lstStyle/>
-          <a:p>
-            <a:pPr algn="l" indent="0" marL="0">
-              <a:buNone/>
-            </a:pPr>
-            <a:r>
-              <a:rPr lang="vi-VN" sz="1050" b="1" i="0" kern="0" dirty="0">
-                <a:solidFill>
-                  <a:srgbClr val="FFFFFF"/>
-                </a:solidFill>
-                <a:latin typeface="Calibri" pitchFamily="34" charset="0"/>
-                <a:ea typeface="Calibri" pitchFamily="34" charset="-122"/>
-                <a:cs typeface="Calibri" pitchFamily="34" charset="-120"/>
-              </a:rPr>
-              <a:t>KH KÝ
-CAM KẾT</a:t>
-            </a:r>
-          </a:p>
-        </p:txBody>
-      </p:sp>
-      <p:sp>
-        <p:nvSpPr>
-          <p:cNvPr id="125" name="Desc"/>
-          <p:cNvSpPr/>
-          <p:nvPr/>
-        </p:nvSpPr>
-        <p:spPr>
-          <a:xfrm>
-            <a:off x="5088800" y="2110000"/>
-            <a:ext cx="2014400" cy="4020000"/>
-          </a:xfrm>
-          <a:prstGeom prst="rect">
-            <a:avLst/>
-          </a:prstGeom>
-          <a:noFill/>
-          <a:ln>
-            <a:noFill/>
-          </a:ln>
-        </p:spPr>
-        <p:txBody>
-          <a:bodyPr wrap="square" lIns="0" tIns="0" rIns="0" bIns="0" rtlCol="0" anchor="t"/>
-          <a:lstStyle/>
-          <a:p>
-            <a:pPr algn="l" indent="0" marL="0">
-              <a:buNone/>
-            </a:pPr>
-            <a:r>
-              <a:rPr lang="vi-VN" sz="1000" b="0" i="0" kern="0" dirty="0">
-                <a:solidFill>
-                  <a:srgbClr val="2C2C2C"/>
-                </a:solidFill>
-                <a:latin typeface="Calibri" pitchFamily="34" charset="0"/>
-                <a:ea typeface="Calibri" pitchFamily="34" charset="-122"/>
-                <a:cs typeface="Calibri" pitchFamily="34" charset="-120"/>
-              </a:rPr>
-              <a:t>KH ký giấy yêu cầu chạy thử. ⚠ LƯU Ý: xe cũ KHÔNG có bảo hiểm vật chất – tổn thất trong lái thử KH chịu.</a:t>
-            </a:r>
-          </a:p>
-        </p:txBody>
-      </p:sp>
-      <p:sp>
-        <p:nvSpPr>
-          <p:cNvPr id="126" name="Arrow"/>
-          <p:cNvSpPr/>
-          <p:nvPr/>
-        </p:nvSpPr>
-        <p:spPr>
-          <a:xfrm>
-            <a:off x="7163200" y="3780000"/>
-            <a:ext cx="220000" cy="220000"/>
-          </a:xfrm>
-          <a:prstGeom prst="rightArrow">
-            <a:avLst/>
-          </a:prstGeom>
-          <a:solidFill>
-            <a:srgbClr val="B8BDC4"/>
-          </a:solidFill>
-          <a:ln>
-            <a:noFill/>
-          </a:ln>
-        </p:spPr>
-      </p:sp>
-      <p:sp>
-        <p:nvSpPr>
-          <p:cNvPr id="127" name="CardBg"/>
-          <p:cNvSpPr/>
-          <p:nvPr/>
-        </p:nvSpPr>
-        <p:spPr>
-          <a:xfrm>
-            <a:off x="7363200" y="1610000"/>
-            <a:ext cx="2174400" cy="4560000"/>
-          </a:xfrm>
-          <a:prstGeom prst="roundRect">
-            <a:avLst>
-              <a:gd name="adj" fmla="val 16667"/>
-            </a:avLst>
-          </a:prstGeom>
-          <a:solidFill>
-            <a:srgbClr val="FFFFFF"/>
-          </a:solidFill>
-          <a:ln w="9144">
-            <a:solidFill>
-              <a:srgbClr val="E8EBF0"/>
-            </a:solidFill>
-          </a:ln>
-        </p:spPr>
-      </p:sp>
-      <p:sp>
-        <p:nvSpPr>
-          <p:cNvPr id="128" name="CardHdr"/>
-          <p:cNvSpPr/>
-          <p:nvPr/>
-        </p:nvSpPr>
-        <p:spPr>
-          <a:xfrm>
-            <a:off x="7363200" y="1610000"/>
-            <a:ext cx="2174400" cy="460000"/>
-          </a:xfrm>
-          <a:prstGeom prst="rect">
-            <a:avLst/>
-          </a:prstGeom>
-          <a:solidFill>
-            <a:srgbClr val="1A1F36"/>
-          </a:solidFill>
-          <a:ln>
-            <a:noFill/>
-          </a:ln>
-        </p:spPr>
-      </p:sp>
-      <p:sp>
-        <p:nvSpPr>
-          <p:cNvPr id="129" name="Cir"/>
-          <p:cNvSpPr/>
-          <p:nvPr/>
-        </p:nvSpPr>
-        <p:spPr>
-          <a:xfrm>
-            <a:off x="7463200" y="1670000"/>
-            <a:ext cx="340000" cy="340000"/>
-          </a:xfrm>
-          <a:prstGeom prst="ellipse">
-            <a:avLst/>
-          </a:prstGeom>
-          <a:solidFill>
-            <a:srgbClr val="FFFFFF"/>
-          </a:solidFill>
-          <a:ln>
-            <a:noFill/>
-          </a:ln>
-        </p:spPr>
-      </p:sp>
-      <p:sp>
-        <p:nvSpPr>
-          <p:cNvPr id="130" name="CirN"/>
-          <p:cNvSpPr/>
-          <p:nvPr/>
-        </p:nvSpPr>
-        <p:spPr>
-          <a:xfrm>
-            <a:off x="7463200" y="1670000"/>
-            <a:ext cx="340000" cy="340000"/>
-          </a:xfrm>
-          <a:prstGeom prst="rect">
-            <a:avLst/>
-          </a:prstGeom>
-          <a:noFill/>
-          <a:ln>
-            <a:noFill/>
-          </a:ln>
-        </p:spPr>
-        <p:txBody>
-          <a:bodyPr wrap="square" lIns="0" tIns="0" rIns="0" bIns="0" rtlCol="0" anchor="ctr"/>
-          <a:lstStyle/>
-          <a:p>
-            <a:pPr algn="c" indent="0" marL="0">
-              <a:buNone/>
-            </a:pPr>
-            <a:r>
-              <a:rPr lang="vi-VN" sz="1600" b="1" i="0" kern="0" dirty="0">
-                <a:solidFill>
-                  <a:srgbClr val="1A1F36"/>
-                </a:solidFill>
-                <a:latin typeface="Calibri" pitchFamily="34" charset="0"/>
-                <a:ea typeface="Calibri" pitchFamily="34" charset="-122"/>
-                <a:cs typeface="Calibri" pitchFamily="34" charset="-120"/>
-              </a:rPr>
-              <a:t>4</a:t>
-            </a:r>
-          </a:p>
-        </p:txBody>
-      </p:sp>
-      <p:sp>
-        <p:nvSpPr>
-          <p:cNvPr id="131" name="HdrTxt"/>
-          <p:cNvSpPr/>
-          <p:nvPr/>
-        </p:nvSpPr>
-        <p:spPr>
-          <a:xfrm>
-            <a:off x="7883200" y="1610000"/>
-            <a:ext cx="1614400" cy="460000"/>
-          </a:xfrm>
-          <a:prstGeom prst="rect">
-            <a:avLst/>
-          </a:prstGeom>
-          <a:noFill/>
-          <a:ln>
-            <a:noFill/>
-          </a:ln>
-        </p:spPr>
-        <p:txBody>
-          <a:bodyPr wrap="square" lIns="0" tIns="0" rIns="0" bIns="0" rtlCol="0" anchor="ctr"/>
-          <a:lstStyle/>
-          <a:p>
-            <a:pPr algn="l" indent="0" marL="0">
-              <a:buNone/>
-            </a:pPr>
-            <a:r>
-              <a:rPr lang="vi-VN" sz="1050" b="1" i="0" kern="0" dirty="0">
-                <a:solidFill>
-                  <a:srgbClr val="FFFFFF"/>
-                </a:solidFill>
-                <a:latin typeface="Calibri" pitchFamily="34" charset="0"/>
-                <a:ea typeface="Calibri" pitchFamily="34" charset="-122"/>
-                <a:cs typeface="Calibri" pitchFamily="34" charset="-120"/>
-              </a:rPr>
-              <a:t>DẪN KH
-TRẢI NGHIỆM</a:t>
-            </a:r>
-          </a:p>
-        </p:txBody>
-      </p:sp>
-      <p:sp>
-        <p:nvSpPr>
-          <p:cNvPr id="132" name="Desc"/>
-          <p:cNvSpPr/>
-          <p:nvPr/>
-        </p:nvSpPr>
-        <p:spPr>
-          <a:xfrm>
-            <a:off x="7443200" y="2110000"/>
-            <a:ext cx="2014400" cy="4020000"/>
-          </a:xfrm>
-          <a:prstGeom prst="rect">
-            <a:avLst/>
-          </a:prstGeom>
-          <a:noFill/>
-          <a:ln>
-            <a:noFill/>
-          </a:ln>
-        </p:spPr>
-        <p:txBody>
-          <a:bodyPr wrap="square" lIns="0" tIns="0" rIns="0" bIns="0" rtlCol="0" anchor="t"/>
-          <a:lstStyle/>
-          <a:p>
-            <a:pPr algn="l" indent="0" marL="0">
-              <a:buNone/>
-            </a:pPr>
-            <a:r>
-              <a:rPr lang="vi-VN" sz="1000" b="0" i="0" kern="0" dirty="0">
-                <a:solidFill>
-                  <a:srgbClr val="2C2C2C"/>
-                </a:solidFill>
-                <a:latin typeface="Calibri" pitchFamily="34" charset="0"/>
-                <a:ea typeface="Calibri" pitchFamily="34" charset="-122"/>
-                <a:cs typeface="Calibri" pitchFamily="34" charset="-120"/>
-              </a:rPr>
-              <a:t>Chạy đường thực tế. Giới thiệu: hệ thống âm thanh, điều hòa, cảm giác lái, phanh, khả năng tăng tốc.</a:t>
-            </a:r>
-          </a:p>
-        </p:txBody>
-      </p:sp>
-      <p:sp>
-        <p:nvSpPr>
-          <p:cNvPr id="133" name="Arrow"/>
-          <p:cNvSpPr/>
-          <p:nvPr/>
-        </p:nvSpPr>
-        <p:spPr>
-          <a:xfrm>
-            <a:off x="9517600" y="3780000"/>
-            <a:ext cx="220000" cy="220000"/>
-          </a:xfrm>
-          <a:prstGeom prst="rightArrow">
-            <a:avLst/>
-          </a:prstGeom>
-          <a:solidFill>
-            <a:srgbClr val="B8BDC4"/>
-          </a:solidFill>
-          <a:ln>
-            <a:noFill/>
-          </a:ln>
-        </p:spPr>
-      </p:sp>
-      <p:sp>
-        <p:nvSpPr>
-          <p:cNvPr id="134" name="CardBg"/>
-          <p:cNvSpPr/>
-          <p:nvPr/>
-        </p:nvSpPr>
-        <p:spPr>
-          <a:xfrm>
-            <a:off x="9717600" y="1610000"/>
-            <a:ext cx="2174400" cy="4560000"/>
-          </a:xfrm>
-          <a:prstGeom prst="roundRect">
-            <a:avLst>
-              <a:gd name="adj" fmla="val 16667"/>
-            </a:avLst>
-          </a:prstGeom>
-          <a:solidFill>
-            <a:srgbClr val="FFFFFF"/>
-          </a:solidFill>
-          <a:ln w="9144">
-            <a:solidFill>
-              <a:srgbClr val="E8EBF0"/>
-            </a:solidFill>
-          </a:ln>
-        </p:spPr>
-      </p:sp>
-      <p:sp>
-        <p:nvSpPr>
-          <p:cNvPr id="135" name="CardHdr"/>
-          <p:cNvSpPr/>
-          <p:nvPr/>
-        </p:nvSpPr>
-        <p:spPr>
-          <a:xfrm>
-            <a:off x="9717600" y="1610000"/>
-            <a:ext cx="2174400" cy="460000"/>
-          </a:xfrm>
-          <a:prstGeom prst="rect">
-            <a:avLst/>
-          </a:prstGeom>
-          <a:solidFill>
-            <a:srgbClr val="E60012"/>
-          </a:solidFill>
-          <a:ln>
-            <a:noFill/>
-          </a:ln>
-        </p:spPr>
-      </p:sp>
-      <p:sp>
-        <p:nvSpPr>
-          <p:cNvPr id="136" name="Cir"/>
-          <p:cNvSpPr/>
-          <p:nvPr/>
-        </p:nvSpPr>
-        <p:spPr>
-          <a:xfrm>
-            <a:off x="9817600" y="1670000"/>
-            <a:ext cx="340000" cy="340000"/>
-          </a:xfrm>
-          <a:prstGeom prst="ellipse">
-            <a:avLst/>
-          </a:prstGeom>
-          <a:solidFill>
-            <a:srgbClr val="FFFFFF"/>
-          </a:solidFill>
-          <a:ln>
-            <a:noFill/>
-          </a:ln>
-        </p:spPr>
-      </p:sp>
-      <p:sp>
-        <p:nvSpPr>
-          <p:cNvPr id="137" name="CirN"/>
-          <p:cNvSpPr/>
-          <p:nvPr/>
-        </p:nvSpPr>
-        <p:spPr>
-          <a:xfrm>
-            <a:off x="9817600" y="1670000"/>
-            <a:ext cx="340000" cy="340000"/>
-          </a:xfrm>
-          <a:prstGeom prst="rect">
-            <a:avLst/>
-          </a:prstGeom>
-          <a:noFill/>
-          <a:ln>
-            <a:noFill/>
-          </a:ln>
-        </p:spPr>
-        <p:txBody>
-          <a:bodyPr wrap="square" lIns="0" tIns="0" rIns="0" bIns="0" rtlCol="0" anchor="ctr"/>
-          <a:lstStyle/>
-          <a:p>
-            <a:pPr algn="c" indent="0" marL="0">
-              <a:buNone/>
-            </a:pPr>
-            <a:r>
-              <a:rPr lang="vi-VN" sz="1600" b="1" i="0" kern="0" dirty="0">
-                <a:solidFill>
-                  <a:srgbClr val="E60012"/>
-                </a:solidFill>
-                <a:latin typeface="Calibri" pitchFamily="34" charset="0"/>
-                <a:ea typeface="Calibri" pitchFamily="34" charset="-122"/>
-                <a:cs typeface="Calibri" pitchFamily="34" charset="-120"/>
-              </a:rPr>
-              <a:t>5</a:t>
-            </a:r>
-          </a:p>
-        </p:txBody>
-      </p:sp>
-      <p:sp>
-        <p:nvSpPr>
-          <p:cNvPr id="138" name="HdrTxt"/>
-          <p:cNvSpPr/>
-          <p:nvPr/>
-        </p:nvSpPr>
-        <p:spPr>
-          <a:xfrm>
-            <a:off x="10237600" y="1610000"/>
-            <a:ext cx="1614400" cy="460000"/>
-          </a:xfrm>
-          <a:prstGeom prst="rect">
-            <a:avLst/>
-          </a:prstGeom>
-          <a:noFill/>
-          <a:ln>
-            <a:noFill/>
-          </a:ln>
-        </p:spPr>
-        <p:txBody>
-          <a:bodyPr wrap="square" lIns="0" tIns="0" rIns="0" bIns="0" rtlCol="0" anchor="ctr"/>
-          <a:lstStyle/>
-          <a:p>
-            <a:pPr algn="l" indent="0" marL="0">
-              <a:buNone/>
-            </a:pPr>
-            <a:r>
-              <a:rPr lang="vi-VN" sz="1050" b="1" i="0" kern="0" dirty="0">
-                <a:solidFill>
-                  <a:srgbClr val="FFFFFF"/>
-                </a:solidFill>
-                <a:latin typeface="Calibri" pitchFamily="34" charset="0"/>
-                <a:ea typeface="Calibri" pitchFamily="34" charset="-122"/>
-                <a:cs typeface="Calibri" pitchFamily="34" charset="-120"/>
-              </a:rPr>
-              <a:t>KẾT THÚC
-&amp; CHỐT DEAL</a:t>
-            </a:r>
-          </a:p>
-        </p:txBody>
-      </p:sp>
-      <p:sp>
-        <p:nvSpPr>
-          <p:cNvPr id="139" name="Desc"/>
-          <p:cNvSpPr/>
-          <p:nvPr/>
-        </p:nvSpPr>
-        <p:spPr>
-          <a:xfrm>
-            <a:off x="9797600" y="2110000"/>
-            <a:ext cx="2014400" cy="4020000"/>
-          </a:xfrm>
-          <a:prstGeom prst="rect">
-            <a:avLst/>
-          </a:prstGeom>
-          <a:noFill/>
-          <a:ln>
-            <a:noFill/>
-          </a:ln>
-        </p:spPr>
-        <p:txBody>
-          <a:bodyPr wrap="square" lIns="0" tIns="0" rIns="0" bIns="0" rtlCol="0" anchor="t"/>
-          <a:lstStyle/>
-          <a:p>
-            <a:pPr algn="l" indent="0" marL="0">
-              <a:buNone/>
-            </a:pPr>
-            <a:r>
-              <a:rPr lang="vi-VN" sz="1000" b="0" i="0" kern="0" dirty="0">
-                <a:solidFill>
-                  <a:srgbClr val="2C2C2C"/>
-                </a:solidFill>
-                <a:latin typeface="Calibri" pitchFamily="34" charset="0"/>
-                <a:ea typeface="Calibri" pitchFamily="34" charset="-122"/>
-                <a:cs typeface="Calibri" pitchFamily="34" charset="-120"/>
-              </a:rPr>
-              <a:t>Hỏi cảm nhận ngay sau khi lái. Giải đáp thắc mắc. Đề nghị ký hợp đồng – xác định ngày &amp; giờ thanh toán.</a:t>
-            </a:r>
-          </a:p>
-        </p:txBody>
-      </p:sp>
-      <p:sp>
-        <p:nvSpPr>
-          <p:cNvPr id="140" name="FBar"/>
-          <p:cNvSpPr/>
-          <p:nvPr/>
-        </p:nvSpPr>
-        <p:spPr>
-          <a:xfrm>
-            <a:off x="365760" y="6446520"/>
-            <a:ext cx="91440" cy="274320"/>
-          </a:xfrm>
-          <a:prstGeom prst="rect">
-            <a:avLst/>
-          </a:prstGeom>
-          <a:solidFill>
-            <a:srgbClr val="E60012"/>
-          </a:solidFill>
-          <a:ln>
-            <a:noFill/>
-          </a:ln>
-        </p:spPr>
-      </p:sp>
-      <p:sp>
-        <p:nvSpPr>
-          <p:cNvPr id="141" name="FTxt"/>
-          <p:cNvSpPr/>
-          <p:nvPr/>
-        </p:nvSpPr>
-        <p:spPr>
-          <a:xfrm>
-            <a:off x="548640" y="6446520"/>
-            <a:ext cx="7315200" cy="274320"/>
-          </a:xfrm>
-          <a:prstGeom prst="rect">
-            <a:avLst/>
-          </a:prstGeom>
-          <a:noFill/>
-          <a:ln>
-            <a:noFill/>
-          </a:ln>
-        </p:spPr>
-        <p:txBody>
-          <a:bodyPr wrap="square" lIns="0" tIns="0" rIns="0" bIns="0" rtlCol="0" anchor="ctr"/>
-          <a:lstStyle/>
-          <a:p>
-            <a:pPr algn="l" indent="0" marL="0">
-              <a:buNone/>
-            </a:pPr>
-            <a:r>
-              <a:rPr lang="vi-VN" sz="1000" b="0" i="0" kern="0" dirty="0">
-                <a:solidFill>
-                  <a:srgbClr val="4A4A4A"/>
-                </a:solidFill>
-                <a:latin typeface="Calibri" pitchFamily="34" charset="0"/>
-                <a:ea typeface="Calibri" pitchFamily="34" charset="-122"/>
-                <a:cs typeface="Calibri" pitchFamily="34" charset="-120"/>
-              </a:rPr>
-              <a:t>MITSUBISHI TÂY NINH  ·  Kỹ năng Bán hàng Xe đã qua sử dụng</a:t>
-            </a:r>
-          </a:p>
-        </p:txBody>
-      </p:sp>
-      <p:sp>
-        <p:nvSpPr>
-          <p:cNvPr id="142" name="FPg"/>
-          <p:cNvSpPr/>
-          <p:nvPr/>
-        </p:nvSpPr>
-        <p:spPr>
-          <a:xfrm>
-            <a:off x="11338560" y="6446520"/>
-            <a:ext cx="731520" cy="274320"/>
-          </a:xfrm>
-          <a:prstGeom prst="rect">
-            <a:avLst/>
-          </a:prstGeom>
-          <a:noFill/>
-          <a:ln>
-            <a:noFill/>
-          </a:ln>
-        </p:spPr>
-        <p:txBody>
-          <a:bodyPr wrap="square" lIns="0" tIns="0" rIns="0" bIns="0" rtlCol="0" anchor="ctr"/>
-          <a:lstStyle/>
-          <a:p>
-            <a:pPr algn="r" indent="0" marL="0">
-              <a:buNone/>
-            </a:pPr>
-            <a:r>
-              <a:rPr lang="vi-VN" sz="1000" b="0" i="0" kern="0" dirty="0">
-                <a:solidFill>
-                  <a:srgbClr val="B8BDC4"/>
-                </a:solidFill>
-                <a:latin typeface="Calibri" pitchFamily="34" charset="0"/>
-                <a:ea typeface="Calibri" pitchFamily="34" charset="-122"/>
-                <a:cs typeface="Calibri" pitchFamily="34" charset="-120"/>
-              </a:rPr>
-              <a:t>22 / 30</a:t>
-            </a:r>
-          </a:p>
-        </p:txBody>
-      </p:sp>
-    </p:spTree>
-  </p:cSld>
-  <p:clrMapOvr>
-    <a:masterClrMapping/>
-  </p:clrMapOvr>
-</p:sld>
-</file>
-
 <file path=ppt/slides/slide26.xml><?xml version="1.0" encoding="utf-8"?>
 <p:sld xmlns:a="http://schemas.openxmlformats.org/drawingml/2006/main" xmlns:p="http://schemas.openxmlformats.org/presentationml/2006/main" xmlns:r="http://schemas.openxmlformats.org/officeDocument/2006/relationships">
   <p:cSld>
@@ -29389,7 +29386,7 @@
       <p:grpSpPr/>
       <p:sp>
         <p:nvSpPr>
-          <p:cNvPr id="143" name="RedBar"/>
+          <p:cNvPr id="501" name="RedBar"/>
           <p:cNvSpPr/>
           <p:nvPr/>
         </p:nvSpPr>
@@ -29411,7 +29408,7 @@
       </p:sp>
       <p:sp>
         <p:nvSpPr>
-          <p:cNvPr id="144" name="PhanLbl"/>
+          <p:cNvPr id="502" name="Phan"/>
           <p:cNvSpPr/>
           <p:nvPr/>
         </p:nvSpPr>
@@ -29436,7 +29433,7 @@
               <a:buNone/>
             </a:pPr>
             <a:r>
-              <a:rPr lang="vi-VN" sz="1200" b="1" i="0" kern="0" dirty="0">
+              <a:rPr lang="vi-VN" sz="1200" b="1" kern="0" dirty="0">
                 <a:solidFill>
                   <a:srgbClr val="E60012"/>
                 </a:solidFill>
@@ -29451,7 +29448,7 @@
       </p:sp>
       <p:sp>
         <p:nvSpPr>
-          <p:cNvPr id="145" name="Title"/>
+          <p:cNvPr id="503" name="Title"/>
           <p:cNvSpPr/>
           <p:nvPr/>
         </p:nvSpPr>
@@ -29476,7 +29473,7 @@
               <a:buNone/>
             </a:pPr>
             <a:r>
-              <a:rPr lang="vi-VN" sz="2800" b="1" i="0" kern="0" dirty="0">
+              <a:rPr lang="vi-VN" sz="2800" b="1" kern="0" dirty="0">
                 <a:solidFill>
                   <a:srgbClr val="1A1F36"/>
                 </a:solidFill>
@@ -29491,7 +29488,7 @@
       </p:sp>
       <p:sp>
         <p:nvSpPr>
-          <p:cNvPr id="146" name="Sub"/>
+          <p:cNvPr id="504" name="Sub"/>
           <p:cNvSpPr/>
           <p:nvPr/>
         </p:nvSpPr>
@@ -29516,7 +29513,7 @@
               <a:buNone/>
             </a:pPr>
             <a:r>
-              <a:rPr lang="vi-VN" sz="1200" b="0" i="0" kern="0" dirty="0">
+              <a:rPr lang="vi-VN" sz="1200" b="0" kern="0" dirty="0">
                 <a:solidFill>
                   <a:srgbClr val="4A4A4A"/>
                 </a:solidFill>
@@ -29531,20 +29528,20 @@
       </p:sp>
       <p:sp>
         <p:nvSpPr>
-          <p:cNvPr id="147" name="AccLine"/>
-          <p:cNvSpPr/>
-          <p:nvPr/>
-        </p:nvSpPr>
-        <p:spPr>
-          <a:xfrm>
-            <a:off x="548640" y="1520000"/>
-            <a:ext cx="10972800" cy="18000"/>
+          <p:cNvPr id="505" name="Line"/>
+          <p:cNvSpPr/>
+          <p:nvPr/>
+        </p:nvSpPr>
+        <p:spPr>
+          <a:xfrm>
+            <a:off x="548640" y="1530000"/>
+            <a:ext cx="10972800" cy="16000"/>
           </a:xfrm>
           <a:prstGeom prst="rect">
             <a:avLst/>
           </a:prstGeom>
           <a:solidFill>
-            <a:srgbClr val="E8EBF0"/>
+            <a:srgbClr val="E0E3E8"/>
           </a:solidFill>
           <a:ln>
             <a:noFill/>
@@ -29553,40 +29550,244 @@
       </p:sp>
       <p:sp>
         <p:nvSpPr>
-          <p:cNvPr id="148" name="CardBg"/>
-          <p:cNvSpPr/>
-          <p:nvPr/>
-        </p:nvSpPr>
-        <p:spPr>
-          <a:xfrm>
-            <a:off x="300000" y="1630000"/>
-            <a:ext cx="3784000" cy="2380000"/>
-          </a:xfrm>
-          <a:prstGeom prst="roundRect">
-            <a:avLst>
-              <a:gd name="adj" fmla="val 16667"/>
-            </a:avLst>
+          <p:cNvPr id="506" name="RowBg1"/>
+          <p:cNvSpPr/>
+          <p:nvPr/>
+        </p:nvSpPr>
+        <p:spPr>
+          <a:xfrm>
+            <a:off x="280000" y="1590000"/>
+            <a:ext cx="11632000" cy="760000"/>
+          </a:xfrm>
+          <a:prstGeom prst="rect">
+            <a:avLst/>
           </a:prstGeom>
           <a:solidFill>
-            <a:srgbClr val="FFFFFF"/>
+            <a:srgbClr val="F0F2F5"/>
           </a:solidFill>
-          <a:ln w="9144">
-            <a:solidFill>
-              <a:srgbClr val="E8EBF0"/>
-            </a:solidFill>
+          <a:ln>
+            <a:noFill/>
           </a:ln>
         </p:spPr>
       </p:sp>
       <p:sp>
         <p:nvSpPr>
-          <p:cNvPr id="149" name="CardHdr"/>
-          <p:cNvSpPr/>
-          <p:nvPr/>
-        </p:nvSpPr>
-        <p:spPr>
-          <a:xfrm>
-            <a:off x="300000" y="1630000"/>
-            <a:ext cx="3784000" cy="460000"/>
+          <p:cNvPr id="507" name="NumBg1"/>
+          <p:cNvSpPr/>
+          <p:nvPr/>
+        </p:nvSpPr>
+        <p:spPr>
+          <a:xfrm>
+            <a:off x="280000" y="1590000"/>
+            <a:ext cx="320000" cy="760000"/>
+          </a:xfrm>
+          <a:prstGeom prst="rect">
+            <a:avLst/>
+          </a:prstGeom>
+          <a:solidFill>
+            <a:srgbClr val="E60012"/>
+          </a:solidFill>
+          <a:ln>
+            <a:noFill/>
+          </a:ln>
+        </p:spPr>
+      </p:sp>
+      <p:sp>
+        <p:nvSpPr>
+          <p:cNvPr id="508" name="NumT1"/>
+          <p:cNvSpPr/>
+          <p:nvPr/>
+        </p:nvSpPr>
+        <p:spPr>
+          <a:xfrm>
+            <a:off x="280000" y="1590000"/>
+            <a:ext cx="320000" cy="760000"/>
+          </a:xfrm>
+          <a:prstGeom prst="rect">
+            <a:avLst/>
+          </a:prstGeom>
+          <a:noFill/>
+          <a:ln>
+            <a:noFill/>
+          </a:ln>
+        </p:spPr>
+        <p:txBody>
+          <a:bodyPr wrap="square" lIns="0" tIns="0" rIns="0" bIns="0" rtlCol="0" anchor="ctr"/>
+          <a:lstStyle/>
+          <a:p>
+            <a:pPr algn="ctr" indent="0" marL="0">
+              <a:buNone/>
+            </a:pPr>
+            <a:r>
+              <a:rPr lang="vi-VN" sz="1800" b="1" kern="0" dirty="0">
+                <a:solidFill>
+                  <a:srgbClr val="FFFFFF"/>
+                </a:solidFill>
+                <a:latin typeface="Calibri" pitchFamily="34" charset="0"/>
+                <a:ea typeface="Calibri" pitchFamily="34" charset="-122"/>
+                <a:cs typeface="Calibri" pitchFamily="34" charset="-120"/>
+              </a:rPr>
+              <a:t>1</a:t>
+            </a:r>
+          </a:p>
+        </p:txBody>
+      </p:sp>
+      <p:sp>
+        <p:nvSpPr>
+          <p:cNvPr id="509" name="Bar1"/>
+          <p:cNvSpPr/>
+          <p:nvPr/>
+        </p:nvSpPr>
+        <p:spPr>
+          <a:xfrm>
+            <a:off x="600000" y="1590000"/>
+            <a:ext cx="12000" cy="760000"/>
+          </a:xfrm>
+          <a:prstGeom prst="rect">
+            <a:avLst/>
+          </a:prstGeom>
+          <a:solidFill>
+            <a:srgbClr val="E60012"/>
+          </a:solidFill>
+          <a:ln>
+            <a:noFill/>
+          </a:ln>
+        </p:spPr>
+      </p:sp>
+      <p:sp>
+        <p:nvSpPr>
+          <p:cNvPr id="510" name="StepT1"/>
+          <p:cNvSpPr/>
+          <p:nvPr/>
+        </p:nvSpPr>
+        <p:spPr>
+          <a:xfrm>
+            <a:off x="692000" y="1590000"/>
+            <a:ext cx="3200000" cy="760000"/>
+          </a:xfrm>
+          <a:prstGeom prst="rect">
+            <a:avLst/>
+          </a:prstGeom>
+          <a:noFill/>
+          <a:ln>
+            <a:noFill/>
+          </a:ln>
+        </p:spPr>
+        <p:txBody>
+          <a:bodyPr wrap="square" lIns="0" tIns="0" rIns="0" bIns="0" rtlCol="0" anchor="ctr"/>
+          <a:lstStyle/>
+          <a:p>
+            <a:pPr algn="l" indent="0" marL="0">
+              <a:buNone/>
+            </a:pPr>
+            <a:r>
+              <a:rPr lang="vi-VN" sz="1200" b="1" kern="0" dirty="0">
+                <a:solidFill>
+                  <a:srgbClr val="1A1F36"/>
+                </a:solidFill>
+                <a:latin typeface="Calibri" pitchFamily="34" charset="0"/>
+                <a:ea typeface="Calibri" pitchFamily="34" charset="-122"/>
+                <a:cs typeface="Calibri" pitchFamily="34" charset="-120"/>
+              </a:rPr>
+              <a:t>XÁC NHẬN THANH TOÁN</a:t>
+            </a:r>
+          </a:p>
+        </p:txBody>
+      </p:sp>
+      <p:sp>
+        <p:nvSpPr>
+          <p:cNvPr id="511" name="StepD1"/>
+          <p:cNvSpPr/>
+          <p:nvPr/>
+        </p:nvSpPr>
+        <p:spPr>
+          <a:xfrm>
+            <a:off x="3952000" y="1590000"/>
+            <a:ext cx="7960000" cy="760000"/>
+          </a:xfrm>
+          <a:prstGeom prst="rect">
+            <a:avLst/>
+          </a:prstGeom>
+          <a:noFill/>
+          <a:ln>
+            <a:noFill/>
+          </a:ln>
+        </p:spPr>
+        <p:txBody>
+          <a:bodyPr wrap="square" lIns="0" tIns="0" rIns="0" bIns="0" rtlCol="0" anchor="ctr"/>
+          <a:lstStyle/>
+          <a:p>
+            <a:pPr algn="l" indent="0" marL="0">
+              <a:buNone/>
+            </a:pPr>
+            <a:r>
+              <a:rPr lang="vi-VN" sz="1080" b="0" kern="0" dirty="0">
+                <a:solidFill>
+                  <a:srgbClr val="2C2C2C"/>
+                </a:solidFill>
+                <a:latin typeface="Calibri" pitchFamily="34" charset="0"/>
+                <a:ea typeface="Calibri" pitchFamily="34" charset="-122"/>
+                <a:cs typeface="Calibri" pitchFamily="34" charset="-120"/>
+              </a:rPr>
+              <a:t>Xác nhận KH đã thanh toán đầy đủ. Nếu vay NH, chờ xác nhận giải ngân trước khi chuẩn bị xe.</a:t>
+            </a:r>
+          </a:p>
+        </p:txBody>
+      </p:sp>
+      <p:sp>
+        <p:nvSpPr>
+          <p:cNvPr id="512" name="Sep1"/>
+          <p:cNvSpPr/>
+          <p:nvPr/>
+        </p:nvSpPr>
+        <p:spPr>
+          <a:xfrm>
+            <a:off x="280000" y="2340000"/>
+            <a:ext cx="11632000" cy="10000"/>
+          </a:xfrm>
+          <a:prstGeom prst="rect">
+            <a:avLst/>
+          </a:prstGeom>
+          <a:solidFill>
+            <a:srgbClr val="E0E3E8"/>
+          </a:solidFill>
+          <a:ln>
+            <a:noFill/>
+          </a:ln>
+        </p:spPr>
+      </p:sp>
+      <p:sp>
+        <p:nvSpPr>
+          <p:cNvPr id="513" name="RowBg2"/>
+          <p:cNvSpPr/>
+          <p:nvPr/>
+        </p:nvSpPr>
+        <p:spPr>
+          <a:xfrm>
+            <a:off x="280000" y="2350000"/>
+            <a:ext cx="11632000" cy="760000"/>
+          </a:xfrm>
+          <a:prstGeom prst="rect">
+            <a:avLst/>
+          </a:prstGeom>
+          <a:solidFill>
+            <a:srgbClr val="F0F2F5"/>
+          </a:solidFill>
+          <a:ln>
+            <a:noFill/>
+          </a:ln>
+        </p:spPr>
+      </p:sp>
+      <p:sp>
+        <p:nvSpPr>
+          <p:cNvPr id="514" name="NumBg2"/>
+          <p:cNvSpPr/>
+          <p:nvPr/>
+        </p:nvSpPr>
+        <p:spPr>
+          <a:xfrm>
+            <a:off x="280000" y="2350000"/>
+            <a:ext cx="320000" cy="760000"/>
           </a:xfrm>
           <a:prstGeom prst="rect">
             <a:avLst/>
@@ -29601,20 +29802,60 @@
       </p:sp>
       <p:sp>
         <p:nvSpPr>
-          <p:cNvPr id="150" name="Cir"/>
-          <p:cNvSpPr/>
-          <p:nvPr/>
-        </p:nvSpPr>
-        <p:spPr>
-          <a:xfrm>
-            <a:off x="400000" y="1690000"/>
-            <a:ext cx="340000" cy="340000"/>
-          </a:xfrm>
-          <a:prstGeom prst="ellipse">
+          <p:cNvPr id="515" name="NumT2"/>
+          <p:cNvSpPr/>
+          <p:nvPr/>
+        </p:nvSpPr>
+        <p:spPr>
+          <a:xfrm>
+            <a:off x="280000" y="2350000"/>
+            <a:ext cx="320000" cy="760000"/>
+          </a:xfrm>
+          <a:prstGeom prst="rect">
+            <a:avLst/>
+          </a:prstGeom>
+          <a:noFill/>
+          <a:ln>
+            <a:noFill/>
+          </a:ln>
+        </p:spPr>
+        <p:txBody>
+          <a:bodyPr wrap="square" lIns="0" tIns="0" rIns="0" bIns="0" rtlCol="0" anchor="ctr"/>
+          <a:lstStyle/>
+          <a:p>
+            <a:pPr algn="ctr" indent="0" marL="0">
+              <a:buNone/>
+            </a:pPr>
+            <a:r>
+              <a:rPr lang="vi-VN" sz="1800" b="1" kern="0" dirty="0">
+                <a:solidFill>
+                  <a:srgbClr val="FFFFFF"/>
+                </a:solidFill>
+                <a:latin typeface="Calibri" pitchFamily="34" charset="0"/>
+                <a:ea typeface="Calibri" pitchFamily="34" charset="-122"/>
+                <a:cs typeface="Calibri" pitchFamily="34" charset="-120"/>
+              </a:rPr>
+              <a:t>2</a:t>
+            </a:r>
+          </a:p>
+        </p:txBody>
+      </p:sp>
+      <p:sp>
+        <p:nvSpPr>
+          <p:cNvPr id="516" name="Bar2"/>
+          <p:cNvSpPr/>
+          <p:nvPr/>
+        </p:nvSpPr>
+        <p:spPr>
+          <a:xfrm>
+            <a:off x="600000" y="2350000"/>
+            <a:ext cx="12000" cy="760000"/>
+          </a:xfrm>
+          <a:prstGeom prst="rect">
             <a:avLst/>
           </a:prstGeom>
           <a:solidFill>
-            <a:srgbClr val="FFFFFF"/>
+            <a:srgbClr val="1A1F36"/>
           </a:solidFill>
           <a:ln>
             <a:noFill/>
@@ -29623,14 +29864,14 @@
       </p:sp>
       <p:sp>
         <p:nvSpPr>
-          <p:cNvPr id="151" name="CirN"/>
-          <p:cNvSpPr/>
-          <p:nvPr/>
-        </p:nvSpPr>
-        <p:spPr>
-          <a:xfrm>
-            <a:off x="400000" y="1690000"/>
-            <a:ext cx="340000" cy="340000"/>
+          <p:cNvPr id="517" name="StepT2"/>
+          <p:cNvSpPr/>
+          <p:nvPr/>
+        </p:nvSpPr>
+        <p:spPr>
+          <a:xfrm>
+            <a:off x="692000" y="2350000"/>
+            <a:ext cx="3200000" cy="760000"/>
           </a:xfrm>
           <a:prstGeom prst="rect">
             <a:avLst/>
@@ -29644,11 +29885,11 @@
           <a:bodyPr wrap="square" lIns="0" tIns="0" rIns="0" bIns="0" rtlCol="0" anchor="ctr"/>
           <a:lstStyle/>
           <a:p>
-            <a:pPr algn="c" indent="0" marL="0">
-              <a:buNone/>
-            </a:pPr>
-            <a:r>
-              <a:rPr lang="vi-VN" sz="1600" b="1" i="0" kern="0" dirty="0">
+            <a:pPr algn="l" indent="0" marL="0">
+              <a:buNone/>
+            </a:pPr>
+            <a:r>
+              <a:rPr lang="vi-VN" sz="1200" b="1" kern="0" dirty="0">
                 <a:solidFill>
                   <a:srgbClr val="1A1F36"/>
                 </a:solidFill>
@@ -29656,21 +29897,21 @@
                 <a:ea typeface="Calibri" pitchFamily="34" charset="-122"/>
                 <a:cs typeface="Calibri" pitchFamily="34" charset="-120"/>
               </a:rPr>
-              <a:t>1</a:t>
-            </a:r>
-          </a:p>
-        </p:txBody>
-      </p:sp>
-      <p:sp>
-        <p:nvSpPr>
-          <p:cNvPr id="152" name="HdrTxt"/>
-          <p:cNvSpPr/>
-          <p:nvPr/>
-        </p:nvSpPr>
-        <p:spPr>
-          <a:xfrm>
-            <a:off x="820000" y="1630000"/>
-            <a:ext cx="3224000" cy="460000"/>
+              <a:t>ĐẶT LỊCH GIAO XE</a:t>
+            </a:r>
+          </a:p>
+        </p:txBody>
+      </p:sp>
+      <p:sp>
+        <p:nvSpPr>
+          <p:cNvPr id="518" name="StepD2"/>
+          <p:cNvSpPr/>
+          <p:nvPr/>
+        </p:nvSpPr>
+        <p:spPr>
+          <a:xfrm>
+            <a:off x="3952000" y="2350000"/>
+            <a:ext cx="7960000" cy="760000"/>
           </a:xfrm>
           <a:prstGeom prst="rect">
             <a:avLst/>
@@ -29688,96 +29929,73 @@
               <a:buNone/>
             </a:pPr>
             <a:r>
-              <a:rPr lang="vi-VN" sz="1050" b="1" i="0" kern="0" dirty="0">
-                <a:solidFill>
-                  <a:srgbClr val="FFFFFF"/>
-                </a:solidFill>
-                <a:latin typeface="Calibri" pitchFamily="34" charset="0"/>
-                <a:ea typeface="Calibri" pitchFamily="34" charset="-122"/>
-                <a:cs typeface="Calibri" pitchFamily="34" charset="-120"/>
-              </a:rPr>
-              <a:t>XÁC NHẬN
-THANH TOÁN</a:t>
-            </a:r>
-          </a:p>
-        </p:txBody>
-      </p:sp>
-      <p:sp>
-        <p:nvSpPr>
-          <p:cNvPr id="153" name="Desc"/>
-          <p:cNvSpPr/>
-          <p:nvPr/>
-        </p:nvSpPr>
-        <p:spPr>
-          <a:xfrm>
-            <a:off x="380000" y="2130000"/>
-            <a:ext cx="3624000" cy="1840000"/>
-          </a:xfrm>
-          <a:prstGeom prst="rect">
-            <a:avLst/>
-          </a:prstGeom>
-          <a:noFill/>
+              <a:rPr lang="vi-VN" sz="1080" b="0" kern="0" dirty="0">
+                <a:solidFill>
+                  <a:srgbClr val="2C2C2C"/>
+                </a:solidFill>
+                <a:latin typeface="Calibri" pitchFamily="34" charset="0"/>
+                <a:ea typeface="Calibri" pitchFamily="34" charset="-122"/>
+                <a:cs typeface="Calibri" pitchFamily="34" charset="-120"/>
+              </a:rPr>
+              <a:t>Thống nhất ngày &amp; giờ giao xe. Đảm bảo xe đã hoàn tất mọi yêu cầu và phụ kiện theo thỏa thuận.</a:t>
+            </a:r>
+          </a:p>
+        </p:txBody>
+      </p:sp>
+      <p:sp>
+        <p:nvSpPr>
+          <p:cNvPr id="519" name="Sep2"/>
+          <p:cNvSpPr/>
+          <p:nvPr/>
+        </p:nvSpPr>
+        <p:spPr>
+          <a:xfrm>
+            <a:off x="280000" y="3100000"/>
+            <a:ext cx="11632000" cy="10000"/>
+          </a:xfrm>
+          <a:prstGeom prst="rect">
+            <a:avLst/>
+          </a:prstGeom>
+          <a:solidFill>
+            <a:srgbClr val="E0E3E8"/>
+          </a:solidFill>
           <a:ln>
             <a:noFill/>
           </a:ln>
         </p:spPr>
-        <p:txBody>
-          <a:bodyPr wrap="square" lIns="0" tIns="0" rIns="0" bIns="0" rtlCol="0" anchor="t"/>
-          <a:lstStyle/>
-          <a:p>
-            <a:pPr algn="l" indent="0" marL="0">
-              <a:buNone/>
-            </a:pPr>
-            <a:r>
-              <a:rPr lang="vi-VN" sz="1000" b="0" i="0" kern="0" dirty="0">
-                <a:solidFill>
-                  <a:srgbClr val="2C2C2C"/>
-                </a:solidFill>
-                <a:latin typeface="Calibri" pitchFamily="34" charset="0"/>
-                <a:ea typeface="Calibri" pitchFamily="34" charset="-122"/>
-                <a:cs typeface="Calibri" pitchFamily="34" charset="-120"/>
-              </a:rPr>
-              <a:t>Xác nhận KH đã TT đầy đủ. Nếu vay NH, chờ xác nhận giải ngân trước khi chuẩn bị xe bàn giao.</a:t>
-            </a:r>
-          </a:p>
-        </p:txBody>
-      </p:sp>
-      <p:sp>
-        <p:nvSpPr>
-          <p:cNvPr id="154" name="CardBg"/>
-          <p:cNvSpPr/>
-          <p:nvPr/>
-        </p:nvSpPr>
-        <p:spPr>
-          <a:xfrm>
-            <a:off x="4204000" y="1630000"/>
-            <a:ext cx="3784000" cy="2380000"/>
-          </a:xfrm>
-          <a:prstGeom prst="roundRect">
-            <a:avLst>
-              <a:gd name="adj" fmla="val 16667"/>
-            </a:avLst>
+      </p:sp>
+      <p:sp>
+        <p:nvSpPr>
+          <p:cNvPr id="520" name="RowBg3"/>
+          <p:cNvSpPr/>
+          <p:nvPr/>
+        </p:nvSpPr>
+        <p:spPr>
+          <a:xfrm>
+            <a:off x="280000" y="3110000"/>
+            <a:ext cx="11632000" cy="760000"/>
+          </a:xfrm>
+          <a:prstGeom prst="rect">
+            <a:avLst/>
           </a:prstGeom>
           <a:solidFill>
-            <a:srgbClr val="FFFFFF"/>
+            <a:srgbClr val="F0F2F5"/>
           </a:solidFill>
-          <a:ln w="9144">
-            <a:solidFill>
-              <a:srgbClr val="E8EBF0"/>
-            </a:solidFill>
+          <a:ln>
+            <a:noFill/>
           </a:ln>
         </p:spPr>
       </p:sp>
       <p:sp>
         <p:nvSpPr>
-          <p:cNvPr id="155" name="CardHdr"/>
-          <p:cNvSpPr/>
-          <p:nvPr/>
-        </p:nvSpPr>
-        <p:spPr>
-          <a:xfrm>
-            <a:off x="4204000" y="1630000"/>
-            <a:ext cx="3784000" cy="460000"/>
+          <p:cNvPr id="521" name="NumBg3"/>
+          <p:cNvSpPr/>
+          <p:nvPr/>
+        </p:nvSpPr>
+        <p:spPr>
+          <a:xfrm>
+            <a:off x="280000" y="3110000"/>
+            <a:ext cx="320000" cy="760000"/>
           </a:xfrm>
           <a:prstGeom prst="rect">
             <a:avLst/>
@@ -29792,20 +30010,60 @@
       </p:sp>
       <p:sp>
         <p:nvSpPr>
-          <p:cNvPr id="156" name="Cir"/>
-          <p:cNvSpPr/>
-          <p:nvPr/>
-        </p:nvSpPr>
-        <p:spPr>
-          <a:xfrm>
-            <a:off x="4304000" y="1690000"/>
-            <a:ext cx="340000" cy="340000"/>
-          </a:xfrm>
-          <a:prstGeom prst="ellipse">
+          <p:cNvPr id="522" name="NumT3"/>
+          <p:cNvSpPr/>
+          <p:nvPr/>
+        </p:nvSpPr>
+        <p:spPr>
+          <a:xfrm>
+            <a:off x="280000" y="3110000"/>
+            <a:ext cx="320000" cy="760000"/>
+          </a:xfrm>
+          <a:prstGeom prst="rect">
+            <a:avLst/>
+          </a:prstGeom>
+          <a:noFill/>
+          <a:ln>
+            <a:noFill/>
+          </a:ln>
+        </p:spPr>
+        <p:txBody>
+          <a:bodyPr wrap="square" lIns="0" tIns="0" rIns="0" bIns="0" rtlCol="0" anchor="ctr"/>
+          <a:lstStyle/>
+          <a:p>
+            <a:pPr algn="ctr" indent="0" marL="0">
+              <a:buNone/>
+            </a:pPr>
+            <a:r>
+              <a:rPr lang="vi-VN" sz="1800" b="1" kern="0" dirty="0">
+                <a:solidFill>
+                  <a:srgbClr val="FFFFFF"/>
+                </a:solidFill>
+                <a:latin typeface="Calibri" pitchFamily="34" charset="0"/>
+                <a:ea typeface="Calibri" pitchFamily="34" charset="-122"/>
+                <a:cs typeface="Calibri" pitchFamily="34" charset="-120"/>
+              </a:rPr>
+              <a:t>3</a:t>
+            </a:r>
+          </a:p>
+        </p:txBody>
+      </p:sp>
+      <p:sp>
+        <p:nvSpPr>
+          <p:cNvPr id="523" name="Bar3"/>
+          <p:cNvSpPr/>
+          <p:nvPr/>
+        </p:nvSpPr>
+        <p:spPr>
+          <a:xfrm>
+            <a:off x="600000" y="3110000"/>
+            <a:ext cx="12000" cy="760000"/>
+          </a:xfrm>
+          <a:prstGeom prst="rect">
             <a:avLst/>
           </a:prstGeom>
           <a:solidFill>
-            <a:srgbClr val="FFFFFF"/>
+            <a:srgbClr val="E60012"/>
           </a:solidFill>
           <a:ln>
             <a:noFill/>
@@ -29814,14 +30072,14 @@
       </p:sp>
       <p:sp>
         <p:nvSpPr>
-          <p:cNvPr id="157" name="CirN"/>
-          <p:cNvSpPr/>
-          <p:nvPr/>
-        </p:nvSpPr>
-        <p:spPr>
-          <a:xfrm>
-            <a:off x="4304000" y="1690000"/>
-            <a:ext cx="340000" cy="340000"/>
+          <p:cNvPr id="524" name="StepT3"/>
+          <p:cNvSpPr/>
+          <p:nvPr/>
+        </p:nvSpPr>
+        <p:spPr>
+          <a:xfrm>
+            <a:off x="692000" y="3110000"/>
+            <a:ext cx="3200000" cy="760000"/>
           </a:xfrm>
           <a:prstGeom prst="rect">
             <a:avLst/>
@@ -29835,33 +30093,33 @@
           <a:bodyPr wrap="square" lIns="0" tIns="0" rIns="0" bIns="0" rtlCol="0" anchor="ctr"/>
           <a:lstStyle/>
           <a:p>
-            <a:pPr algn="c" indent="0" marL="0">
-              <a:buNone/>
-            </a:pPr>
-            <a:r>
-              <a:rPr lang="vi-VN" sz="1600" b="1" i="0" kern="0" dirty="0">
-                <a:solidFill>
-                  <a:srgbClr val="E60012"/>
-                </a:solidFill>
-                <a:latin typeface="Calibri" pitchFamily="34" charset="0"/>
-                <a:ea typeface="Calibri" pitchFamily="34" charset="-122"/>
-                <a:cs typeface="Calibri" pitchFamily="34" charset="-120"/>
-              </a:rPr>
-              <a:t>2</a:t>
-            </a:r>
-          </a:p>
-        </p:txBody>
-      </p:sp>
-      <p:sp>
-        <p:nvSpPr>
-          <p:cNvPr id="158" name="HdrTxt"/>
-          <p:cNvSpPr/>
-          <p:nvPr/>
-        </p:nvSpPr>
-        <p:spPr>
-          <a:xfrm>
-            <a:off x="4724000" y="1630000"/>
-            <a:ext cx="3224000" cy="460000"/>
+            <a:pPr algn="l" indent="0" marL="0">
+              <a:buNone/>
+            </a:pPr>
+            <a:r>
+              <a:rPr lang="vi-VN" sz="1200" b="1" kern="0" dirty="0">
+                <a:solidFill>
+                  <a:srgbClr val="1A1F36"/>
+                </a:solidFill>
+                <a:latin typeface="Calibri" pitchFamily="34" charset="0"/>
+                <a:ea typeface="Calibri" pitchFamily="34" charset="-122"/>
+                <a:cs typeface="Calibri" pitchFamily="34" charset="-120"/>
+              </a:rPr>
+              <a:t>CHUẨN BỊ XE</a:t>
+            </a:r>
+          </a:p>
+        </p:txBody>
+      </p:sp>
+      <p:sp>
+        <p:nvSpPr>
+          <p:cNvPr id="525" name="StepD3"/>
+          <p:cNvSpPr/>
+          <p:nvPr/>
+        </p:nvSpPr>
+        <p:spPr>
+          <a:xfrm>
+            <a:off x="3952000" y="3110000"/>
+            <a:ext cx="7960000" cy="760000"/>
           </a:xfrm>
           <a:prstGeom prst="rect">
             <a:avLst/>
@@ -29879,96 +30137,73 @@
               <a:buNone/>
             </a:pPr>
             <a:r>
-              <a:rPr lang="vi-VN" sz="1050" b="1" i="0" kern="0" dirty="0">
-                <a:solidFill>
-                  <a:srgbClr val="FFFFFF"/>
-                </a:solidFill>
-                <a:latin typeface="Calibri" pitchFamily="34" charset="0"/>
-                <a:ea typeface="Calibri" pitchFamily="34" charset="-122"/>
-                <a:cs typeface="Calibri" pitchFamily="34" charset="-120"/>
-              </a:rPr>
-              <a:t>ĐẶT LỊCH
-GIAO XE</a:t>
-            </a:r>
-          </a:p>
-        </p:txBody>
-      </p:sp>
-      <p:sp>
-        <p:nvSpPr>
-          <p:cNvPr id="159" name="Desc"/>
-          <p:cNvSpPr/>
-          <p:nvPr/>
-        </p:nvSpPr>
-        <p:spPr>
-          <a:xfrm>
-            <a:off x="4284000" y="2130000"/>
-            <a:ext cx="3624000" cy="1840000"/>
-          </a:xfrm>
-          <a:prstGeom prst="rect">
-            <a:avLst/>
-          </a:prstGeom>
-          <a:noFill/>
+              <a:rPr lang="vi-VN" sz="1080" b="0" kern="0" dirty="0">
+                <a:solidFill>
+                  <a:srgbClr val="2C2C2C"/>
+                </a:solidFill>
+                <a:latin typeface="Calibri" pitchFamily="34" charset="0"/>
+                <a:ea typeface="Calibri" pitchFamily="34" charset="-122"/>
+                <a:cs typeface="Calibri" pitchFamily="34" charset="-120"/>
+              </a:rPr>
+              <a:t>Kiểm tra xe đạt chuẩn, thay nhớt &amp; lọc nhớt mới. Ghi mốc nhắc bảo dưỡng 5.000–10.000km tiếp.</a:t>
+            </a:r>
+          </a:p>
+        </p:txBody>
+      </p:sp>
+      <p:sp>
+        <p:nvSpPr>
+          <p:cNvPr id="526" name="Sep3"/>
+          <p:cNvSpPr/>
+          <p:nvPr/>
+        </p:nvSpPr>
+        <p:spPr>
+          <a:xfrm>
+            <a:off x="280000" y="3860000"/>
+            <a:ext cx="11632000" cy="10000"/>
+          </a:xfrm>
+          <a:prstGeom prst="rect">
+            <a:avLst/>
+          </a:prstGeom>
+          <a:solidFill>
+            <a:srgbClr val="E0E3E8"/>
+          </a:solidFill>
           <a:ln>
             <a:noFill/>
           </a:ln>
         </p:spPr>
-        <p:txBody>
-          <a:bodyPr wrap="square" lIns="0" tIns="0" rIns="0" bIns="0" rtlCol="0" anchor="t"/>
-          <a:lstStyle/>
-          <a:p>
-            <a:pPr algn="l" indent="0" marL="0">
-              <a:buNone/>
-            </a:pPr>
-            <a:r>
-              <a:rPr lang="vi-VN" sz="1000" b="0" i="0" kern="0" dirty="0">
-                <a:solidFill>
-                  <a:srgbClr val="2C2C2C"/>
-                </a:solidFill>
-                <a:latin typeface="Calibri" pitchFamily="34" charset="0"/>
-                <a:ea typeface="Calibri" pitchFamily="34" charset="-122"/>
-                <a:cs typeface="Calibri" pitchFamily="34" charset="-120"/>
-              </a:rPr>
-              <a:t>Thống nhất ngày &amp; giờ giao xe cụ thể. Đảm bảo xe đã hoàn tất mọi yêu cầu và phụ kiện.</a:t>
-            </a:r>
-          </a:p>
-        </p:txBody>
-      </p:sp>
-      <p:sp>
-        <p:nvSpPr>
-          <p:cNvPr id="160" name="CardBg"/>
-          <p:cNvSpPr/>
-          <p:nvPr/>
-        </p:nvSpPr>
-        <p:spPr>
-          <a:xfrm>
-            <a:off x="8108000" y="1630000"/>
-            <a:ext cx="3784000" cy="2380000"/>
-          </a:xfrm>
-          <a:prstGeom prst="roundRect">
-            <a:avLst>
-              <a:gd name="adj" fmla="val 16667"/>
-            </a:avLst>
+      </p:sp>
+      <p:sp>
+        <p:nvSpPr>
+          <p:cNvPr id="527" name="RowBg4"/>
+          <p:cNvSpPr/>
+          <p:nvPr/>
+        </p:nvSpPr>
+        <p:spPr>
+          <a:xfrm>
+            <a:off x="280000" y="3870000"/>
+            <a:ext cx="11632000" cy="760000"/>
+          </a:xfrm>
+          <a:prstGeom prst="rect">
+            <a:avLst/>
           </a:prstGeom>
           <a:solidFill>
-            <a:srgbClr val="FFFFFF"/>
+            <a:srgbClr val="F0F2F5"/>
           </a:solidFill>
-          <a:ln w="9144">
-            <a:solidFill>
-              <a:srgbClr val="E8EBF0"/>
-            </a:solidFill>
+          <a:ln>
+            <a:noFill/>
           </a:ln>
         </p:spPr>
       </p:sp>
       <p:sp>
         <p:nvSpPr>
-          <p:cNvPr id="161" name="CardHdr"/>
-          <p:cNvSpPr/>
-          <p:nvPr/>
-        </p:nvSpPr>
-        <p:spPr>
-          <a:xfrm>
-            <a:off x="8108000" y="1630000"/>
-            <a:ext cx="3784000" cy="460000"/>
+          <p:cNvPr id="528" name="NumBg4"/>
+          <p:cNvSpPr/>
+          <p:nvPr/>
+        </p:nvSpPr>
+        <p:spPr>
+          <a:xfrm>
+            <a:off x="280000" y="3870000"/>
+            <a:ext cx="320000" cy="760000"/>
           </a:xfrm>
           <a:prstGeom prst="rect">
             <a:avLst/>
@@ -29983,94 +30218,32 @@
       </p:sp>
       <p:sp>
         <p:nvSpPr>
-          <p:cNvPr id="162" name="Cir"/>
-          <p:cNvSpPr/>
-          <p:nvPr/>
-        </p:nvSpPr>
-        <p:spPr>
-          <a:xfrm>
-            <a:off x="8208000" y="1690000"/>
-            <a:ext cx="340000" cy="340000"/>
-          </a:xfrm>
-          <a:prstGeom prst="ellipse">
-            <a:avLst/>
-          </a:prstGeom>
-          <a:solidFill>
-            <a:srgbClr val="FFFFFF"/>
-          </a:solidFill>
+          <p:cNvPr id="529" name="NumT4"/>
+          <p:cNvSpPr/>
+          <p:nvPr/>
+        </p:nvSpPr>
+        <p:spPr>
+          <a:xfrm>
+            <a:off x="280000" y="3870000"/>
+            <a:ext cx="320000" cy="760000"/>
+          </a:xfrm>
+          <a:prstGeom prst="rect">
+            <a:avLst/>
+          </a:prstGeom>
+          <a:noFill/>
           <a:ln>
             <a:noFill/>
           </a:ln>
         </p:spPr>
-      </p:sp>
-      <p:sp>
-        <p:nvSpPr>
-          <p:cNvPr id="163" name="CirN"/>
-          <p:cNvSpPr/>
-          <p:nvPr/>
-        </p:nvSpPr>
-        <p:spPr>
-          <a:xfrm>
-            <a:off x="8208000" y="1690000"/>
-            <a:ext cx="340000" cy="340000"/>
-          </a:xfrm>
-          <a:prstGeom prst="rect">
-            <a:avLst/>
-          </a:prstGeom>
-          <a:noFill/>
-          <a:ln>
-            <a:noFill/>
-          </a:ln>
-        </p:spPr>
-        <p:txBody>
-          <a:bodyPr wrap="square" lIns="0" tIns="0" rIns="0" bIns="0" rtlCol="0" anchor="ctr"/>
-          <a:lstStyle/>
-          <a:p>
-            <a:pPr algn="c" indent="0" marL="0">
-              <a:buNone/>
-            </a:pPr>
-            <a:r>
-              <a:rPr lang="vi-VN" sz="1600" b="1" i="0" kern="0" dirty="0">
-                <a:solidFill>
-                  <a:srgbClr val="1A1F36"/>
-                </a:solidFill>
-                <a:latin typeface="Calibri" pitchFamily="34" charset="0"/>
-                <a:ea typeface="Calibri" pitchFamily="34" charset="-122"/>
-                <a:cs typeface="Calibri" pitchFamily="34" charset="-120"/>
-              </a:rPr>
-              <a:t>3</a:t>
-            </a:r>
-          </a:p>
-        </p:txBody>
-      </p:sp>
-      <p:sp>
-        <p:nvSpPr>
-          <p:cNvPr id="164" name="HdrTxt"/>
-          <p:cNvSpPr/>
-          <p:nvPr/>
-        </p:nvSpPr>
-        <p:spPr>
-          <a:xfrm>
-            <a:off x="8628000" y="1630000"/>
-            <a:ext cx="3224000" cy="460000"/>
-          </a:xfrm>
-          <a:prstGeom prst="rect">
-            <a:avLst/>
-          </a:prstGeom>
-          <a:noFill/>
-          <a:ln>
-            <a:noFill/>
-          </a:ln>
-        </p:spPr>
-        <p:txBody>
-          <a:bodyPr wrap="square" lIns="0" tIns="0" rIns="0" bIns="0" rtlCol="0" anchor="ctr"/>
-          <a:lstStyle/>
-          <a:p>
-            <a:pPr algn="l" indent="0" marL="0">
-              <a:buNone/>
-            </a:pPr>
-            <a:r>
-              <a:rPr lang="vi-VN" sz="1050" b="1" i="0" kern="0" dirty="0">
+        <p:txBody>
+          <a:bodyPr wrap="square" lIns="0" tIns="0" rIns="0" bIns="0" rtlCol="0" anchor="ctr"/>
+          <a:lstStyle/>
+          <a:p>
+            <a:pPr algn="ctr" indent="0" marL="0">
+              <a:buNone/>
+            </a:pPr>
+            <a:r>
+              <a:rPr lang="vi-VN" sz="1800" b="1" kern="0" dirty="0">
                 <a:solidFill>
                   <a:srgbClr val="FFFFFF"/>
                 </a:solidFill>
@@ -30078,87 +30251,21 @@
                 <a:ea typeface="Calibri" pitchFamily="34" charset="-122"/>
                 <a:cs typeface="Calibri" pitchFamily="34" charset="-120"/>
               </a:rPr>
-              <a:t>CHUẨN BỊ XE</a:t>
-            </a:r>
-          </a:p>
-        </p:txBody>
-      </p:sp>
-      <p:sp>
-        <p:nvSpPr>
-          <p:cNvPr id="165" name="Desc"/>
-          <p:cNvSpPr/>
-          <p:nvPr/>
-        </p:nvSpPr>
-        <p:spPr>
-          <a:xfrm>
-            <a:off x="8188000" y="2130000"/>
-            <a:ext cx="3624000" cy="1840000"/>
-          </a:xfrm>
-          <a:prstGeom prst="rect">
-            <a:avLst/>
-          </a:prstGeom>
-          <a:noFill/>
-          <a:ln>
-            <a:noFill/>
-          </a:ln>
-        </p:spPr>
-        <p:txBody>
-          <a:bodyPr wrap="square" lIns="0" tIns="0" rIns="0" bIns="0" rtlCol="0" anchor="t"/>
-          <a:lstStyle/>
-          <a:p>
-            <a:pPr algn="l" indent="0" marL="0">
-              <a:buNone/>
-            </a:pPr>
-            <a:r>
-              <a:rPr lang="vi-VN" sz="1000" b="0" i="0" kern="0" dirty="0">
-                <a:solidFill>
-                  <a:srgbClr val="2C2C2C"/>
-                </a:solidFill>
-                <a:latin typeface="Calibri" pitchFamily="34" charset="0"/>
-                <a:ea typeface="Calibri" pitchFamily="34" charset="-122"/>
-                <a:cs typeface="Calibri" pitchFamily="34" charset="-120"/>
-              </a:rPr>
-              <a:t>Kiểm tra xe đạt chuẩn. Thay nhớt &amp; lọc nhớt mới. Ghi mốc nhắc BD 5.000–10.000 km tiếp theo.</a:t>
-            </a:r>
-          </a:p>
-        </p:txBody>
-      </p:sp>
-      <p:sp>
-        <p:nvSpPr>
-          <p:cNvPr id="166" name="CardBg"/>
-          <p:cNvSpPr/>
-          <p:nvPr/>
-        </p:nvSpPr>
-        <p:spPr>
-          <a:xfrm>
-            <a:off x="300000" y="4180000"/>
-            <a:ext cx="3784000" cy="2380000"/>
-          </a:xfrm>
-          <a:prstGeom prst="roundRect">
-            <a:avLst>
-              <a:gd name="adj" fmla="val 16667"/>
-            </a:avLst>
-          </a:prstGeom>
-          <a:solidFill>
-            <a:srgbClr val="FFFFFF"/>
-          </a:solidFill>
-          <a:ln w="9144">
-            <a:solidFill>
-              <a:srgbClr val="E8EBF0"/>
-            </a:solidFill>
-          </a:ln>
-        </p:spPr>
-      </p:sp>
-      <p:sp>
-        <p:nvSpPr>
-          <p:cNvPr id="167" name="CardHdr"/>
-          <p:cNvSpPr/>
-          <p:nvPr/>
-        </p:nvSpPr>
-        <p:spPr>
-          <a:xfrm>
-            <a:off x="300000" y="4180000"/>
-            <a:ext cx="3784000" cy="460000"/>
+              <a:t>4</a:t>
+            </a:r>
+          </a:p>
+        </p:txBody>
+      </p:sp>
+      <p:sp>
+        <p:nvSpPr>
+          <p:cNvPr id="530" name="Bar4"/>
+          <p:cNvSpPr/>
+          <p:nvPr/>
+        </p:nvSpPr>
+        <p:spPr>
+          <a:xfrm>
+            <a:off x="600000" y="3870000"/>
+            <a:ext cx="12000" cy="760000"/>
           </a:xfrm>
           <a:prstGeom prst="rect">
             <a:avLst/>
@@ -30173,20 +30280,100 @@
       </p:sp>
       <p:sp>
         <p:nvSpPr>
-          <p:cNvPr id="168" name="Cir"/>
-          <p:cNvSpPr/>
-          <p:nvPr/>
-        </p:nvSpPr>
-        <p:spPr>
-          <a:xfrm>
-            <a:off x="400000" y="4240000"/>
-            <a:ext cx="340000" cy="340000"/>
-          </a:xfrm>
-          <a:prstGeom prst="ellipse">
+          <p:cNvPr id="531" name="StepT4"/>
+          <p:cNvSpPr/>
+          <p:nvPr/>
+        </p:nvSpPr>
+        <p:spPr>
+          <a:xfrm>
+            <a:off x="692000" y="3870000"/>
+            <a:ext cx="3200000" cy="760000"/>
+          </a:xfrm>
+          <a:prstGeom prst="rect">
+            <a:avLst/>
+          </a:prstGeom>
+          <a:noFill/>
+          <a:ln>
+            <a:noFill/>
+          </a:ln>
+        </p:spPr>
+        <p:txBody>
+          <a:bodyPr wrap="square" lIns="0" tIns="0" rIns="0" bIns="0" rtlCol="0" anchor="ctr"/>
+          <a:lstStyle/>
+          <a:p>
+            <a:pPr algn="l" indent="0" marL="0">
+              <a:buNone/>
+            </a:pPr>
+            <a:r>
+              <a:rPr lang="vi-VN" sz="1200" b="1" kern="0" dirty="0">
+                <a:solidFill>
+                  <a:srgbClr val="1A1F36"/>
+                </a:solidFill>
+                <a:latin typeface="Calibri" pitchFamily="34" charset="0"/>
+                <a:ea typeface="Calibri" pitchFamily="34" charset="-122"/>
+                <a:cs typeface="Calibri" pitchFamily="34" charset="-120"/>
+              </a:rPr>
+              <a:t>THỦ TỤC RA CỔNG</a:t>
+            </a:r>
+          </a:p>
+        </p:txBody>
+      </p:sp>
+      <p:sp>
+        <p:nvSpPr>
+          <p:cNvPr id="532" name="StepD4"/>
+          <p:cNvSpPr/>
+          <p:nvPr/>
+        </p:nvSpPr>
+        <p:spPr>
+          <a:xfrm>
+            <a:off x="3952000" y="3870000"/>
+            <a:ext cx="7960000" cy="760000"/>
+          </a:xfrm>
+          <a:prstGeom prst="rect">
+            <a:avLst/>
+          </a:prstGeom>
+          <a:noFill/>
+          <a:ln>
+            <a:noFill/>
+          </a:ln>
+        </p:spPr>
+        <p:txBody>
+          <a:bodyPr wrap="square" lIns="0" tIns="0" rIns="0" bIns="0" rtlCol="0" anchor="ctr"/>
+          <a:lstStyle/>
+          <a:p>
+            <a:pPr algn="l" indent="0" marL="0">
+              <a:buNone/>
+            </a:pPr>
+            <a:r>
+              <a:rPr lang="vi-VN" sz="1080" b="0" kern="0" dirty="0">
+                <a:solidFill>
+                  <a:srgbClr val="2C2C2C"/>
+                </a:solidFill>
+                <a:latin typeface="Calibri" pitchFamily="34" charset="0"/>
+                <a:ea typeface="Calibri" pitchFamily="34" charset="-122"/>
+                <a:cs typeface="Calibri" pitchFamily="34" charset="-120"/>
+              </a:rPr>
+              <a:t>Kế toán quyết toán sổ sách, ký phiếu ra cổng. Cà số khung – số máy. Tháo biển số cũ.</a:t>
+            </a:r>
+          </a:p>
+        </p:txBody>
+      </p:sp>
+      <p:sp>
+        <p:nvSpPr>
+          <p:cNvPr id="533" name="Sep4"/>
+          <p:cNvSpPr/>
+          <p:nvPr/>
+        </p:nvSpPr>
+        <p:spPr>
+          <a:xfrm>
+            <a:off x="280000" y="4620000"/>
+            <a:ext cx="11632000" cy="10000"/>
+          </a:xfrm>
+          <a:prstGeom prst="rect">
             <a:avLst/>
           </a:prstGeom>
           <a:solidFill>
-            <a:srgbClr val="FFFFFF"/>
+            <a:srgbClr val="E0E3E8"/>
           </a:solidFill>
           <a:ln>
             <a:noFill/>
@@ -30195,161 +30382,36 @@
       </p:sp>
       <p:sp>
         <p:nvSpPr>
-          <p:cNvPr id="169" name="CirN"/>
-          <p:cNvSpPr/>
-          <p:nvPr/>
-        </p:nvSpPr>
-        <p:spPr>
-          <a:xfrm>
-            <a:off x="400000" y="4240000"/>
-            <a:ext cx="340000" cy="340000"/>
-          </a:xfrm>
-          <a:prstGeom prst="rect">
-            <a:avLst/>
-          </a:prstGeom>
-          <a:noFill/>
+          <p:cNvPr id="534" name="RowBg5"/>
+          <p:cNvSpPr/>
+          <p:nvPr/>
+        </p:nvSpPr>
+        <p:spPr>
+          <a:xfrm>
+            <a:off x="280000" y="4630000"/>
+            <a:ext cx="11632000" cy="760000"/>
+          </a:xfrm>
+          <a:prstGeom prst="rect">
+            <a:avLst/>
+          </a:prstGeom>
+          <a:solidFill>
+            <a:srgbClr val="F0F2F5"/>
+          </a:solidFill>
           <a:ln>
             <a:noFill/>
           </a:ln>
         </p:spPr>
-        <p:txBody>
-          <a:bodyPr wrap="square" lIns="0" tIns="0" rIns="0" bIns="0" rtlCol="0" anchor="ctr"/>
-          <a:lstStyle/>
-          <a:p>
-            <a:pPr algn="c" indent="0" marL="0">
-              <a:buNone/>
-            </a:pPr>
-            <a:r>
-              <a:rPr lang="vi-VN" sz="1600" b="1" i="0" kern="0" dirty="0">
-                <a:solidFill>
-                  <a:srgbClr val="1A1F36"/>
-                </a:solidFill>
-                <a:latin typeface="Calibri" pitchFamily="34" charset="0"/>
-                <a:ea typeface="Calibri" pitchFamily="34" charset="-122"/>
-                <a:cs typeface="Calibri" pitchFamily="34" charset="-120"/>
-              </a:rPr>
-              <a:t>4</a:t>
-            </a:r>
-          </a:p>
-        </p:txBody>
-      </p:sp>
-      <p:sp>
-        <p:nvSpPr>
-          <p:cNvPr id="170" name="HdrTxt"/>
-          <p:cNvSpPr/>
-          <p:nvPr/>
-        </p:nvSpPr>
-        <p:spPr>
-          <a:xfrm>
-            <a:off x="820000" y="4180000"/>
-            <a:ext cx="3224000" cy="460000"/>
-          </a:xfrm>
-          <a:prstGeom prst="rect">
-            <a:avLst/>
-          </a:prstGeom>
-          <a:noFill/>
-          <a:ln>
-            <a:noFill/>
-          </a:ln>
-        </p:spPr>
-        <p:txBody>
-          <a:bodyPr wrap="square" lIns="0" tIns="0" rIns="0" bIns="0" rtlCol="0" anchor="ctr"/>
-          <a:lstStyle/>
-          <a:p>
-            <a:pPr algn="l" indent="0" marL="0">
-              <a:buNone/>
-            </a:pPr>
-            <a:r>
-              <a:rPr lang="vi-VN" sz="1050" b="1" i="0" kern="0" dirty="0">
-                <a:solidFill>
-                  <a:srgbClr val="FFFFFF"/>
-                </a:solidFill>
-                <a:latin typeface="Calibri" pitchFamily="34" charset="0"/>
-                <a:ea typeface="Calibri" pitchFamily="34" charset="-122"/>
-                <a:cs typeface="Calibri" pitchFamily="34" charset="-120"/>
-              </a:rPr>
-              <a:t>THỦ TỤC
-RA CỔNG</a:t>
-            </a:r>
-          </a:p>
-        </p:txBody>
-      </p:sp>
-      <p:sp>
-        <p:nvSpPr>
-          <p:cNvPr id="171" name="Desc"/>
-          <p:cNvSpPr/>
-          <p:nvPr/>
-        </p:nvSpPr>
-        <p:spPr>
-          <a:xfrm>
-            <a:off x="380000" y="4680000"/>
-            <a:ext cx="3624000" cy="1840000"/>
-          </a:xfrm>
-          <a:prstGeom prst="rect">
-            <a:avLst/>
-          </a:prstGeom>
-          <a:noFill/>
-          <a:ln>
-            <a:noFill/>
-          </a:ln>
-        </p:spPr>
-        <p:txBody>
-          <a:bodyPr wrap="square" lIns="0" tIns="0" rIns="0" bIns="0" rtlCol="0" anchor="t"/>
-          <a:lstStyle/>
-          <a:p>
-            <a:pPr algn="l" indent="0" marL="0">
-              <a:buNone/>
-            </a:pPr>
-            <a:r>
-              <a:rPr lang="vi-VN" sz="1000" b="0" i="0" kern="0" dirty="0">
-                <a:solidFill>
-                  <a:srgbClr val="2C2C2C"/>
-                </a:solidFill>
-                <a:latin typeface="Calibri" pitchFamily="34" charset="0"/>
-                <a:ea typeface="Calibri" pitchFamily="34" charset="-122"/>
-                <a:cs typeface="Calibri" pitchFamily="34" charset="-120"/>
-              </a:rPr>
-              <a:t>Kế toán quyết toán sổ sách, ký phiếu ra cổng. Cà số khung – số máy. Tháo biển số cũ.</a:t>
-            </a:r>
-          </a:p>
-        </p:txBody>
-      </p:sp>
-      <p:sp>
-        <p:nvSpPr>
-          <p:cNvPr id="172" name="CardBg"/>
-          <p:cNvSpPr/>
-          <p:nvPr/>
-        </p:nvSpPr>
-        <p:spPr>
-          <a:xfrm>
-            <a:off x="4204000" y="4180000"/>
-            <a:ext cx="3784000" cy="2380000"/>
-          </a:xfrm>
-          <a:prstGeom prst="roundRect">
-            <a:avLst>
-              <a:gd name="adj" fmla="val 16667"/>
-            </a:avLst>
-          </a:prstGeom>
-          <a:solidFill>
-            <a:srgbClr val="FFFFFF"/>
-          </a:solidFill>
-          <a:ln w="9144">
-            <a:solidFill>
-              <a:srgbClr val="E8EBF0"/>
-            </a:solidFill>
-          </a:ln>
-        </p:spPr>
-      </p:sp>
-      <p:sp>
-        <p:nvSpPr>
-          <p:cNvPr id="173" name="CardHdr"/>
-          <p:cNvSpPr/>
-          <p:nvPr/>
-        </p:nvSpPr>
-        <p:spPr>
-          <a:xfrm>
-            <a:off x="4204000" y="4180000"/>
-            <a:ext cx="3784000" cy="460000"/>
+      </p:sp>
+      <p:sp>
+        <p:nvSpPr>
+          <p:cNvPr id="535" name="NumBg5"/>
+          <p:cNvSpPr/>
+          <p:nvPr/>
+        </p:nvSpPr>
+        <p:spPr>
+          <a:xfrm>
+            <a:off x="280000" y="4630000"/>
+            <a:ext cx="320000" cy="760000"/>
           </a:xfrm>
           <a:prstGeom prst="rect">
             <a:avLst/>
@@ -30364,20 +30426,60 @@
       </p:sp>
       <p:sp>
         <p:nvSpPr>
-          <p:cNvPr id="174" name="Cir"/>
-          <p:cNvSpPr/>
-          <p:nvPr/>
-        </p:nvSpPr>
-        <p:spPr>
-          <a:xfrm>
-            <a:off x="4304000" y="4240000"/>
-            <a:ext cx="340000" cy="340000"/>
-          </a:xfrm>
-          <a:prstGeom prst="ellipse">
+          <p:cNvPr id="536" name="NumT5"/>
+          <p:cNvSpPr/>
+          <p:nvPr/>
+        </p:nvSpPr>
+        <p:spPr>
+          <a:xfrm>
+            <a:off x="280000" y="4630000"/>
+            <a:ext cx="320000" cy="760000"/>
+          </a:xfrm>
+          <a:prstGeom prst="rect">
+            <a:avLst/>
+          </a:prstGeom>
+          <a:noFill/>
+          <a:ln>
+            <a:noFill/>
+          </a:ln>
+        </p:spPr>
+        <p:txBody>
+          <a:bodyPr wrap="square" lIns="0" tIns="0" rIns="0" bIns="0" rtlCol="0" anchor="ctr"/>
+          <a:lstStyle/>
+          <a:p>
+            <a:pPr algn="ctr" indent="0" marL="0">
+              <a:buNone/>
+            </a:pPr>
+            <a:r>
+              <a:rPr lang="vi-VN" sz="1800" b="1" kern="0" dirty="0">
+                <a:solidFill>
+                  <a:srgbClr val="FFFFFF"/>
+                </a:solidFill>
+                <a:latin typeface="Calibri" pitchFamily="34" charset="0"/>
+                <a:ea typeface="Calibri" pitchFamily="34" charset="-122"/>
+                <a:cs typeface="Calibri" pitchFamily="34" charset="-120"/>
+              </a:rPr>
+              <a:t>5</a:t>
+            </a:r>
+          </a:p>
+        </p:txBody>
+      </p:sp>
+      <p:sp>
+        <p:nvSpPr>
+          <p:cNvPr id="537" name="Bar5"/>
+          <p:cNvSpPr/>
+          <p:nvPr/>
+        </p:nvSpPr>
+        <p:spPr>
+          <a:xfrm>
+            <a:off x="600000" y="4630000"/>
+            <a:ext cx="12000" cy="760000"/>
+          </a:xfrm>
+          <a:prstGeom prst="rect">
             <a:avLst/>
           </a:prstGeom>
           <a:solidFill>
-            <a:srgbClr val="FFFFFF"/>
+            <a:srgbClr val="E60012"/>
           </a:solidFill>
           <a:ln>
             <a:noFill/>
@@ -30386,14 +30488,14 @@
       </p:sp>
       <p:sp>
         <p:nvSpPr>
-          <p:cNvPr id="175" name="CirN"/>
-          <p:cNvSpPr/>
-          <p:nvPr/>
-        </p:nvSpPr>
-        <p:spPr>
-          <a:xfrm>
-            <a:off x="4304000" y="4240000"/>
-            <a:ext cx="340000" cy="340000"/>
+          <p:cNvPr id="538" name="StepT5"/>
+          <p:cNvSpPr/>
+          <p:nvPr/>
+        </p:nvSpPr>
+        <p:spPr>
+          <a:xfrm>
+            <a:off x="692000" y="4630000"/>
+            <a:ext cx="3200000" cy="760000"/>
           </a:xfrm>
           <a:prstGeom prst="rect">
             <a:avLst/>
@@ -30407,33 +30509,33 @@
           <a:bodyPr wrap="square" lIns="0" tIns="0" rIns="0" bIns="0" rtlCol="0" anchor="ctr"/>
           <a:lstStyle/>
           <a:p>
-            <a:pPr algn="c" indent="0" marL="0">
-              <a:buNone/>
-            </a:pPr>
-            <a:r>
-              <a:rPr lang="vi-VN" sz="1600" b="1" i="0" kern="0" dirty="0">
-                <a:solidFill>
-                  <a:srgbClr val="E60012"/>
-                </a:solidFill>
-                <a:latin typeface="Calibri" pitchFamily="34" charset="0"/>
-                <a:ea typeface="Calibri" pitchFamily="34" charset="-122"/>
-                <a:cs typeface="Calibri" pitchFamily="34" charset="-120"/>
-              </a:rPr>
-              <a:t>5</a:t>
-            </a:r>
-          </a:p>
-        </p:txBody>
-      </p:sp>
-      <p:sp>
-        <p:nvSpPr>
-          <p:cNvPr id="176" name="HdrTxt"/>
-          <p:cNvSpPr/>
-          <p:nvPr/>
-        </p:nvSpPr>
-        <p:spPr>
-          <a:xfrm>
-            <a:off x="4724000" y="4180000"/>
-            <a:ext cx="3224000" cy="460000"/>
+            <a:pPr algn="l" indent="0" marL="0">
+              <a:buNone/>
+            </a:pPr>
+            <a:r>
+              <a:rPr lang="vi-VN" sz="1200" b="1" kern="0" dirty="0">
+                <a:solidFill>
+                  <a:srgbClr val="1A1F36"/>
+                </a:solidFill>
+                <a:latin typeface="Calibri" pitchFamily="34" charset="0"/>
+                <a:ea typeface="Calibri" pitchFamily="34" charset="-122"/>
+                <a:cs typeface="Calibri" pitchFamily="34" charset="-120"/>
+              </a:rPr>
+              <a:t>BÀN GIAO &amp; HƯỚNG DẪN</a:t>
+            </a:r>
+          </a:p>
+        </p:txBody>
+      </p:sp>
+      <p:sp>
+        <p:nvSpPr>
+          <p:cNvPr id="539" name="StepD5"/>
+          <p:cNvSpPr/>
+          <p:nvPr/>
+        </p:nvSpPr>
+        <p:spPr>
+          <a:xfrm>
+            <a:off x="3952000" y="4630000"/>
+            <a:ext cx="7960000" cy="760000"/>
           </a:xfrm>
           <a:prstGeom prst="rect">
             <a:avLst/>
@@ -30451,96 +30553,73 @@
               <a:buNone/>
             </a:pPr>
             <a:r>
-              <a:rPr lang="vi-VN" sz="1050" b="1" i="0" kern="0" dirty="0">
-                <a:solidFill>
-                  <a:srgbClr val="FFFFFF"/>
-                </a:solidFill>
-                <a:latin typeface="Calibri" pitchFamily="34" charset="0"/>
-                <a:ea typeface="Calibri" pitchFamily="34" charset="-122"/>
-                <a:cs typeface="Calibri" pitchFamily="34" charset="-120"/>
-              </a:rPr>
-              <a:t>BÀN GIAO &amp;
-HƯỚNG DẪN</a:t>
-            </a:r>
-          </a:p>
-        </p:txBody>
-      </p:sp>
-      <p:sp>
-        <p:nvSpPr>
-          <p:cNvPr id="177" name="Desc"/>
-          <p:cNvSpPr/>
-          <p:nvPr/>
-        </p:nvSpPr>
-        <p:spPr>
-          <a:xfrm>
-            <a:off x="4284000" y="4680000"/>
-            <a:ext cx="3624000" cy="1840000"/>
-          </a:xfrm>
-          <a:prstGeom prst="rect">
-            <a:avLst/>
-          </a:prstGeom>
-          <a:noFill/>
+              <a:rPr lang="vi-VN" sz="1080" b="0" kern="0" dirty="0">
+                <a:solidFill>
+                  <a:srgbClr val="2C2C2C"/>
+                </a:solidFill>
+                <a:latin typeface="Calibri" pitchFamily="34" charset="0"/>
+                <a:ea typeface="Calibri" pitchFamily="34" charset="-122"/>
+                <a:cs typeface="Calibri" pitchFamily="34" charset="-120"/>
+              </a:rPr>
+              <a:t>Trao sổ bảo hành CPO + giấy tờ đầy đủ. Hướng dẫn KH tính năng xe và nhắc lịch bảo dưỡng.</a:t>
+            </a:r>
+          </a:p>
+        </p:txBody>
+      </p:sp>
+      <p:sp>
+        <p:nvSpPr>
+          <p:cNvPr id="540" name="Sep5"/>
+          <p:cNvSpPr/>
+          <p:nvPr/>
+        </p:nvSpPr>
+        <p:spPr>
+          <a:xfrm>
+            <a:off x="280000" y="5380000"/>
+            <a:ext cx="11632000" cy="10000"/>
+          </a:xfrm>
+          <a:prstGeom prst="rect">
+            <a:avLst/>
+          </a:prstGeom>
+          <a:solidFill>
+            <a:srgbClr val="E0E3E8"/>
+          </a:solidFill>
           <a:ln>
             <a:noFill/>
           </a:ln>
         </p:spPr>
-        <p:txBody>
-          <a:bodyPr wrap="square" lIns="0" tIns="0" rIns="0" bIns="0" rtlCol="0" anchor="t"/>
-          <a:lstStyle/>
-          <a:p>
-            <a:pPr algn="l" indent="0" marL="0">
-              <a:buNone/>
-            </a:pPr>
-            <a:r>
-              <a:rPr lang="vi-VN" sz="1000" b="0" i="0" kern="0" dirty="0">
-                <a:solidFill>
-                  <a:srgbClr val="2C2C2C"/>
-                </a:solidFill>
-                <a:latin typeface="Calibri" pitchFamily="34" charset="0"/>
-                <a:ea typeface="Calibri" pitchFamily="34" charset="-122"/>
-                <a:cs typeface="Calibri" pitchFamily="34" charset="-120"/>
-              </a:rPr>
-              <a:t>Trao sổ BH CPO, giấy tờ đầy đủ. Hướng dẫn KH tính năng xe. Nhắc lịch bảo dưỡng định kỳ.</a:t>
-            </a:r>
-          </a:p>
-        </p:txBody>
-      </p:sp>
-      <p:sp>
-        <p:nvSpPr>
-          <p:cNvPr id="178" name="CardBg"/>
-          <p:cNvSpPr/>
-          <p:nvPr/>
-        </p:nvSpPr>
-        <p:spPr>
-          <a:xfrm>
-            <a:off x="8108000" y="4180000"/>
-            <a:ext cx="3784000" cy="2380000"/>
-          </a:xfrm>
-          <a:prstGeom prst="roundRect">
-            <a:avLst>
-              <a:gd name="adj" fmla="val 16667"/>
-            </a:avLst>
+      </p:sp>
+      <p:sp>
+        <p:nvSpPr>
+          <p:cNvPr id="541" name="RowBg6"/>
+          <p:cNvSpPr/>
+          <p:nvPr/>
+        </p:nvSpPr>
+        <p:spPr>
+          <a:xfrm>
+            <a:off x="280000" y="5390000"/>
+            <a:ext cx="11632000" cy="760000"/>
+          </a:xfrm>
+          <a:prstGeom prst="rect">
+            <a:avLst/>
           </a:prstGeom>
           <a:solidFill>
-            <a:srgbClr val="FFFFFF"/>
+            <a:srgbClr val="F0F2F5"/>
           </a:solidFill>
-          <a:ln w="9144">
-            <a:solidFill>
-              <a:srgbClr val="E8EBF0"/>
-            </a:solidFill>
+          <a:ln>
+            <a:noFill/>
           </a:ln>
         </p:spPr>
       </p:sp>
       <p:sp>
         <p:nvSpPr>
-          <p:cNvPr id="179" name="CardHdr"/>
-          <p:cNvSpPr/>
-          <p:nvPr/>
-        </p:nvSpPr>
-        <p:spPr>
-          <a:xfrm>
-            <a:off x="8108000" y="4180000"/>
-            <a:ext cx="3784000" cy="460000"/>
+          <p:cNvPr id="542" name="NumBg6"/>
+          <p:cNvSpPr/>
+          <p:nvPr/>
+        </p:nvSpPr>
+        <p:spPr>
+          <a:xfrm>
+            <a:off x="280000" y="5390000"/>
+            <a:ext cx="320000" cy="760000"/>
           </a:xfrm>
           <a:prstGeom prst="rect">
             <a:avLst/>
@@ -30555,20 +30634,60 @@
       </p:sp>
       <p:sp>
         <p:nvSpPr>
-          <p:cNvPr id="180" name="Cir"/>
-          <p:cNvSpPr/>
-          <p:nvPr/>
-        </p:nvSpPr>
-        <p:spPr>
-          <a:xfrm>
-            <a:off x="8208000" y="4240000"/>
-            <a:ext cx="340000" cy="340000"/>
-          </a:xfrm>
-          <a:prstGeom prst="ellipse">
+          <p:cNvPr id="543" name="NumT6"/>
+          <p:cNvSpPr/>
+          <p:nvPr/>
+        </p:nvSpPr>
+        <p:spPr>
+          <a:xfrm>
+            <a:off x="280000" y="5390000"/>
+            <a:ext cx="320000" cy="760000"/>
+          </a:xfrm>
+          <a:prstGeom prst="rect">
+            <a:avLst/>
+          </a:prstGeom>
+          <a:noFill/>
+          <a:ln>
+            <a:noFill/>
+          </a:ln>
+        </p:spPr>
+        <p:txBody>
+          <a:bodyPr wrap="square" lIns="0" tIns="0" rIns="0" bIns="0" rtlCol="0" anchor="ctr"/>
+          <a:lstStyle/>
+          <a:p>
+            <a:pPr algn="ctr" indent="0" marL="0">
+              <a:buNone/>
+            </a:pPr>
+            <a:r>
+              <a:rPr lang="vi-VN" sz="1800" b="1" kern="0" dirty="0">
+                <a:solidFill>
+                  <a:srgbClr val="FFFFFF"/>
+                </a:solidFill>
+                <a:latin typeface="Calibri" pitchFamily="34" charset="0"/>
+                <a:ea typeface="Calibri" pitchFamily="34" charset="-122"/>
+                <a:cs typeface="Calibri" pitchFamily="34" charset="-120"/>
+              </a:rPr>
+              <a:t>6</a:t>
+            </a:r>
+          </a:p>
+        </p:txBody>
+      </p:sp>
+      <p:sp>
+        <p:nvSpPr>
+          <p:cNvPr id="544" name="Bar6"/>
+          <p:cNvSpPr/>
+          <p:nvPr/>
+        </p:nvSpPr>
+        <p:spPr>
+          <a:xfrm>
+            <a:off x="600000" y="5390000"/>
+            <a:ext cx="12000" cy="760000"/>
+          </a:xfrm>
+          <a:prstGeom prst="rect">
             <a:avLst/>
           </a:prstGeom>
           <a:solidFill>
-            <a:srgbClr val="FFFFFF"/>
+            <a:srgbClr val="1A1F36"/>
           </a:solidFill>
           <a:ln>
             <a:noFill/>
@@ -30577,14 +30696,14 @@
       </p:sp>
       <p:sp>
         <p:nvSpPr>
-          <p:cNvPr id="181" name="CirN"/>
-          <p:cNvSpPr/>
-          <p:nvPr/>
-        </p:nvSpPr>
-        <p:spPr>
-          <a:xfrm>
-            <a:off x="8208000" y="4240000"/>
-            <a:ext cx="340000" cy="340000"/>
+          <p:cNvPr id="545" name="StepT6"/>
+          <p:cNvSpPr/>
+          <p:nvPr/>
+        </p:nvSpPr>
+        <p:spPr>
+          <a:xfrm>
+            <a:off x="692000" y="5390000"/>
+            <a:ext cx="3200000" cy="760000"/>
           </a:xfrm>
           <a:prstGeom prst="rect">
             <a:avLst/>
@@ -30598,11 +30717,11 @@
           <a:bodyPr wrap="square" lIns="0" tIns="0" rIns="0" bIns="0" rtlCol="0" anchor="ctr"/>
           <a:lstStyle/>
           <a:p>
-            <a:pPr algn="c" indent="0" marL="0">
-              <a:buNone/>
-            </a:pPr>
-            <a:r>
-              <a:rPr lang="vi-VN" sz="1600" b="1" i="0" kern="0" dirty="0">
+            <a:pPr algn="l" indent="0" marL="0">
+              <a:buNone/>
+            </a:pPr>
+            <a:r>
+              <a:rPr lang="vi-VN" sz="1200" b="1" kern="0" dirty="0">
                 <a:solidFill>
                   <a:srgbClr val="1A1F36"/>
                 </a:solidFill>
@@ -30610,21 +30729,21 @@
                 <a:ea typeface="Calibri" pitchFamily="34" charset="-122"/>
                 <a:cs typeface="Calibri" pitchFamily="34" charset="-120"/>
               </a:rPr>
-              <a:t>6</a:t>
-            </a:r>
-          </a:p>
-        </p:txBody>
-      </p:sp>
-      <p:sp>
-        <p:nvSpPr>
-          <p:cNvPr id="182" name="HdrTxt"/>
-          <p:cNvSpPr/>
-          <p:nvPr/>
-        </p:nvSpPr>
-        <p:spPr>
-          <a:xfrm>
-            <a:off x="8628000" y="4180000"/>
-            <a:ext cx="3224000" cy="460000"/>
+              <a:t>LƯU HỒ SƠ NỘI BỘ</a:t>
+            </a:r>
+          </a:p>
+        </p:txBody>
+      </p:sp>
+      <p:sp>
+        <p:nvSpPr>
+          <p:cNvPr id="546" name="StepD6"/>
+          <p:cNvSpPr/>
+          <p:nvPr/>
+        </p:nvSpPr>
+        <p:spPr>
+          <a:xfrm>
+            <a:off x="3952000" y="5390000"/>
+            <a:ext cx="7960000" cy="760000"/>
           </a:xfrm>
           <a:prstGeom prst="rect">
             <a:avLst/>
@@ -30642,63 +30761,44 @@
               <a:buNone/>
             </a:pPr>
             <a:r>
-              <a:rPr lang="vi-VN" sz="1050" b="1" i="0" kern="0" dirty="0">
-                <a:solidFill>
-                  <a:srgbClr val="FFFFFF"/>
-                </a:solidFill>
-                <a:latin typeface="Calibri" pitchFamily="34" charset="0"/>
-                <a:ea typeface="Calibri" pitchFamily="34" charset="-122"/>
-                <a:cs typeface="Calibri" pitchFamily="34" charset="-120"/>
-              </a:rPr>
-              <a:t>LƯU HỒ SƠ
-NỘI BỘ</a:t>
-            </a:r>
-          </a:p>
-        </p:txBody>
-      </p:sp>
-      <p:sp>
-        <p:nvSpPr>
-          <p:cNvPr id="183" name="Desc"/>
-          <p:cNvSpPr/>
-          <p:nvPr/>
-        </p:nvSpPr>
-        <p:spPr>
-          <a:xfrm>
-            <a:off x="8188000" y="4680000"/>
-            <a:ext cx="3624000" cy="1840000"/>
-          </a:xfrm>
-          <a:prstGeom prst="rect">
-            <a:avLst/>
-          </a:prstGeom>
-          <a:noFill/>
+              <a:rPr lang="vi-VN" sz="1080" b="0" kern="0" dirty="0">
+                <a:solidFill>
+                  <a:srgbClr val="2C2C2C"/>
+                </a:solidFill>
+                <a:latin typeface="Calibri" pitchFamily="34" charset="0"/>
+                <a:ea typeface="Calibri" pitchFamily="34" charset="-122"/>
+                <a:cs typeface="Calibri" pitchFamily="34" charset="-120"/>
+              </a:rPr>
+              <a:t>Kế toán lưu: Biên bản bàn giao + phiếu đề xuất + HĐ mua bán. Phòng xe cũ lưu bản photo.</a:t>
+            </a:r>
+          </a:p>
+        </p:txBody>
+      </p:sp>
+      <p:sp>
+        <p:nvSpPr>
+          <p:cNvPr id="547" name="Sep6"/>
+          <p:cNvSpPr/>
+          <p:nvPr/>
+        </p:nvSpPr>
+        <p:spPr>
+          <a:xfrm>
+            <a:off x="280000" y="6140000"/>
+            <a:ext cx="11632000" cy="10000"/>
+          </a:xfrm>
+          <a:prstGeom prst="rect">
+            <a:avLst/>
+          </a:prstGeom>
+          <a:solidFill>
+            <a:srgbClr val="E0E3E8"/>
+          </a:solidFill>
           <a:ln>
             <a:noFill/>
           </a:ln>
         </p:spPr>
-        <p:txBody>
-          <a:bodyPr wrap="square" lIns="0" tIns="0" rIns="0" bIns="0" rtlCol="0" anchor="t"/>
-          <a:lstStyle/>
-          <a:p>
-            <a:pPr algn="l" indent="0" marL="0">
-              <a:buNone/>
-            </a:pPr>
-            <a:r>
-              <a:rPr lang="vi-VN" sz="1000" b="0" i="0" kern="0" dirty="0">
-                <a:solidFill>
-                  <a:srgbClr val="2C2C2C"/>
-                </a:solidFill>
-                <a:latin typeface="Calibri" pitchFamily="34" charset="0"/>
-                <a:ea typeface="Calibri" pitchFamily="34" charset="-122"/>
-                <a:cs typeface="Calibri" pitchFamily="34" charset="-120"/>
-              </a:rPr>
-              <a:t>Kế toán lưu: Biên bản bàn giao + phiếu đề xuất + HĐ mua bán. Phòng xe cũ lưu bản photo.</a:t>
-            </a:r>
-          </a:p>
-        </p:txBody>
-      </p:sp>
-      <p:sp>
-        <p:nvSpPr>
-          <p:cNvPr id="184" name="FBar"/>
+      </p:sp>
+      <p:sp>
+        <p:nvSpPr>
+          <p:cNvPr id="548" name="FBar"/>
           <p:cNvSpPr/>
           <p:nvPr/>
         </p:nvSpPr>
@@ -30720,7 +30820,7 @@
       </p:sp>
       <p:sp>
         <p:nvSpPr>
-          <p:cNvPr id="185" name="FTxt"/>
+          <p:cNvPr id="549" name="FTxt"/>
           <p:cNvSpPr/>
           <p:nvPr/>
         </p:nvSpPr>
@@ -30745,7 +30845,7 @@
               <a:buNone/>
             </a:pPr>
             <a:r>
-              <a:rPr lang="vi-VN" sz="1000" b="0" i="0" kern="0" dirty="0">
+              <a:rPr lang="vi-VN" sz="1000" b="0" kern="0" dirty="0">
                 <a:solidFill>
                   <a:srgbClr val="4A4A4A"/>
                 </a:solidFill>
@@ -30760,7 +30860,7 @@
       </p:sp>
       <p:sp>
         <p:nvSpPr>
-          <p:cNvPr id="186" name="FPg"/>
+          <p:cNvPr id="550" name="FPg"/>
           <p:cNvSpPr/>
           <p:nvPr/>
         </p:nvSpPr>
@@ -30785,7 +30885,7 @@
               <a:buNone/>
             </a:pPr>
             <a:r>
-              <a:rPr lang="vi-VN" sz="1000" b="0" i="0" kern="0" dirty="0">
+              <a:rPr lang="vi-VN" sz="1000" b="0" kern="0" dirty="0">
                 <a:solidFill>
                   <a:srgbClr val="B8BDC4"/>
                 </a:solidFill>
@@ -30793,7 +30893,7 @@
                 <a:ea typeface="Calibri" pitchFamily="34" charset="-122"/>
                 <a:cs typeface="Calibri" pitchFamily="34" charset="-120"/>
               </a:rPr>
-              <a:t>27 / 30</a:t>
+              <a:t>26 / 30</a:t>
             </a:r>
           </a:p>
         </p:txBody>
@@ -30825,7 +30925,7 @@
       <p:grpSpPr/>
       <p:sp>
         <p:nvSpPr>
-          <p:cNvPr id="187" name="RedBar"/>
+          <p:cNvPr id="551" name="LBar"/>
           <p:cNvSpPr/>
           <p:nvPr/>
         </p:nvSpPr>
@@ -30847,7 +30947,7 @@
       </p:sp>
       <p:sp>
         <p:nvSpPr>
-          <p:cNvPr id="188" name="PhanLbl"/>
+          <p:cNvPr id="552" name="P06Lbl"/>
           <p:cNvSpPr/>
           <p:nvPr/>
         </p:nvSpPr>
@@ -30872,7 +30972,7 @@
               <a:buNone/>
             </a:pPr>
             <a:r>
-              <a:rPr lang="vi-VN" sz="1600" b="1" i="0" spc="800" kern="0" dirty="0">
+              <a:rPr lang="vi-VN" sz="1600" b="1" kern="0" dirty="0">
                 <a:solidFill>
                   <a:srgbClr val="E60012"/>
                 </a:solidFill>
@@ -30887,7 +30987,7 @@
       </p:sp>
       <p:sp>
         <p:nvSpPr>
-          <p:cNvPr id="189" name="Title"/>
+          <p:cNvPr id="553" name="P06Title"/>
           <p:cNvSpPr/>
           <p:nvPr/>
         </p:nvSpPr>
@@ -30912,7 +31012,7 @@
               <a:buNone/>
             </a:pPr>
             <a:r>
-              <a:rPr lang="vi-VN" sz="4400" b="1" i="0" kern="0" dirty="0">
+              <a:rPr lang="vi-VN" sz="4400" b="1" kern="0" dirty="0">
                 <a:solidFill>
                   <a:srgbClr val="FFFFFF"/>
                 </a:solidFill>
@@ -30927,7 +31027,7 @@
       </p:sp>
       <p:sp>
         <p:nvSpPr>
-          <p:cNvPr id="190" name="Sub"/>
+          <p:cNvPr id="554" name="P06Sub"/>
           <p:cNvSpPr/>
           <p:nvPr/>
         </p:nvSpPr>
@@ -30952,7 +31052,7 @@
               <a:buNone/>
             </a:pPr>
             <a:r>
-              <a:rPr lang="vi-VN" sz="1600" b="0" i="0" kern="0" dirty="0">
+              <a:rPr lang="vi-VN" sz="1600" b="0" kern="0" dirty="0">
                 <a:solidFill>
                   <a:srgbClr val="B8BDC4"/>
                 </a:solidFill>
@@ -30960,21 +31060,21 @@
                 <a:ea typeface="Calibri" pitchFamily="34" charset="-122"/>
                 <a:cs typeface="Calibri" pitchFamily="34" charset="-120"/>
               </a:rPr>
-              <a:t>Hồ sơ NH · 8 tình huống · Hành động ngay</a:t>
-            </a:r>
-          </a:p>
-        </p:txBody>
-      </p:sp>
-      <p:sp>
-        <p:nvSpPr>
-          <p:cNvPr id="191" name="DivLine"/>
+              <a:t>Hồ sơ NH  ·  8 tình huống  ·  Hành động ngay</a:t>
+            </a:r>
+          </a:p>
+        </p:txBody>
+      </p:sp>
+      <p:sp>
+        <p:nvSpPr>
+          <p:cNvPr id="555" name="P06Line"/>
           <p:cNvSpPr/>
           <p:nvPr/>
         </p:nvSpPr>
         <p:spPr>
           <a:xfrm>
             <a:off x="914400" y="4900000"/>
-            <a:ext cx="1200000" cy="18000"/>
+            <a:ext cx="1200000" cy="16000"/>
           </a:xfrm>
           <a:prstGeom prst="rect">
             <a:avLst/>
@@ -30989,7 +31089,7 @@
       </p:sp>
       <p:sp>
         <p:nvSpPr>
-          <p:cNvPr id="192" name="Brand"/>
+          <p:cNvPr id="556" name="Brand"/>
           <p:cNvSpPr/>
           <p:nvPr/>
         </p:nvSpPr>
@@ -31014,7 +31114,7 @@
               <a:buNone/>
             </a:pPr>
             <a:r>
-              <a:rPr lang="vi-VN" sz="1100" b="1" i="0" kern="0" dirty="0">
+              <a:rPr lang="vi-VN" sz="1100" b="1" kern="0" dirty="0">
                 <a:solidFill>
                   <a:srgbClr val="B8BDC4"/>
                 </a:solidFill>
@@ -31029,7 +31129,7 @@
       </p:sp>
       <p:sp>
         <p:nvSpPr>
-          <p:cNvPr id="193" name="Pg"/>
+          <p:cNvPr id="557" name="Pg27"/>
           <p:cNvSpPr/>
           <p:nvPr/>
         </p:nvSpPr>
@@ -31054,7 +31154,7 @@
               <a:buNone/>
             </a:pPr>
             <a:r>
-              <a:rPr lang="vi-VN" sz="1000" b="0" i="0" kern="0" dirty="0">
+              <a:rPr lang="vi-VN" sz="1000" b="0" kern="0" dirty="0">
                 <a:solidFill>
                   <a:srgbClr val="B8BDC4"/>
                 </a:solidFill>
@@ -31062,7 +31162,7 @@
                 <a:ea typeface="Calibri" pitchFamily="34" charset="-122"/>
                 <a:cs typeface="Calibri" pitchFamily="34" charset="-120"/>
               </a:rPr>
-              <a:t>28 / 30</a:t>
+              <a:t>27 / 30</a:t>
             </a:r>
           </a:p>
         </p:txBody>
@@ -31087,7 +31187,7 @@
       <p:grpSpPr/>
       <p:sp>
         <p:nvSpPr>
-          <p:cNvPr id="194" name="RedBar"/>
+          <p:cNvPr id="558" name="RedBar"/>
           <p:cNvSpPr/>
           <p:nvPr/>
         </p:nvSpPr>
@@ -31109,7 +31209,7 @@
       </p:sp>
       <p:sp>
         <p:nvSpPr>
-          <p:cNvPr id="195" name="PhanLbl"/>
+          <p:cNvPr id="559" name="Phan"/>
           <p:cNvSpPr/>
           <p:nvPr/>
         </p:nvSpPr>
@@ -31134,7 +31234,7 @@
               <a:buNone/>
             </a:pPr>
             <a:r>
-              <a:rPr lang="vi-VN" sz="1200" b="1" i="0" kern="0" dirty="0">
+              <a:rPr lang="vi-VN" sz="1200" b="1" kern="0" dirty="0">
                 <a:solidFill>
                   <a:srgbClr val="E60012"/>
                 </a:solidFill>
@@ -31149,7 +31249,7 @@
       </p:sp>
       <p:sp>
         <p:nvSpPr>
-          <p:cNvPr id="196" name="Title"/>
+          <p:cNvPr id="560" name="Title"/>
           <p:cNvSpPr/>
           <p:nvPr/>
         </p:nvSpPr>
@@ -31174,7 +31274,7 @@
               <a:buNone/>
             </a:pPr>
             <a:r>
-              <a:rPr lang="vi-VN" sz="2800" b="1" i="0" kern="0" dirty="0">
+              <a:rPr lang="vi-VN" sz="2800" b="1" kern="0" dirty="0">
                 <a:solidFill>
                   <a:srgbClr val="1A1F36"/>
                 </a:solidFill>
@@ -31189,7 +31289,7 @@
       </p:sp>
       <p:sp>
         <p:nvSpPr>
-          <p:cNvPr id="197" name="Sub"/>
+          <p:cNvPr id="561" name="Sub"/>
           <p:cNvSpPr/>
           <p:nvPr/>
         </p:nvSpPr>
@@ -31214,7 +31314,7 @@
               <a:buNone/>
             </a:pPr>
             <a:r>
-              <a:rPr lang="vi-VN" sz="1200" b="0" i="0" kern="0" dirty="0">
+              <a:rPr lang="vi-VN" sz="1200" b="0" kern="0" dirty="0">
                 <a:solidFill>
                   <a:srgbClr val="4A4A4A"/>
                 </a:solidFill>
@@ -31229,20 +31329,20 @@
       </p:sp>
       <p:sp>
         <p:nvSpPr>
-          <p:cNvPr id="198" name="AccLine"/>
-          <p:cNvSpPr/>
-          <p:nvPr/>
-        </p:nvSpPr>
-        <p:spPr>
-          <a:xfrm>
-            <a:off x="548640" y="1520000"/>
-            <a:ext cx="10972800" cy="18000"/>
+          <p:cNvPr id="562" name="Line"/>
+          <p:cNvSpPr/>
+          <p:nvPr/>
+        </p:nvSpPr>
+        <p:spPr>
+          <a:xfrm>
+            <a:off x="548640" y="1530000"/>
+            <a:ext cx="10972800" cy="16000"/>
           </a:xfrm>
           <a:prstGeom prst="rect">
             <a:avLst/>
           </a:prstGeom>
           <a:solidFill>
-            <a:srgbClr val="E8EBF0"/>
+            <a:srgbClr val="E0E3E8"/>
           </a:solidFill>
           <a:ln>
             <a:noFill/>
@@ -31251,40 +31351,36 @@
       </p:sp>
       <p:sp>
         <p:nvSpPr>
-          <p:cNvPr id="199" name="LBg"/>
-          <p:cNvSpPr/>
-          <p:nvPr/>
-        </p:nvSpPr>
-        <p:spPr>
-          <a:xfrm>
-            <a:off x="300000" y="1620000"/>
-            <a:ext cx="5706000" cy="4550000"/>
-          </a:xfrm>
-          <a:prstGeom prst="roundRect">
-            <a:avLst>
-              <a:gd name="adj" fmla="val 12000"/>
-            </a:avLst>
+          <p:cNvPr id="563" name="LBg"/>
+          <p:cNvSpPr/>
+          <p:nvPr/>
+        </p:nvSpPr>
+        <p:spPr>
+          <a:xfrm>
+            <a:off x="300000" y="1580000"/>
+            <a:ext cx="5700000" cy="4680000"/>
+          </a:xfrm>
+          <a:prstGeom prst="rect">
+            <a:avLst/>
           </a:prstGeom>
           <a:solidFill>
-            <a:srgbClr val="F5F7FA"/>
+            <a:srgbClr val="F0F2F5"/>
           </a:solidFill>
-          <a:ln w="9144">
-            <a:solidFill>
-              <a:srgbClr val="E8EBF0"/>
-            </a:solidFill>
+          <a:ln>
+            <a:noFill/>
           </a:ln>
         </p:spPr>
       </p:sp>
       <p:sp>
         <p:nvSpPr>
-          <p:cNvPr id="200" name="LHdr"/>
-          <p:cNvSpPr/>
-          <p:nvPr/>
-        </p:nvSpPr>
-        <p:spPr>
-          <a:xfrm>
-            <a:off x="300000" y="1620000"/>
-            <a:ext cx="5706000" cy="430000"/>
+          <p:cNvPr id="564" name="LHdr"/>
+          <p:cNvSpPr/>
+          <p:nvPr/>
+        </p:nvSpPr>
+        <p:spPr>
+          <a:xfrm>
+            <a:off x="300000" y="1580000"/>
+            <a:ext cx="5700000" cy="420000"/>
           </a:xfrm>
           <a:prstGeom prst="rect">
             <a:avLst/>
@@ -31299,14 +31395,14 @@
       </p:sp>
       <p:sp>
         <p:nvSpPr>
-          <p:cNvPr id="201" name="LHdrT"/>
-          <p:cNvSpPr/>
-          <p:nvPr/>
-        </p:nvSpPr>
-        <p:spPr>
-          <a:xfrm>
-            <a:off x="300000" y="1620000"/>
-            <a:ext cx="5706000" cy="430000"/>
+          <p:cNvPr id="565" name="LHdrT"/>
+          <p:cNvSpPr/>
+          <p:nvPr/>
+        </p:nvSpPr>
+        <p:spPr>
+          <a:xfrm>
+            <a:off x="300000" y="1580000"/>
+            <a:ext cx="5700000" cy="420000"/>
           </a:xfrm>
           <a:prstGeom prst="rect">
             <a:avLst/>
@@ -31320,11 +31416,11 @@
           <a:bodyPr wrap="square" lIns="0" tIns="0" rIns="0" bIns="0" rtlCol="0" anchor="ctr"/>
           <a:lstStyle/>
           <a:p>
-            <a:pPr algn="c" indent="0" marL="0">
-              <a:buNone/>
-            </a:pPr>
-            <a:r>
-              <a:rPr lang="vi-VN" sz="1080" b="1" i="0" kern="0" dirty="0">
+            <a:pPr algn="ctr" indent="0" marL="0">
+              <a:buNone/>
+            </a:pPr>
+            <a:r>
+              <a:rPr lang="vi-VN" sz="1080" b="1" kern="0" dirty="0">
                 <a:solidFill>
                   <a:srgbClr val="FFFFFF"/>
                 </a:solidFill>
@@ -31339,16 +31435,16 @@
       </p:sp>
       <p:sp>
         <p:nvSpPr>
-          <p:cNvPr id="202" name="DocTag0"/>
-          <p:cNvSpPr/>
-          <p:nvPr/>
-        </p:nvSpPr>
-        <p:spPr>
-          <a:xfrm>
-            <a:off x="360000" y="2278333"/>
-            <a:ext cx="230000" cy="230000"/>
-          </a:xfrm>
-          <a:prstGeom prst="ellipse">
+          <p:cNvPr id="566" name="DN0"/>
+          <p:cNvSpPr/>
+          <p:nvPr/>
+        </p:nvSpPr>
+        <p:spPr>
+          <a:xfrm>
+            <a:off x="360000" y="2260000"/>
+            <a:ext cx="190000" cy="190000"/>
+          </a:xfrm>
+          <a:prstGeom prst="rect">
             <a:avLst/>
           </a:prstGeom>
           <a:solidFill>
@@ -31361,14 +31457,14 @@
       </p:sp>
       <p:sp>
         <p:nvSpPr>
-          <p:cNvPr id="203" name="DocTagN0"/>
-          <p:cNvSpPr/>
-          <p:nvPr/>
-        </p:nvSpPr>
-        <p:spPr>
-          <a:xfrm>
-            <a:off x="360000" y="2278333"/>
-            <a:ext cx="230000" cy="230000"/>
+          <p:cNvPr id="567" name="DNN0"/>
+          <p:cNvSpPr/>
+          <p:nvPr/>
+        </p:nvSpPr>
+        <p:spPr>
+          <a:xfrm>
+            <a:off x="360000" y="2260000"/>
+            <a:ext cx="190000" cy="190000"/>
           </a:xfrm>
           <a:prstGeom prst="rect">
             <a:avLst/>
@@ -31382,11 +31478,11 @@
           <a:bodyPr wrap="square" lIns="0" tIns="0" rIns="0" bIns="0" rtlCol="0" anchor="ctr"/>
           <a:lstStyle/>
           <a:p>
-            <a:pPr algn="c" indent="0" marL="0">
-              <a:buNone/>
-            </a:pPr>
-            <a:r>
-              <a:rPr lang="vi-VN" sz="900" b="1" i="0" kern="0" dirty="0">
+            <a:pPr algn="ctr" indent="0" marL="0">
+              <a:buNone/>
+            </a:pPr>
+            <a:r>
+              <a:rPr lang="vi-VN" sz="880" b="1" kern="0" dirty="0">
                 <a:solidFill>
                   <a:srgbClr val="FFFFFF"/>
                 </a:solidFill>
@@ -31401,14 +31497,14 @@
       </p:sp>
       <p:sp>
         <p:nvSpPr>
-          <p:cNvPr id="204" name="DocTxt0"/>
-          <p:cNvSpPr/>
-          <p:nvPr/>
-        </p:nvSpPr>
-        <p:spPr>
-          <a:xfrm>
-            <a:off x="660000" y="2050000"/>
-            <a:ext cx="5316000" cy="686666"/>
+          <p:cNvPr id="568" name="DTx0"/>
+          <p:cNvSpPr/>
+          <p:nvPr/>
+        </p:nvSpPr>
+        <p:spPr>
+          <a:xfrm>
+            <a:off x="600000" y="2000000"/>
+            <a:ext cx="5260000" cy="710000"/>
           </a:xfrm>
           <a:prstGeom prst="rect">
             <a:avLst/>
@@ -31426,7 +31522,7 @@
               <a:buNone/>
             </a:pPr>
             <a:r>
-              <a:rPr lang="vi-VN" sz="1060" b="0" i="0" kern="0" dirty="0">
+              <a:rPr lang="vi-VN" sz="1060" b="0" kern="0" dirty="0">
                 <a:solidFill>
                   <a:srgbClr val="2C2C2C"/>
                 </a:solidFill>
@@ -31441,20 +31537,20 @@
       </p:sp>
       <p:sp>
         <p:nvSpPr>
-          <p:cNvPr id="205" name="DSep0"/>
-          <p:cNvSpPr/>
-          <p:nvPr/>
-        </p:nvSpPr>
-        <p:spPr>
-          <a:xfrm>
-            <a:off x="360000" y="2724666"/>
-            <a:ext cx="5626000" cy="14000"/>
+          <p:cNvPr id="569" name="DS0"/>
+          <p:cNvSpPr/>
+          <p:nvPr/>
+        </p:nvSpPr>
+        <p:spPr>
+          <a:xfrm>
+            <a:off x="340000" y="2700000"/>
+            <a:ext cx="5660000" cy="10000"/>
           </a:xfrm>
           <a:prstGeom prst="rect">
             <a:avLst/>
           </a:prstGeom>
           <a:solidFill>
-            <a:srgbClr val="E8EBF0"/>
+            <a:srgbClr val="E0E3E8"/>
           </a:solidFill>
           <a:ln>
             <a:noFill/>
@@ -31463,16 +31559,16 @@
       </p:sp>
       <p:sp>
         <p:nvSpPr>
-          <p:cNvPr id="206" name="DocTag1"/>
-          <p:cNvSpPr/>
-          <p:nvPr/>
-        </p:nvSpPr>
-        <p:spPr>
-          <a:xfrm>
-            <a:off x="360000" y="2964999"/>
-            <a:ext cx="230000" cy="230000"/>
-          </a:xfrm>
-          <a:prstGeom prst="ellipse">
+          <p:cNvPr id="570" name="DN1"/>
+          <p:cNvSpPr/>
+          <p:nvPr/>
+        </p:nvSpPr>
+        <p:spPr>
+          <a:xfrm>
+            <a:off x="360000" y="2970000"/>
+            <a:ext cx="190000" cy="190000"/>
+          </a:xfrm>
+          <a:prstGeom prst="rect">
             <a:avLst/>
           </a:prstGeom>
           <a:solidFill>
@@ -31485,14 +31581,14 @@
       </p:sp>
       <p:sp>
         <p:nvSpPr>
-          <p:cNvPr id="207" name="DocTagN1"/>
-          <p:cNvSpPr/>
-          <p:nvPr/>
-        </p:nvSpPr>
-        <p:spPr>
-          <a:xfrm>
-            <a:off x="360000" y="2964999"/>
-            <a:ext cx="230000" cy="230000"/>
+          <p:cNvPr id="571" name="DNN1"/>
+          <p:cNvSpPr/>
+          <p:nvPr/>
+        </p:nvSpPr>
+        <p:spPr>
+          <a:xfrm>
+            <a:off x="360000" y="2970000"/>
+            <a:ext cx="190000" cy="190000"/>
           </a:xfrm>
           <a:prstGeom prst="rect">
             <a:avLst/>
@@ -31506,11 +31602,11 @@
           <a:bodyPr wrap="square" lIns="0" tIns="0" rIns="0" bIns="0" rtlCol="0" anchor="ctr"/>
           <a:lstStyle/>
           <a:p>
-            <a:pPr algn="c" indent="0" marL="0">
-              <a:buNone/>
-            </a:pPr>
-            <a:r>
-              <a:rPr lang="vi-VN" sz="900" b="1" i="0" kern="0" dirty="0">
+            <a:pPr algn="ctr" indent="0" marL="0">
+              <a:buNone/>
+            </a:pPr>
+            <a:r>
+              <a:rPr lang="vi-VN" sz="880" b="1" kern="0" dirty="0">
                 <a:solidFill>
                   <a:srgbClr val="FFFFFF"/>
                 </a:solidFill>
@@ -31525,14 +31621,14 @@
       </p:sp>
       <p:sp>
         <p:nvSpPr>
-          <p:cNvPr id="208" name="DocTxt1"/>
-          <p:cNvSpPr/>
-          <p:nvPr/>
-        </p:nvSpPr>
-        <p:spPr>
-          <a:xfrm>
-            <a:off x="660000" y="2736666"/>
-            <a:ext cx="5316000" cy="686666"/>
+          <p:cNvPr id="572" name="DTx1"/>
+          <p:cNvSpPr/>
+          <p:nvPr/>
+        </p:nvSpPr>
+        <p:spPr>
+          <a:xfrm>
+            <a:off x="600000" y="2710000"/>
+            <a:ext cx="5260000" cy="710000"/>
           </a:xfrm>
           <a:prstGeom prst="rect">
             <a:avLst/>
@@ -31550,7 +31646,7 @@
               <a:buNone/>
             </a:pPr>
             <a:r>
-              <a:rPr lang="vi-VN" sz="1060" b="0" i="0" kern="0" dirty="0">
+              <a:rPr lang="vi-VN" sz="1060" b="0" kern="0" dirty="0">
                 <a:solidFill>
                   <a:srgbClr val="2C2C2C"/>
                 </a:solidFill>
@@ -31565,20 +31661,20 @@
       </p:sp>
       <p:sp>
         <p:nvSpPr>
-          <p:cNvPr id="209" name="DSep1"/>
-          <p:cNvSpPr/>
-          <p:nvPr/>
-        </p:nvSpPr>
-        <p:spPr>
-          <a:xfrm>
-            <a:off x="360000" y="3411332"/>
-            <a:ext cx="5626000" cy="14000"/>
+          <p:cNvPr id="573" name="DS1"/>
+          <p:cNvSpPr/>
+          <p:nvPr/>
+        </p:nvSpPr>
+        <p:spPr>
+          <a:xfrm>
+            <a:off x="340000" y="3410000"/>
+            <a:ext cx="5660000" cy="10000"/>
           </a:xfrm>
           <a:prstGeom prst="rect">
             <a:avLst/>
           </a:prstGeom>
           <a:solidFill>
-            <a:srgbClr val="E8EBF0"/>
+            <a:srgbClr val="E0E3E8"/>
           </a:solidFill>
           <a:ln>
             <a:noFill/>
@@ -31587,16 +31683,16 @@
       </p:sp>
       <p:sp>
         <p:nvSpPr>
-          <p:cNvPr id="210" name="DocTag2"/>
-          <p:cNvSpPr/>
-          <p:nvPr/>
-        </p:nvSpPr>
-        <p:spPr>
-          <a:xfrm>
-            <a:off x="360000" y="3651665"/>
-            <a:ext cx="230000" cy="230000"/>
-          </a:xfrm>
-          <a:prstGeom prst="ellipse">
+          <p:cNvPr id="574" name="DN2"/>
+          <p:cNvSpPr/>
+          <p:nvPr/>
+        </p:nvSpPr>
+        <p:spPr>
+          <a:xfrm>
+            <a:off x="360000" y="3680000"/>
+            <a:ext cx="190000" cy="190000"/>
+          </a:xfrm>
+          <a:prstGeom prst="rect">
             <a:avLst/>
           </a:prstGeom>
           <a:solidFill>
@@ -31609,14 +31705,14 @@
       </p:sp>
       <p:sp>
         <p:nvSpPr>
-          <p:cNvPr id="211" name="DocTagN2"/>
-          <p:cNvSpPr/>
-          <p:nvPr/>
-        </p:nvSpPr>
-        <p:spPr>
-          <a:xfrm>
-            <a:off x="360000" y="3651665"/>
-            <a:ext cx="230000" cy="230000"/>
+          <p:cNvPr id="575" name="DNN2"/>
+          <p:cNvSpPr/>
+          <p:nvPr/>
+        </p:nvSpPr>
+        <p:spPr>
+          <a:xfrm>
+            <a:off x="360000" y="3680000"/>
+            <a:ext cx="190000" cy="190000"/>
           </a:xfrm>
           <a:prstGeom prst="rect">
             <a:avLst/>
@@ -31630,11 +31726,11 @@
           <a:bodyPr wrap="square" lIns="0" tIns="0" rIns="0" bIns="0" rtlCol="0" anchor="ctr"/>
           <a:lstStyle/>
           <a:p>
-            <a:pPr algn="c" indent="0" marL="0">
-              <a:buNone/>
-            </a:pPr>
-            <a:r>
-              <a:rPr lang="vi-VN" sz="900" b="1" i="0" kern="0" dirty="0">
+            <a:pPr algn="ctr" indent="0" marL="0">
+              <a:buNone/>
+            </a:pPr>
+            <a:r>
+              <a:rPr lang="vi-VN" sz="880" b="1" kern="0" dirty="0">
                 <a:solidFill>
                   <a:srgbClr val="FFFFFF"/>
                 </a:solidFill>
@@ -31649,14 +31745,14 @@
       </p:sp>
       <p:sp>
         <p:nvSpPr>
-          <p:cNvPr id="212" name="DocTxt2"/>
-          <p:cNvSpPr/>
-          <p:nvPr/>
-        </p:nvSpPr>
-        <p:spPr>
-          <a:xfrm>
-            <a:off x="660000" y="3423332"/>
-            <a:ext cx="5316000" cy="686666"/>
+          <p:cNvPr id="576" name="DTx2"/>
+          <p:cNvSpPr/>
+          <p:nvPr/>
+        </p:nvSpPr>
+        <p:spPr>
+          <a:xfrm>
+            <a:off x="600000" y="3420000"/>
+            <a:ext cx="5260000" cy="710000"/>
           </a:xfrm>
           <a:prstGeom prst="rect">
             <a:avLst/>
@@ -31674,7 +31770,7 @@
               <a:buNone/>
             </a:pPr>
             <a:r>
-              <a:rPr lang="vi-VN" sz="1060" b="0" i="0" kern="0" dirty="0">
+              <a:rPr lang="vi-VN" sz="1060" b="0" kern="0" dirty="0">
                 <a:solidFill>
                   <a:srgbClr val="2C2C2C"/>
                 </a:solidFill>
@@ -31689,20 +31785,20 @@
       </p:sp>
       <p:sp>
         <p:nvSpPr>
-          <p:cNvPr id="213" name="DSep2"/>
-          <p:cNvSpPr/>
-          <p:nvPr/>
-        </p:nvSpPr>
-        <p:spPr>
-          <a:xfrm>
-            <a:off x="360000" y="4097998"/>
-            <a:ext cx="5626000" cy="14000"/>
+          <p:cNvPr id="577" name="DS2"/>
+          <p:cNvSpPr/>
+          <p:nvPr/>
+        </p:nvSpPr>
+        <p:spPr>
+          <a:xfrm>
+            <a:off x="340000" y="4120000"/>
+            <a:ext cx="5660000" cy="10000"/>
           </a:xfrm>
           <a:prstGeom prst="rect">
             <a:avLst/>
           </a:prstGeom>
           <a:solidFill>
-            <a:srgbClr val="E8EBF0"/>
+            <a:srgbClr val="E0E3E8"/>
           </a:solidFill>
           <a:ln>
             <a:noFill/>
@@ -31711,16 +31807,16 @@
       </p:sp>
       <p:sp>
         <p:nvSpPr>
-          <p:cNvPr id="214" name="DocTag3"/>
-          <p:cNvSpPr/>
-          <p:nvPr/>
-        </p:nvSpPr>
-        <p:spPr>
-          <a:xfrm>
-            <a:off x="360000" y="4338331"/>
-            <a:ext cx="230000" cy="230000"/>
-          </a:xfrm>
-          <a:prstGeom prst="ellipse">
+          <p:cNvPr id="578" name="DN3"/>
+          <p:cNvSpPr/>
+          <p:nvPr/>
+        </p:nvSpPr>
+        <p:spPr>
+          <a:xfrm>
+            <a:off x="360000" y="4390000"/>
+            <a:ext cx="190000" cy="190000"/>
+          </a:xfrm>
+          <a:prstGeom prst="rect">
             <a:avLst/>
           </a:prstGeom>
           <a:solidFill>
@@ -31733,14 +31829,14 @@
       </p:sp>
       <p:sp>
         <p:nvSpPr>
-          <p:cNvPr id="215" name="DocTagN3"/>
-          <p:cNvSpPr/>
-          <p:nvPr/>
-        </p:nvSpPr>
-        <p:spPr>
-          <a:xfrm>
-            <a:off x="360000" y="4338331"/>
-            <a:ext cx="230000" cy="230000"/>
+          <p:cNvPr id="579" name="DNN3"/>
+          <p:cNvSpPr/>
+          <p:nvPr/>
+        </p:nvSpPr>
+        <p:spPr>
+          <a:xfrm>
+            <a:off x="360000" y="4390000"/>
+            <a:ext cx="190000" cy="190000"/>
           </a:xfrm>
           <a:prstGeom prst="rect">
             <a:avLst/>
@@ -31754,11 +31850,11 @@
           <a:bodyPr wrap="square" lIns="0" tIns="0" rIns="0" bIns="0" rtlCol="0" anchor="ctr"/>
           <a:lstStyle/>
           <a:p>
-            <a:pPr algn="c" indent="0" marL="0">
-              <a:buNone/>
-            </a:pPr>
-            <a:r>
-              <a:rPr lang="vi-VN" sz="900" b="1" i="0" kern="0" dirty="0">
+            <a:pPr algn="ctr" indent="0" marL="0">
+              <a:buNone/>
+            </a:pPr>
+            <a:r>
+              <a:rPr lang="vi-VN" sz="880" b="1" kern="0" dirty="0">
                 <a:solidFill>
                   <a:srgbClr val="FFFFFF"/>
                 </a:solidFill>
@@ -31773,14 +31869,14 @@
       </p:sp>
       <p:sp>
         <p:nvSpPr>
-          <p:cNvPr id="216" name="DocTxt3"/>
-          <p:cNvSpPr/>
-          <p:nvPr/>
-        </p:nvSpPr>
-        <p:spPr>
-          <a:xfrm>
-            <a:off x="660000" y="4109998"/>
-            <a:ext cx="5316000" cy="686666"/>
+          <p:cNvPr id="580" name="DTx3"/>
+          <p:cNvSpPr/>
+          <p:nvPr/>
+        </p:nvSpPr>
+        <p:spPr>
+          <a:xfrm>
+            <a:off x="600000" y="4130000"/>
+            <a:ext cx="5260000" cy="710000"/>
           </a:xfrm>
           <a:prstGeom prst="rect">
             <a:avLst/>
@@ -31798,7 +31894,7 @@
               <a:buNone/>
             </a:pPr>
             <a:r>
-              <a:rPr lang="vi-VN" sz="1060" b="0" i="0" kern="0" dirty="0">
+              <a:rPr lang="vi-VN" sz="1060" b="0" kern="0" dirty="0">
                 <a:solidFill>
                   <a:srgbClr val="2C2C2C"/>
                 </a:solidFill>
@@ -31813,20 +31909,20 @@
       </p:sp>
       <p:sp>
         <p:nvSpPr>
-          <p:cNvPr id="217" name="DSep3"/>
-          <p:cNvSpPr/>
-          <p:nvPr/>
-        </p:nvSpPr>
-        <p:spPr>
-          <a:xfrm>
-            <a:off x="360000" y="4784664"/>
-            <a:ext cx="5626000" cy="14000"/>
+          <p:cNvPr id="581" name="DS3"/>
+          <p:cNvSpPr/>
+          <p:nvPr/>
+        </p:nvSpPr>
+        <p:spPr>
+          <a:xfrm>
+            <a:off x="340000" y="4830000"/>
+            <a:ext cx="5660000" cy="10000"/>
           </a:xfrm>
           <a:prstGeom prst="rect">
             <a:avLst/>
           </a:prstGeom>
           <a:solidFill>
-            <a:srgbClr val="E8EBF0"/>
+            <a:srgbClr val="E0E3E8"/>
           </a:solidFill>
           <a:ln>
             <a:noFill/>
@@ -31835,16 +31931,16 @@
       </p:sp>
       <p:sp>
         <p:nvSpPr>
-          <p:cNvPr id="218" name="DocTag4"/>
-          <p:cNvSpPr/>
-          <p:nvPr/>
-        </p:nvSpPr>
-        <p:spPr>
-          <a:xfrm>
-            <a:off x="360000" y="5024997"/>
-            <a:ext cx="230000" cy="230000"/>
-          </a:xfrm>
-          <a:prstGeom prst="ellipse">
+          <p:cNvPr id="582" name="DN4"/>
+          <p:cNvSpPr/>
+          <p:nvPr/>
+        </p:nvSpPr>
+        <p:spPr>
+          <a:xfrm>
+            <a:off x="360000" y="5100000"/>
+            <a:ext cx="190000" cy="190000"/>
+          </a:xfrm>
+          <a:prstGeom prst="rect">
             <a:avLst/>
           </a:prstGeom>
           <a:solidFill>
@@ -31857,14 +31953,14 @@
       </p:sp>
       <p:sp>
         <p:nvSpPr>
-          <p:cNvPr id="219" name="DocTagN4"/>
-          <p:cNvSpPr/>
-          <p:nvPr/>
-        </p:nvSpPr>
-        <p:spPr>
-          <a:xfrm>
-            <a:off x="360000" y="5024997"/>
-            <a:ext cx="230000" cy="230000"/>
+          <p:cNvPr id="583" name="DNN4"/>
+          <p:cNvSpPr/>
+          <p:nvPr/>
+        </p:nvSpPr>
+        <p:spPr>
+          <a:xfrm>
+            <a:off x="360000" y="5100000"/>
+            <a:ext cx="190000" cy="190000"/>
           </a:xfrm>
           <a:prstGeom prst="rect">
             <a:avLst/>
@@ -31878,11 +31974,11 @@
           <a:bodyPr wrap="square" lIns="0" tIns="0" rIns="0" bIns="0" rtlCol="0" anchor="ctr"/>
           <a:lstStyle/>
           <a:p>
-            <a:pPr algn="c" indent="0" marL="0">
-              <a:buNone/>
-            </a:pPr>
-            <a:r>
-              <a:rPr lang="vi-VN" sz="900" b="1" i="0" kern="0" dirty="0">
+            <a:pPr algn="ctr" indent="0" marL="0">
+              <a:buNone/>
+            </a:pPr>
+            <a:r>
+              <a:rPr lang="vi-VN" sz="880" b="1" kern="0" dirty="0">
                 <a:solidFill>
                   <a:srgbClr val="FFFFFF"/>
                 </a:solidFill>
@@ -31897,14 +31993,14 @@
       </p:sp>
       <p:sp>
         <p:nvSpPr>
-          <p:cNvPr id="220" name="DocTxt4"/>
-          <p:cNvSpPr/>
-          <p:nvPr/>
-        </p:nvSpPr>
-        <p:spPr>
-          <a:xfrm>
-            <a:off x="660000" y="4796664"/>
-            <a:ext cx="5316000" cy="686666"/>
+          <p:cNvPr id="584" name="DTx4"/>
+          <p:cNvSpPr/>
+          <p:nvPr/>
+        </p:nvSpPr>
+        <p:spPr>
+          <a:xfrm>
+            <a:off x="600000" y="4840000"/>
+            <a:ext cx="5260000" cy="710000"/>
           </a:xfrm>
           <a:prstGeom prst="rect">
             <a:avLst/>
@@ -31922,7 +32018,7 @@
               <a:buNone/>
             </a:pPr>
             <a:r>
-              <a:rPr lang="vi-VN" sz="1060" b="0" i="0" kern="0" dirty="0">
+              <a:rPr lang="vi-VN" sz="1060" b="0" kern="0" dirty="0">
                 <a:solidFill>
                   <a:srgbClr val="2C2C2C"/>
                 </a:solidFill>
@@ -31930,27 +32026,27 @@
                 <a:ea typeface="Calibri" pitchFamily="34" charset="-122"/>
                 <a:cs typeface="Calibri" pitchFamily="34" charset="-120"/>
               </a:rPr>
-              <a:t>HĐ thỏa thuận mua bán xe giữa bên bán &amp; bên mua</a:t>
-            </a:r>
-          </a:p>
-        </p:txBody>
-      </p:sp>
-      <p:sp>
-        <p:nvSpPr>
-          <p:cNvPr id="221" name="DSep4"/>
-          <p:cNvSpPr/>
-          <p:nvPr/>
-        </p:nvSpPr>
-        <p:spPr>
-          <a:xfrm>
-            <a:off x="360000" y="5471330"/>
-            <a:ext cx="5626000" cy="14000"/>
+              <a:t>HĐ thỏa thuận mua bán xe (bên bán &amp; bên mua)</a:t>
+            </a:r>
+          </a:p>
+        </p:txBody>
+      </p:sp>
+      <p:sp>
+        <p:nvSpPr>
+          <p:cNvPr id="585" name="DS4"/>
+          <p:cNvSpPr/>
+          <p:nvPr/>
+        </p:nvSpPr>
+        <p:spPr>
+          <a:xfrm>
+            <a:off x="340000" y="5540000"/>
+            <a:ext cx="5660000" cy="10000"/>
           </a:xfrm>
           <a:prstGeom prst="rect">
             <a:avLst/>
           </a:prstGeom>
           <a:solidFill>
-            <a:srgbClr val="E8EBF0"/>
+            <a:srgbClr val="E0E3E8"/>
           </a:solidFill>
           <a:ln>
             <a:noFill/>
@@ -31959,16 +32055,16 @@
       </p:sp>
       <p:sp>
         <p:nvSpPr>
-          <p:cNvPr id="222" name="DocTag5"/>
-          <p:cNvSpPr/>
-          <p:nvPr/>
-        </p:nvSpPr>
-        <p:spPr>
-          <a:xfrm>
-            <a:off x="360000" y="5711663"/>
-            <a:ext cx="230000" cy="230000"/>
-          </a:xfrm>
-          <a:prstGeom prst="ellipse">
+          <p:cNvPr id="586" name="DN5"/>
+          <p:cNvSpPr/>
+          <p:nvPr/>
+        </p:nvSpPr>
+        <p:spPr>
+          <a:xfrm>
+            <a:off x="360000" y="5810000"/>
+            <a:ext cx="190000" cy="190000"/>
+          </a:xfrm>
+          <a:prstGeom prst="rect">
             <a:avLst/>
           </a:prstGeom>
           <a:solidFill>
@@ -31981,14 +32077,14 @@
       </p:sp>
       <p:sp>
         <p:nvSpPr>
-          <p:cNvPr id="223" name="DocTagN5"/>
-          <p:cNvSpPr/>
-          <p:nvPr/>
-        </p:nvSpPr>
-        <p:spPr>
-          <a:xfrm>
-            <a:off x="360000" y="5711663"/>
-            <a:ext cx="230000" cy="230000"/>
+          <p:cNvPr id="587" name="DNN5"/>
+          <p:cNvSpPr/>
+          <p:nvPr/>
+        </p:nvSpPr>
+        <p:spPr>
+          <a:xfrm>
+            <a:off x="360000" y="5810000"/>
+            <a:ext cx="190000" cy="190000"/>
           </a:xfrm>
           <a:prstGeom prst="rect">
             <a:avLst/>
@@ -32002,11 +32098,11 @@
           <a:bodyPr wrap="square" lIns="0" tIns="0" rIns="0" bIns="0" rtlCol="0" anchor="ctr"/>
           <a:lstStyle/>
           <a:p>
-            <a:pPr algn="c" indent="0" marL="0">
-              <a:buNone/>
-            </a:pPr>
-            <a:r>
-              <a:rPr lang="vi-VN" sz="900" b="1" i="0" kern="0" dirty="0">
+            <a:pPr algn="ctr" indent="0" marL="0">
+              <a:buNone/>
+            </a:pPr>
+            <a:r>
+              <a:rPr lang="vi-VN" sz="880" b="1" kern="0" dirty="0">
                 <a:solidFill>
                   <a:srgbClr val="FFFFFF"/>
                 </a:solidFill>
@@ -32021,14 +32117,14 @@
       </p:sp>
       <p:sp>
         <p:nvSpPr>
-          <p:cNvPr id="224" name="DocTxt5"/>
-          <p:cNvSpPr/>
-          <p:nvPr/>
-        </p:nvSpPr>
-        <p:spPr>
-          <a:xfrm>
-            <a:off x="660000" y="5483330"/>
-            <a:ext cx="5316000" cy="686666"/>
+          <p:cNvPr id="588" name="DTx5"/>
+          <p:cNvSpPr/>
+          <p:nvPr/>
+        </p:nvSpPr>
+        <p:spPr>
+          <a:xfrm>
+            <a:off x="600000" y="5550000"/>
+            <a:ext cx="5260000" cy="710000"/>
           </a:xfrm>
           <a:prstGeom prst="rect">
             <a:avLst/>
@@ -32046,7 +32142,7 @@
               <a:buNone/>
             </a:pPr>
             <a:r>
-              <a:rPr lang="vi-VN" sz="1060" b="0" i="0" kern="0" dirty="0">
+              <a:rPr lang="vi-VN" sz="1060" b="0" kern="0" dirty="0">
                 <a:solidFill>
                   <a:srgbClr val="2C2C2C"/>
                 </a:solidFill>
@@ -32061,40 +32157,36 @@
       </p:sp>
       <p:sp>
         <p:nvSpPr>
-          <p:cNvPr id="225" name="RBg"/>
-          <p:cNvSpPr/>
-          <p:nvPr/>
-        </p:nvSpPr>
-        <p:spPr>
-          <a:xfrm>
-            <a:off x="6186000" y="1620000"/>
-            <a:ext cx="5706000" cy="4550000"/>
-          </a:xfrm>
-          <a:prstGeom prst="roundRect">
-            <a:avLst>
-              <a:gd name="adj" fmla="val 12000"/>
-            </a:avLst>
+          <p:cNvPr id="589" name="RBg"/>
+          <p:cNvSpPr/>
+          <p:nvPr/>
+        </p:nvSpPr>
+        <p:spPr>
+          <a:xfrm>
+            <a:off x="6192000" y="1580000"/>
+            <a:ext cx="5700000" cy="4680000"/>
+          </a:xfrm>
+          <a:prstGeom prst="rect">
+            <a:avLst/>
           </a:prstGeom>
           <a:solidFill>
-            <a:srgbClr val="F5F7FA"/>
+            <a:srgbClr val="F0F2F5"/>
           </a:solidFill>
-          <a:ln w="9144">
-            <a:solidFill>
-              <a:srgbClr val="E8EBF0"/>
-            </a:solidFill>
+          <a:ln>
+            <a:noFill/>
           </a:ln>
         </p:spPr>
       </p:sp>
       <p:sp>
         <p:nvSpPr>
-          <p:cNvPr id="226" name="RHdr"/>
-          <p:cNvSpPr/>
-          <p:nvPr/>
-        </p:nvSpPr>
-        <p:spPr>
-          <a:xfrm>
-            <a:off x="6186000" y="1620000"/>
-            <a:ext cx="5706000" cy="430000"/>
+          <p:cNvPr id="590" name="RHdr"/>
+          <p:cNvSpPr/>
+          <p:nvPr/>
+        </p:nvSpPr>
+        <p:spPr>
+          <a:xfrm>
+            <a:off x="6192000" y="1580000"/>
+            <a:ext cx="5700000" cy="420000"/>
           </a:xfrm>
           <a:prstGeom prst="rect">
             <a:avLst/>
@@ -32109,14 +32201,14 @@
       </p:sp>
       <p:sp>
         <p:nvSpPr>
-          <p:cNvPr id="227" name="RHdrT"/>
-          <p:cNvSpPr/>
-          <p:nvPr/>
-        </p:nvSpPr>
-        <p:spPr>
-          <a:xfrm>
-            <a:off x="6186000" y="1620000"/>
-            <a:ext cx="5706000" cy="430000"/>
+          <p:cNvPr id="591" name="RHdrT"/>
+          <p:cNvSpPr/>
+          <p:nvPr/>
+        </p:nvSpPr>
+        <p:spPr>
+          <a:xfrm>
+            <a:off x="6192000" y="1580000"/>
+            <a:ext cx="5700000" cy="420000"/>
           </a:xfrm>
           <a:prstGeom prst="rect">
             <a:avLst/>
@@ -32130,11 +32222,11 @@
           <a:bodyPr wrap="square" lIns="0" tIns="0" rIns="0" bIns="0" rtlCol="0" anchor="ctr"/>
           <a:lstStyle/>
           <a:p>
-            <a:pPr algn="c" indent="0" marL="0">
-              <a:buNone/>
-            </a:pPr>
-            <a:r>
-              <a:rPr lang="vi-VN" sz="1080" b="1" i="0" kern="0" dirty="0">
+            <a:pPr algn="ctr" indent="0" marL="0">
+              <a:buNone/>
+            </a:pPr>
+            <a:r>
+              <a:rPr lang="vi-VN" sz="1080" b="1" kern="0" dirty="0">
                 <a:solidFill>
                   <a:srgbClr val="FFFFFF"/>
                 </a:solidFill>
@@ -32149,16 +32241,16 @@
       </p:sp>
       <p:sp>
         <p:nvSpPr>
-          <p:cNvPr id="228" name="TipIcon0"/>
-          <p:cNvSpPr/>
-          <p:nvPr/>
-        </p:nvSpPr>
-        <p:spPr>
-          <a:xfrm>
-            <a:off x="6246000" y="2234285"/>
-            <a:ext cx="220000" cy="220000"/>
-          </a:xfrm>
-          <a:prstGeom prst="ellipse">
+          <p:cNvPr id="592" name="TN0"/>
+          <p:cNvSpPr/>
+          <p:nvPr/>
+        </p:nvSpPr>
+        <p:spPr>
+          <a:xfrm>
+            <a:off x="6252000" y="2209285"/>
+            <a:ext cx="190000" cy="190000"/>
+          </a:xfrm>
+          <a:prstGeom prst="rect">
             <a:avLst/>
           </a:prstGeom>
           <a:solidFill>
@@ -32171,14 +32263,14 @@
       </p:sp>
       <p:sp>
         <p:nvSpPr>
-          <p:cNvPr id="229" name="TipIc0"/>
-          <p:cNvSpPr/>
-          <p:nvPr/>
-        </p:nvSpPr>
-        <p:spPr>
-          <a:xfrm>
-            <a:off x="6246000" y="2234285"/>
-            <a:ext cx="220000" cy="220000"/>
+          <p:cNvPr id="593" name="TNN0"/>
+          <p:cNvSpPr/>
+          <p:nvPr/>
+        </p:nvSpPr>
+        <p:spPr>
+          <a:xfrm>
+            <a:off x="6252000" y="2209285"/>
+            <a:ext cx="190000" cy="190000"/>
           </a:xfrm>
           <a:prstGeom prst="rect">
             <a:avLst/>
@@ -32192,11 +32284,11 @@
           <a:bodyPr wrap="square" lIns="0" tIns="0" rIns="0" bIns="0" rtlCol="0" anchor="ctr"/>
           <a:lstStyle/>
           <a:p>
-            <a:pPr algn="c" indent="0" marL="0">
-              <a:buNone/>
-            </a:pPr>
-            <a:r>
-              <a:rPr lang="vi-VN" sz="1000" b="0" i="0" kern="0" dirty="0">
+            <a:pPr algn="ctr" indent="0" marL="0">
+              <a:buNone/>
+            </a:pPr>
+            <a:r>
+              <a:rPr lang="vi-VN" sz="900" b="1" kern="0" dirty="0">
                 <a:solidFill>
                   <a:srgbClr val="FFFFFF"/>
                 </a:solidFill>
@@ -32204,21 +32296,21 @@
                 <a:ea typeface="Calibri" pitchFamily="34" charset="-122"/>
                 <a:cs typeface="Calibri" pitchFamily="34" charset="-120"/>
               </a:rPr>
-              <a:t>💬</a:t>
-            </a:r>
-          </a:p>
-        </p:txBody>
-      </p:sp>
-      <p:sp>
-        <p:nvSpPr>
-          <p:cNvPr id="230" name="TipTxt0"/>
-          <p:cNvSpPr/>
-          <p:nvPr/>
-        </p:nvSpPr>
-        <p:spPr>
-          <a:xfrm>
-            <a:off x="6536000" y="2050000"/>
-            <a:ext cx="5326000" cy="588571"/>
+              <a:t>▸</a:t>
+            </a:r>
+          </a:p>
+        </p:txBody>
+      </p:sp>
+      <p:sp>
+        <p:nvSpPr>
+          <p:cNvPr id="594" name="TTx0"/>
+          <p:cNvSpPr/>
+          <p:nvPr/>
+        </p:nvSpPr>
+        <p:spPr>
+          <a:xfrm>
+            <a:off x="6492000" y="2000000"/>
+            <a:ext cx="5380000" cy="608571"/>
           </a:xfrm>
           <a:prstGeom prst="rect">
             <a:avLst/>
@@ -32236,7 +32328,7 @@
               <a:buNone/>
             </a:pPr>
             <a:r>
-              <a:rPr lang="vi-VN" sz="1060" b="0" i="0" kern="0" dirty="0">
+              <a:rPr lang="vi-VN" sz="1060" b="0" kern="0" dirty="0">
                 <a:solidFill>
                   <a:srgbClr val="2C2C2C"/>
                 </a:solidFill>
@@ -32251,20 +32343,20 @@
       </p:sp>
       <p:sp>
         <p:nvSpPr>
-          <p:cNvPr id="231" name="TSep0"/>
-          <p:cNvSpPr/>
-          <p:nvPr/>
-        </p:nvSpPr>
-        <p:spPr>
-          <a:xfrm>
-            <a:off x="6246000" y="2626571"/>
-            <a:ext cx="5626000" cy="14000"/>
+          <p:cNvPr id="595" name="TS0"/>
+          <p:cNvSpPr/>
+          <p:nvPr/>
+        </p:nvSpPr>
+        <p:spPr>
+          <a:xfrm>
+            <a:off x="6232000" y="2598571"/>
+            <a:ext cx="5640000" cy="10000"/>
           </a:xfrm>
           <a:prstGeom prst="rect">
             <a:avLst/>
           </a:prstGeom>
           <a:solidFill>
-            <a:srgbClr val="E8EBF0"/>
+            <a:srgbClr val="E0E3E8"/>
           </a:solidFill>
           <a:ln>
             <a:noFill/>
@@ -32273,16 +32365,16 @@
       </p:sp>
       <p:sp>
         <p:nvSpPr>
-          <p:cNvPr id="232" name="TipIcon1"/>
-          <p:cNvSpPr/>
-          <p:nvPr/>
-        </p:nvSpPr>
-        <p:spPr>
-          <a:xfrm>
-            <a:off x="6246000" y="2822856"/>
-            <a:ext cx="220000" cy="220000"/>
-          </a:xfrm>
-          <a:prstGeom prst="ellipse">
+          <p:cNvPr id="596" name="TN1"/>
+          <p:cNvSpPr/>
+          <p:nvPr/>
+        </p:nvSpPr>
+        <p:spPr>
+          <a:xfrm>
+            <a:off x="6252000" y="2817856"/>
+            <a:ext cx="190000" cy="190000"/>
+          </a:xfrm>
+          <a:prstGeom prst="rect">
             <a:avLst/>
           </a:prstGeom>
           <a:solidFill>
@@ -32295,14 +32387,14 @@
       </p:sp>
       <p:sp>
         <p:nvSpPr>
-          <p:cNvPr id="233" name="TipIc1"/>
-          <p:cNvSpPr/>
-          <p:nvPr/>
-        </p:nvSpPr>
-        <p:spPr>
-          <a:xfrm>
-            <a:off x="6246000" y="2822856"/>
-            <a:ext cx="220000" cy="220000"/>
+          <p:cNvPr id="597" name="TNN1"/>
+          <p:cNvSpPr/>
+          <p:nvPr/>
+        </p:nvSpPr>
+        <p:spPr>
+          <a:xfrm>
+            <a:off x="6252000" y="2817856"/>
+            <a:ext cx="190000" cy="190000"/>
           </a:xfrm>
           <a:prstGeom prst="rect">
             <a:avLst/>
@@ -32316,11 +32408,11 @@
           <a:bodyPr wrap="square" lIns="0" tIns="0" rIns="0" bIns="0" rtlCol="0" anchor="ctr"/>
           <a:lstStyle/>
           <a:p>
-            <a:pPr algn="c" indent="0" marL="0">
-              <a:buNone/>
-            </a:pPr>
-            <a:r>
-              <a:rPr lang="vi-VN" sz="1000" b="0" i="0" kern="0" dirty="0">
+            <a:pPr algn="ctr" indent="0" marL="0">
+              <a:buNone/>
+            </a:pPr>
+            <a:r>
+              <a:rPr lang="vi-VN" sz="900" b="1" kern="0" dirty="0">
                 <a:solidFill>
                   <a:srgbClr val="FFFFFF"/>
                 </a:solidFill>
@@ -32328,21 +32420,21 @@
                 <a:ea typeface="Calibri" pitchFamily="34" charset="-122"/>
                 <a:cs typeface="Calibri" pitchFamily="34" charset="-120"/>
               </a:rPr>
-              <a:t>💰</a:t>
-            </a:r>
-          </a:p>
-        </p:txBody>
-      </p:sp>
-      <p:sp>
-        <p:nvSpPr>
-          <p:cNvPr id="234" name="TipTxt1"/>
-          <p:cNvSpPr/>
-          <p:nvPr/>
-        </p:nvSpPr>
-        <p:spPr>
-          <a:xfrm>
-            <a:off x="6536000" y="2638571"/>
-            <a:ext cx="5326000" cy="588571"/>
+              <a:t>▸</a:t>
+            </a:r>
+          </a:p>
+        </p:txBody>
+      </p:sp>
+      <p:sp>
+        <p:nvSpPr>
+          <p:cNvPr id="598" name="TTx1"/>
+          <p:cNvSpPr/>
+          <p:nvPr/>
+        </p:nvSpPr>
+        <p:spPr>
+          <a:xfrm>
+            <a:off x="6492000" y="2608571"/>
+            <a:ext cx="5380000" cy="608571"/>
           </a:xfrm>
           <a:prstGeom prst="rect">
             <a:avLst/>
@@ -32360,7 +32452,7 @@
               <a:buNone/>
             </a:pPr>
             <a:r>
-              <a:rPr lang="vi-VN" sz="1060" b="0" i="0" kern="0" dirty="0">
+              <a:rPr lang="vi-VN" sz="1060" b="0" kern="0" dirty="0">
                 <a:solidFill>
                   <a:srgbClr val="2C2C2C"/>
                 </a:solidFill>
@@ -32375,20 +32467,20 @@
       </p:sp>
       <p:sp>
         <p:nvSpPr>
-          <p:cNvPr id="235" name="TSep1"/>
-          <p:cNvSpPr/>
-          <p:nvPr/>
-        </p:nvSpPr>
-        <p:spPr>
-          <a:xfrm>
-            <a:off x="6246000" y="3215142"/>
-            <a:ext cx="5626000" cy="14000"/>
+          <p:cNvPr id="599" name="TS1"/>
+          <p:cNvSpPr/>
+          <p:nvPr/>
+        </p:nvSpPr>
+        <p:spPr>
+          <a:xfrm>
+            <a:off x="6232000" y="3207142"/>
+            <a:ext cx="5640000" cy="10000"/>
           </a:xfrm>
           <a:prstGeom prst="rect">
             <a:avLst/>
           </a:prstGeom>
           <a:solidFill>
-            <a:srgbClr val="E8EBF0"/>
+            <a:srgbClr val="E0E3E8"/>
           </a:solidFill>
           <a:ln>
             <a:noFill/>
@@ -32397,16 +32489,16 @@
       </p:sp>
       <p:sp>
         <p:nvSpPr>
-          <p:cNvPr id="236" name="TipIcon2"/>
-          <p:cNvSpPr/>
-          <p:nvPr/>
-        </p:nvSpPr>
-        <p:spPr>
-          <a:xfrm>
-            <a:off x="6246000" y="3411427"/>
-            <a:ext cx="220000" cy="220000"/>
-          </a:xfrm>
-          <a:prstGeom prst="ellipse">
+          <p:cNvPr id="600" name="TN2"/>
+          <p:cNvSpPr/>
+          <p:nvPr/>
+        </p:nvSpPr>
+        <p:spPr>
+          <a:xfrm>
+            <a:off x="6252000" y="3426427"/>
+            <a:ext cx="190000" cy="190000"/>
+          </a:xfrm>
+          <a:prstGeom prst="rect">
             <a:avLst/>
           </a:prstGeom>
           <a:solidFill>
@@ -32419,14 +32511,14 @@
       </p:sp>
       <p:sp>
         <p:nvSpPr>
-          <p:cNvPr id="237" name="TipIc2"/>
-          <p:cNvSpPr/>
-          <p:nvPr/>
-        </p:nvSpPr>
-        <p:spPr>
-          <a:xfrm>
-            <a:off x="6246000" y="3411427"/>
-            <a:ext cx="220000" cy="220000"/>
+          <p:cNvPr id="601" name="TNN2"/>
+          <p:cNvSpPr/>
+          <p:nvPr/>
+        </p:nvSpPr>
+        <p:spPr>
+          <a:xfrm>
+            <a:off x="6252000" y="3426427"/>
+            <a:ext cx="190000" cy="190000"/>
           </a:xfrm>
           <a:prstGeom prst="rect">
             <a:avLst/>
@@ -32440,11 +32532,11 @@
           <a:bodyPr wrap="square" lIns="0" tIns="0" rIns="0" bIns="0" rtlCol="0" anchor="ctr"/>
           <a:lstStyle/>
           <a:p>
-            <a:pPr algn="c" indent="0" marL="0">
-              <a:buNone/>
-            </a:pPr>
-            <a:r>
-              <a:rPr lang="vi-VN" sz="1000" b="0" i="0" kern="0" dirty="0">
+            <a:pPr algn="ctr" indent="0" marL="0">
+              <a:buNone/>
+            </a:pPr>
+            <a:r>
+              <a:rPr lang="vi-VN" sz="900" b="1" kern="0" dirty="0">
                 <a:solidFill>
                   <a:srgbClr val="FFFFFF"/>
                 </a:solidFill>
@@ -32452,21 +32544,21 @@
                 <a:ea typeface="Calibri" pitchFamily="34" charset="-122"/>
                 <a:cs typeface="Calibri" pitchFamily="34" charset="-120"/>
               </a:rPr>
-              <a:t>📅</a:t>
-            </a:r>
-          </a:p>
-        </p:txBody>
-      </p:sp>
-      <p:sp>
-        <p:nvSpPr>
-          <p:cNvPr id="238" name="TipTxt2"/>
-          <p:cNvSpPr/>
-          <p:nvPr/>
-        </p:nvSpPr>
-        <p:spPr>
-          <a:xfrm>
-            <a:off x="6536000" y="3227142"/>
-            <a:ext cx="5326000" cy="588571"/>
+              <a:t>▸</a:t>
+            </a:r>
+          </a:p>
+        </p:txBody>
+      </p:sp>
+      <p:sp>
+        <p:nvSpPr>
+          <p:cNvPr id="602" name="TTx2"/>
+          <p:cNvSpPr/>
+          <p:nvPr/>
+        </p:nvSpPr>
+        <p:spPr>
+          <a:xfrm>
+            <a:off x="6492000" y="3217142"/>
+            <a:ext cx="5380000" cy="608571"/>
           </a:xfrm>
           <a:prstGeom prst="rect">
             <a:avLst/>
@@ -32484,7 +32576,7 @@
               <a:buNone/>
             </a:pPr>
             <a:r>
-              <a:rPr lang="vi-VN" sz="1060" b="0" i="0" kern="0" dirty="0">
+              <a:rPr lang="vi-VN" sz="1060" b="0" kern="0" dirty="0">
                 <a:solidFill>
                   <a:srgbClr val="2C2C2C"/>
                 </a:solidFill>
@@ -32499,20 +32591,20 @@
       </p:sp>
       <p:sp>
         <p:nvSpPr>
-          <p:cNvPr id="239" name="TSep2"/>
-          <p:cNvSpPr/>
-          <p:nvPr/>
-        </p:nvSpPr>
-        <p:spPr>
-          <a:xfrm>
-            <a:off x="6246000" y="3803713"/>
-            <a:ext cx="5626000" cy="14000"/>
+          <p:cNvPr id="603" name="TS2"/>
+          <p:cNvSpPr/>
+          <p:nvPr/>
+        </p:nvSpPr>
+        <p:spPr>
+          <a:xfrm>
+            <a:off x="6232000" y="3815713"/>
+            <a:ext cx="5640000" cy="10000"/>
           </a:xfrm>
           <a:prstGeom prst="rect">
             <a:avLst/>
           </a:prstGeom>
           <a:solidFill>
-            <a:srgbClr val="E8EBF0"/>
+            <a:srgbClr val="E0E3E8"/>
           </a:solidFill>
           <a:ln>
             <a:noFill/>
@@ -32521,16 +32613,16 @@
       </p:sp>
       <p:sp>
         <p:nvSpPr>
-          <p:cNvPr id="240" name="TipIcon3"/>
-          <p:cNvSpPr/>
-          <p:nvPr/>
-        </p:nvSpPr>
-        <p:spPr>
-          <a:xfrm>
-            <a:off x="6246000" y="3999998"/>
-            <a:ext cx="220000" cy="220000"/>
-          </a:xfrm>
-          <a:prstGeom prst="ellipse">
+          <p:cNvPr id="604" name="TN3"/>
+          <p:cNvSpPr/>
+          <p:nvPr/>
+        </p:nvSpPr>
+        <p:spPr>
+          <a:xfrm>
+            <a:off x="6252000" y="4034998"/>
+            <a:ext cx="190000" cy="190000"/>
+          </a:xfrm>
+          <a:prstGeom prst="rect">
             <a:avLst/>
           </a:prstGeom>
           <a:solidFill>
@@ -32543,14 +32635,14 @@
       </p:sp>
       <p:sp>
         <p:nvSpPr>
-          <p:cNvPr id="241" name="TipIc3"/>
-          <p:cNvSpPr/>
-          <p:nvPr/>
-        </p:nvSpPr>
-        <p:spPr>
-          <a:xfrm>
-            <a:off x="6246000" y="3999998"/>
-            <a:ext cx="220000" cy="220000"/>
+          <p:cNvPr id="605" name="TNN3"/>
+          <p:cNvSpPr/>
+          <p:nvPr/>
+        </p:nvSpPr>
+        <p:spPr>
+          <a:xfrm>
+            <a:off x="6252000" y="4034998"/>
+            <a:ext cx="190000" cy="190000"/>
           </a:xfrm>
           <a:prstGeom prst="rect">
             <a:avLst/>
@@ -32564,11 +32656,11 @@
           <a:bodyPr wrap="square" lIns="0" tIns="0" rIns="0" bIns="0" rtlCol="0" anchor="ctr"/>
           <a:lstStyle/>
           <a:p>
-            <a:pPr algn="c" indent="0" marL="0">
-              <a:buNone/>
-            </a:pPr>
-            <a:r>
-              <a:rPr lang="vi-VN" sz="1000" b="0" i="0" kern="0" dirty="0">
+            <a:pPr algn="ctr" indent="0" marL="0">
+              <a:buNone/>
+            </a:pPr>
+            <a:r>
+              <a:rPr lang="vi-VN" sz="900" b="1" kern="0" dirty="0">
                 <a:solidFill>
                   <a:srgbClr val="FFFFFF"/>
                 </a:solidFill>
@@ -32583,14 +32675,14 @@
       </p:sp>
       <p:sp>
         <p:nvSpPr>
-          <p:cNvPr id="242" name="TipTxt3"/>
-          <p:cNvSpPr/>
-          <p:nvPr/>
-        </p:nvSpPr>
-        <p:spPr>
-          <a:xfrm>
-            <a:off x="6536000" y="3815713"/>
-            <a:ext cx="5326000" cy="588571"/>
+          <p:cNvPr id="606" name="TTx3"/>
+          <p:cNvSpPr/>
+          <p:nvPr/>
+        </p:nvSpPr>
+        <p:spPr>
+          <a:xfrm>
+            <a:off x="6492000" y="3825713"/>
+            <a:ext cx="5380000" cy="608571"/>
           </a:xfrm>
           <a:prstGeom prst="rect">
             <a:avLst/>
@@ -32608,7 +32700,7 @@
               <a:buNone/>
             </a:pPr>
             <a:r>
-              <a:rPr lang="vi-VN" sz="1060" b="1" i="0" kern="0" dirty="0">
+              <a:rPr lang="vi-VN" sz="1060" b="1" kern="0" dirty="0">
                 <a:solidFill>
                   <a:srgbClr val="E60012"/>
                 </a:solidFill>
@@ -32623,20 +32715,20 @@
       </p:sp>
       <p:sp>
         <p:nvSpPr>
-          <p:cNvPr id="243" name="TSep3"/>
-          <p:cNvSpPr/>
-          <p:nvPr/>
-        </p:nvSpPr>
-        <p:spPr>
-          <a:xfrm>
-            <a:off x="6246000" y="4392284"/>
-            <a:ext cx="5626000" cy="14000"/>
+          <p:cNvPr id="607" name="TS3"/>
+          <p:cNvSpPr/>
+          <p:nvPr/>
+        </p:nvSpPr>
+        <p:spPr>
+          <a:xfrm>
+            <a:off x="6232000" y="4424284"/>
+            <a:ext cx="5640000" cy="10000"/>
           </a:xfrm>
           <a:prstGeom prst="rect">
             <a:avLst/>
           </a:prstGeom>
           <a:solidFill>
-            <a:srgbClr val="E8EBF0"/>
+            <a:srgbClr val="E0E3E8"/>
           </a:solidFill>
           <a:ln>
             <a:noFill/>
@@ -32645,16 +32737,140 @@
       </p:sp>
       <p:sp>
         <p:nvSpPr>
-          <p:cNvPr id="244" name="TipIcon4"/>
-          <p:cNvSpPr/>
-          <p:nvPr/>
-        </p:nvSpPr>
-        <p:spPr>
-          <a:xfrm>
-            <a:off x="6246000" y="4588569"/>
-            <a:ext cx="220000" cy="220000"/>
-          </a:xfrm>
-          <a:prstGeom prst="ellipse">
+          <p:cNvPr id="608" name="TN4"/>
+          <p:cNvSpPr/>
+          <p:nvPr/>
+        </p:nvSpPr>
+        <p:spPr>
+          <a:xfrm>
+            <a:off x="6252000" y="4643569"/>
+            <a:ext cx="190000" cy="190000"/>
+          </a:xfrm>
+          <a:prstGeom prst="rect">
+            <a:avLst/>
+          </a:prstGeom>
+          <a:solidFill>
+            <a:srgbClr val="E60012"/>
+          </a:solidFill>
+          <a:ln>
+            <a:noFill/>
+          </a:ln>
+        </p:spPr>
+      </p:sp>
+      <p:sp>
+        <p:nvSpPr>
+          <p:cNvPr id="609" name="TNN4"/>
+          <p:cNvSpPr/>
+          <p:nvPr/>
+        </p:nvSpPr>
+        <p:spPr>
+          <a:xfrm>
+            <a:off x="6252000" y="4643569"/>
+            <a:ext cx="190000" cy="190000"/>
+          </a:xfrm>
+          <a:prstGeom prst="rect">
+            <a:avLst/>
+          </a:prstGeom>
+          <a:noFill/>
+          <a:ln>
+            <a:noFill/>
+          </a:ln>
+        </p:spPr>
+        <p:txBody>
+          <a:bodyPr wrap="square" lIns="0" tIns="0" rIns="0" bIns="0" rtlCol="0" anchor="ctr"/>
+          <a:lstStyle/>
+          <a:p>
+            <a:pPr algn="ctr" indent="0" marL="0">
+              <a:buNone/>
+            </a:pPr>
+            <a:r>
+              <a:rPr lang="vi-VN" sz="900" b="1" kern="0" dirty="0">
+                <a:solidFill>
+                  <a:srgbClr val="FFFFFF"/>
+                </a:solidFill>
+                <a:latin typeface="Calibri" pitchFamily="34" charset="0"/>
+                <a:ea typeface="Calibri" pitchFamily="34" charset="-122"/>
+                <a:cs typeface="Calibri" pitchFamily="34" charset="-120"/>
+              </a:rPr>
+              <a:t>⚠</a:t>
+            </a:r>
+          </a:p>
+        </p:txBody>
+      </p:sp>
+      <p:sp>
+        <p:nvSpPr>
+          <p:cNvPr id="610" name="TTx4"/>
+          <p:cNvSpPr/>
+          <p:nvPr/>
+        </p:nvSpPr>
+        <p:spPr>
+          <a:xfrm>
+            <a:off x="6492000" y="4434284"/>
+            <a:ext cx="5380000" cy="608571"/>
+          </a:xfrm>
+          <a:prstGeom prst="rect">
+            <a:avLst/>
+          </a:prstGeom>
+          <a:noFill/>
+          <a:ln>
+            <a:noFill/>
+          </a:ln>
+        </p:spPr>
+        <p:txBody>
+          <a:bodyPr wrap="square" lIns="0" tIns="0" rIns="0" bIns="0" rtlCol="0" anchor="ctr"/>
+          <a:lstStyle/>
+          <a:p>
+            <a:pPr algn="l" indent="0" marL="0">
+              <a:buNone/>
+            </a:pPr>
+            <a:r>
+              <a:rPr lang="vi-VN" sz="1060" b="1" kern="0" dirty="0">
+                <a:solidFill>
+                  <a:srgbClr val="E60012"/>
+                </a:solidFill>
+                <a:latin typeface="Calibri" pitchFamily="34" charset="0"/>
+                <a:ea typeface="Calibri" pitchFamily="34" charset="-122"/>
+                <a:cs typeface="Calibri" pitchFamily="34" charset="-120"/>
+              </a:rPr>
+              <a:t>Bắt buộc mua BHVC khi vay – tư vấn song song</a:t>
+            </a:r>
+          </a:p>
+        </p:txBody>
+      </p:sp>
+      <p:sp>
+        <p:nvSpPr>
+          <p:cNvPr id="611" name="TS4"/>
+          <p:cNvSpPr/>
+          <p:nvPr/>
+        </p:nvSpPr>
+        <p:spPr>
+          <a:xfrm>
+            <a:off x="6232000" y="5032855"/>
+            <a:ext cx="5640000" cy="10000"/>
+          </a:xfrm>
+          <a:prstGeom prst="rect">
+            <a:avLst/>
+          </a:prstGeom>
+          <a:solidFill>
+            <a:srgbClr val="E0E3E8"/>
+          </a:solidFill>
+          <a:ln>
+            <a:noFill/>
+          </a:ln>
+        </p:spPr>
+      </p:sp>
+      <p:sp>
+        <p:nvSpPr>
+          <p:cNvPr id="612" name="TN5"/>
+          <p:cNvSpPr/>
+          <p:nvPr/>
+        </p:nvSpPr>
+        <p:spPr>
+          <a:xfrm>
+            <a:off x="6252000" y="5252140"/>
+            <a:ext cx="190000" cy="190000"/>
+          </a:xfrm>
+          <a:prstGeom prst="rect">
             <a:avLst/>
           </a:prstGeom>
           <a:solidFill>
@@ -32667,14 +32883,14 @@
       </p:sp>
       <p:sp>
         <p:nvSpPr>
-          <p:cNvPr id="245" name="TipIc4"/>
-          <p:cNvSpPr/>
-          <p:nvPr/>
-        </p:nvSpPr>
-        <p:spPr>
-          <a:xfrm>
-            <a:off x="6246000" y="4588569"/>
-            <a:ext cx="220000" cy="220000"/>
+          <p:cNvPr id="613" name="TNN5"/>
+          <p:cNvSpPr/>
+          <p:nvPr/>
+        </p:nvSpPr>
+        <p:spPr>
+          <a:xfrm>
+            <a:off x="6252000" y="5252140"/>
+            <a:ext cx="190000" cy="190000"/>
           </a:xfrm>
           <a:prstGeom prst="rect">
             <a:avLst/>
@@ -32688,11 +32904,11 @@
           <a:bodyPr wrap="square" lIns="0" tIns="0" rIns="0" bIns="0" rtlCol="0" anchor="ctr"/>
           <a:lstStyle/>
           <a:p>
-            <a:pPr algn="c" indent="0" marL="0">
-              <a:buNone/>
-            </a:pPr>
-            <a:r>
-              <a:rPr lang="vi-VN" sz="1000" b="0" i="0" kern="0" dirty="0">
+            <a:pPr algn="ctr" indent="0" marL="0">
+              <a:buNone/>
+            </a:pPr>
+            <a:r>
+              <a:rPr lang="vi-VN" sz="900" b="1" kern="0" dirty="0">
                 <a:solidFill>
                   <a:srgbClr val="FFFFFF"/>
                 </a:solidFill>
@@ -32700,21 +32916,21 @@
                 <a:ea typeface="Calibri" pitchFamily="34" charset="-122"/>
                 <a:cs typeface="Calibri" pitchFamily="34" charset="-120"/>
               </a:rPr>
-              <a:t>🛡</a:t>
-            </a:r>
-          </a:p>
-        </p:txBody>
-      </p:sp>
-      <p:sp>
-        <p:nvSpPr>
-          <p:cNvPr id="246" name="TipTxt4"/>
-          <p:cNvSpPr/>
-          <p:nvPr/>
-        </p:nvSpPr>
-        <p:spPr>
-          <a:xfrm>
-            <a:off x="6536000" y="4404284"/>
-            <a:ext cx="5326000" cy="588571"/>
+              <a:t>▸</a:t>
+            </a:r>
+          </a:p>
+        </p:txBody>
+      </p:sp>
+      <p:sp>
+        <p:nvSpPr>
+          <p:cNvPr id="614" name="TTx5"/>
+          <p:cNvSpPr/>
+          <p:nvPr/>
+        </p:nvSpPr>
+        <p:spPr>
+          <a:xfrm>
+            <a:off x="6492000" y="5042855"/>
+            <a:ext cx="5380000" cy="608571"/>
           </a:xfrm>
           <a:prstGeom prst="rect">
             <a:avLst/>
@@ -32732,7 +32948,7 @@
               <a:buNone/>
             </a:pPr>
             <a:r>
-              <a:rPr lang="vi-VN" sz="1060" b="1" i="0" kern="0" dirty="0">
+              <a:rPr lang="vi-VN" sz="1060" b="0" kern="0" dirty="0">
                 <a:solidFill>
                   <a:srgbClr val="2C2C2C"/>
                 </a:solidFill>
@@ -32740,27 +32956,27 @@
                 <a:ea typeface="Calibri" pitchFamily="34" charset="-122"/>
                 <a:cs typeface="Calibri" pitchFamily="34" charset="-120"/>
               </a:rPr>
-              <a:t>Bắt buộc mua BHVC khi vay – tư vấn song song</a:t>
-            </a:r>
-          </a:p>
-        </p:txBody>
-      </p:sp>
-      <p:sp>
-        <p:nvSpPr>
-          <p:cNvPr id="247" name="TSep4"/>
-          <p:cNvSpPr/>
-          <p:nvPr/>
-        </p:nvSpPr>
-        <p:spPr>
-          <a:xfrm>
-            <a:off x="6246000" y="4980855"/>
-            <a:ext cx="5626000" cy="14000"/>
+              <a:t>Thời gian giải ngân: 1–3 ngày làm việc</a:t>
+            </a:r>
+          </a:p>
+        </p:txBody>
+      </p:sp>
+      <p:sp>
+        <p:nvSpPr>
+          <p:cNvPr id="615" name="TS5"/>
+          <p:cNvSpPr/>
+          <p:nvPr/>
+        </p:nvSpPr>
+        <p:spPr>
+          <a:xfrm>
+            <a:off x="6232000" y="5641426"/>
+            <a:ext cx="5640000" cy="10000"/>
           </a:xfrm>
           <a:prstGeom prst="rect">
             <a:avLst/>
           </a:prstGeom>
           <a:solidFill>
-            <a:srgbClr val="E8EBF0"/>
+            <a:srgbClr val="E0E3E8"/>
           </a:solidFill>
           <a:ln>
             <a:noFill/>
@@ -32769,16 +32985,16 @@
       </p:sp>
       <p:sp>
         <p:nvSpPr>
-          <p:cNvPr id="248" name="TipIcon5"/>
-          <p:cNvSpPr/>
-          <p:nvPr/>
-        </p:nvSpPr>
-        <p:spPr>
-          <a:xfrm>
-            <a:off x="6246000" y="5177140"/>
-            <a:ext cx="220000" cy="220000"/>
-          </a:xfrm>
-          <a:prstGeom prst="ellipse">
+          <p:cNvPr id="616" name="TN6"/>
+          <p:cNvSpPr/>
+          <p:nvPr/>
+        </p:nvSpPr>
+        <p:spPr>
+          <a:xfrm>
+            <a:off x="6252000" y="5860711"/>
+            <a:ext cx="190000" cy="190000"/>
+          </a:xfrm>
+          <a:prstGeom prst="rect">
             <a:avLst/>
           </a:prstGeom>
           <a:solidFill>
@@ -32791,14 +33007,14 @@
       </p:sp>
       <p:sp>
         <p:nvSpPr>
-          <p:cNvPr id="249" name="TipIc5"/>
-          <p:cNvSpPr/>
-          <p:nvPr/>
-        </p:nvSpPr>
-        <p:spPr>
-          <a:xfrm>
-            <a:off x="6246000" y="5177140"/>
-            <a:ext cx="220000" cy="220000"/>
+          <p:cNvPr id="617" name="TNN6"/>
+          <p:cNvSpPr/>
+          <p:nvPr/>
+        </p:nvSpPr>
+        <p:spPr>
+          <a:xfrm>
+            <a:off x="6252000" y="5860711"/>
+            <a:ext cx="190000" cy="190000"/>
           </a:xfrm>
           <a:prstGeom prst="rect">
             <a:avLst/>
@@ -32812,11 +33028,11 @@
           <a:bodyPr wrap="square" lIns="0" tIns="0" rIns="0" bIns="0" rtlCol="0" anchor="ctr"/>
           <a:lstStyle/>
           <a:p>
-            <a:pPr algn="c" indent="0" marL="0">
-              <a:buNone/>
-            </a:pPr>
-            <a:r>
-              <a:rPr lang="vi-VN" sz="1000" b="0" i="0" kern="0" dirty="0">
+            <a:pPr algn="ctr" indent="0" marL="0">
+              <a:buNone/>
+            </a:pPr>
+            <a:r>
+              <a:rPr lang="vi-VN" sz="900" b="1" kern="0" dirty="0">
                 <a:solidFill>
                   <a:srgbClr val="FFFFFF"/>
                 </a:solidFill>
@@ -32824,21 +33040,21 @@
                 <a:ea typeface="Calibri" pitchFamily="34" charset="-122"/>
                 <a:cs typeface="Calibri" pitchFamily="34" charset="-120"/>
               </a:rPr>
-              <a:t>⏱</a:t>
-            </a:r>
-          </a:p>
-        </p:txBody>
-      </p:sp>
-      <p:sp>
-        <p:nvSpPr>
-          <p:cNvPr id="250" name="TipTxt5"/>
-          <p:cNvSpPr/>
-          <p:nvPr/>
-        </p:nvSpPr>
-        <p:spPr>
-          <a:xfrm>
-            <a:off x="6536000" y="4992855"/>
-            <a:ext cx="5326000" cy="588571"/>
+              <a:t>▸</a:t>
+            </a:r>
+          </a:p>
+        </p:txBody>
+      </p:sp>
+      <p:sp>
+        <p:nvSpPr>
+          <p:cNvPr id="618" name="TTx6"/>
+          <p:cNvSpPr/>
+          <p:nvPr/>
+        </p:nvSpPr>
+        <p:spPr>
+          <a:xfrm>
+            <a:off x="6492000" y="5651426"/>
+            <a:ext cx="5380000" cy="608571"/>
           </a:xfrm>
           <a:prstGeom prst="rect">
             <a:avLst/>
@@ -32856,7 +33072,7 @@
               <a:buNone/>
             </a:pPr>
             <a:r>
-              <a:rPr lang="vi-VN" sz="1060" b="0" i="0" kern="0" dirty="0">
+              <a:rPr lang="vi-VN" sz="1060" b="0" kern="0" dirty="0">
                 <a:solidFill>
                   <a:srgbClr val="2C2C2C"/>
                 </a:solidFill>
@@ -32864,130 +33080,6 @@
                 <a:ea typeface="Calibri" pitchFamily="34" charset="-122"/>
                 <a:cs typeface="Calibri" pitchFamily="34" charset="-120"/>
               </a:rPr>
-              <a:t>Thời gian giải ngân: 1–3 ngày làm việc</a:t>
-            </a:r>
-          </a:p>
-        </p:txBody>
-      </p:sp>
-      <p:sp>
-        <p:nvSpPr>
-          <p:cNvPr id="251" name="TSep5"/>
-          <p:cNvSpPr/>
-          <p:nvPr/>
-        </p:nvSpPr>
-        <p:spPr>
-          <a:xfrm>
-            <a:off x="6246000" y="5569426"/>
-            <a:ext cx="5626000" cy="14000"/>
-          </a:xfrm>
-          <a:prstGeom prst="rect">
-            <a:avLst/>
-          </a:prstGeom>
-          <a:solidFill>
-            <a:srgbClr val="E8EBF0"/>
-          </a:solidFill>
-          <a:ln>
-            <a:noFill/>
-          </a:ln>
-        </p:spPr>
-      </p:sp>
-      <p:sp>
-        <p:nvSpPr>
-          <p:cNvPr id="252" name="TipIcon6"/>
-          <p:cNvSpPr/>
-          <p:nvPr/>
-        </p:nvSpPr>
-        <p:spPr>
-          <a:xfrm>
-            <a:off x="6246000" y="5765711"/>
-            <a:ext cx="220000" cy="220000"/>
-          </a:xfrm>
-          <a:prstGeom prst="ellipse">
-            <a:avLst/>
-          </a:prstGeom>
-          <a:solidFill>
-            <a:srgbClr val="1A1F36"/>
-          </a:solidFill>
-          <a:ln>
-            <a:noFill/>
-          </a:ln>
-        </p:spPr>
-      </p:sp>
-      <p:sp>
-        <p:nvSpPr>
-          <p:cNvPr id="253" name="TipIc6"/>
-          <p:cNvSpPr/>
-          <p:nvPr/>
-        </p:nvSpPr>
-        <p:spPr>
-          <a:xfrm>
-            <a:off x="6246000" y="5765711"/>
-            <a:ext cx="220000" cy="220000"/>
-          </a:xfrm>
-          <a:prstGeom prst="rect">
-            <a:avLst/>
-          </a:prstGeom>
-          <a:noFill/>
-          <a:ln>
-            <a:noFill/>
-          </a:ln>
-        </p:spPr>
-        <p:txBody>
-          <a:bodyPr wrap="square" lIns="0" tIns="0" rIns="0" bIns="0" rtlCol="0" anchor="ctr"/>
-          <a:lstStyle/>
-          <a:p>
-            <a:pPr algn="c" indent="0" marL="0">
-              <a:buNone/>
-            </a:pPr>
-            <a:r>
-              <a:rPr lang="vi-VN" sz="1000" b="0" i="0" kern="0" dirty="0">
-                <a:solidFill>
-                  <a:srgbClr val="FFFFFF"/>
-                </a:solidFill>
-                <a:latin typeface="Calibri" pitchFamily="34" charset="0"/>
-                <a:ea typeface="Calibri" pitchFamily="34" charset="-122"/>
-                <a:cs typeface="Calibri" pitchFamily="34" charset="-120"/>
-              </a:rPr>
-              <a:t>🤝</a:t>
-            </a:r>
-          </a:p>
-        </p:txBody>
-      </p:sp>
-      <p:sp>
-        <p:nvSpPr>
-          <p:cNvPr id="254" name="TipTxt6"/>
-          <p:cNvSpPr/>
-          <p:nvPr/>
-        </p:nvSpPr>
-        <p:spPr>
-          <a:xfrm>
-            <a:off x="6536000" y="5581426"/>
-            <a:ext cx="5326000" cy="588571"/>
-          </a:xfrm>
-          <a:prstGeom prst="rect">
-            <a:avLst/>
-          </a:prstGeom>
-          <a:noFill/>
-          <a:ln>
-            <a:noFill/>
-          </a:ln>
-        </p:spPr>
-        <p:txBody>
-          <a:bodyPr wrap="square" lIns="0" tIns="0" rIns="0" bIns="0" rtlCol="0" anchor="ctr"/>
-          <a:lstStyle/>
-          <a:p>
-            <a:pPr algn="l" indent="0" marL="0">
-              <a:buNone/>
-            </a:pPr>
-            <a:r>
-              <a:rPr lang="vi-VN" sz="1060" b="0" i="0" kern="0" dirty="0">
-                <a:solidFill>
-                  <a:srgbClr val="2C2C2C"/>
-                </a:solidFill>
-                <a:latin typeface="Calibri" pitchFamily="34" charset="0"/>
-                <a:ea typeface="Calibri" pitchFamily="34" charset="-122"/>
-                <a:cs typeface="Calibri" pitchFamily="34" charset="-120"/>
-              </a:rPr>
               <a:t>Đại lý hỗ trợ hồ sơ – không để KH tự làm một mình</a:t>
             </a:r>
           </a:p>
@@ -32995,7 +33087,7 @@
       </p:sp>
       <p:sp>
         <p:nvSpPr>
-          <p:cNvPr id="255" name="FBar"/>
+          <p:cNvPr id="619" name="FBar"/>
           <p:cNvSpPr/>
           <p:nvPr/>
         </p:nvSpPr>
@@ -33017,7 +33109,7 @@
       </p:sp>
       <p:sp>
         <p:nvSpPr>
-          <p:cNvPr id="256" name="FTxt"/>
+          <p:cNvPr id="620" name="FTxt"/>
           <p:cNvSpPr/>
           <p:nvPr/>
         </p:nvSpPr>
@@ -33042,7 +33134,7 @@
               <a:buNone/>
             </a:pPr>
             <a:r>
-              <a:rPr lang="vi-VN" sz="1000" b="0" i="0" kern="0" dirty="0">
+              <a:rPr lang="vi-VN" sz="1000" b="0" kern="0" dirty="0">
                 <a:solidFill>
                   <a:srgbClr val="4A4A4A"/>
                 </a:solidFill>
@@ -33057,7 +33149,7 @@
       </p:sp>
       <p:sp>
         <p:nvSpPr>
-          <p:cNvPr id="257" name="FPg"/>
+          <p:cNvPr id="621" name="FPg"/>
           <p:cNvSpPr/>
           <p:nvPr/>
         </p:nvSpPr>
@@ -33082,7 +33174,7 @@
               <a:buNone/>
             </a:pPr>
             <a:r>
-              <a:rPr lang="vi-VN" sz="1000" b="0" i="0" kern="0" dirty="0">
+              <a:rPr lang="vi-VN" sz="1000" b="0" kern="0" dirty="0">
                 <a:solidFill>
                   <a:srgbClr val="B8BDC4"/>
                 </a:solidFill>
@@ -33115,7 +33207,7 @@
       <p:grpSpPr/>
       <p:sp>
         <p:nvSpPr>
-          <p:cNvPr id="258" name="RedBar"/>
+          <p:cNvPr id="622" name="RedBar"/>
           <p:cNvSpPr/>
           <p:nvPr/>
         </p:nvSpPr>
@@ -33137,7 +33229,7 @@
       </p:sp>
       <p:sp>
         <p:nvSpPr>
-          <p:cNvPr id="259" name="PhanLbl"/>
+          <p:cNvPr id="623" name="Phan"/>
           <p:cNvSpPr/>
           <p:nvPr/>
         </p:nvSpPr>
@@ -33162,7 +33254,7 @@
               <a:buNone/>
             </a:pPr>
             <a:r>
-              <a:rPr lang="vi-VN" sz="1200" b="1" i="0" kern="0" dirty="0">
+              <a:rPr lang="vi-VN" sz="1200" b="1" kern="0" dirty="0">
                 <a:solidFill>
                   <a:srgbClr val="E60012"/>
                 </a:solidFill>
@@ -33177,7 +33269,7 @@
       </p:sp>
       <p:sp>
         <p:nvSpPr>
-          <p:cNvPr id="260" name="Title"/>
+          <p:cNvPr id="624" name="Title"/>
           <p:cNvSpPr/>
           <p:nvPr/>
         </p:nvSpPr>
@@ -33202,7 +33294,7 @@
               <a:buNone/>
             </a:pPr>
             <a:r>
-              <a:rPr lang="vi-VN" sz="2800" b="1" i="0" kern="0" dirty="0">
+              <a:rPr lang="vi-VN" sz="2800" b="1" kern="0" dirty="0">
                 <a:solidFill>
                   <a:srgbClr val="1A1F36"/>
                 </a:solidFill>
@@ -33217,7 +33309,7 @@
       </p:sp>
       <p:sp>
         <p:nvSpPr>
-          <p:cNvPr id="261" name="Sub"/>
+          <p:cNvPr id="625" name="Sub"/>
           <p:cNvSpPr/>
           <p:nvPr/>
         </p:nvSpPr>
@@ -33242,7 +33334,7 @@
               <a:buNone/>
             </a:pPr>
             <a:r>
-              <a:rPr lang="vi-VN" sz="1200" b="0" i="0" kern="0" dirty="0">
+              <a:rPr lang="vi-VN" sz="1200" b="0" kern="0" dirty="0">
                 <a:solidFill>
                   <a:srgbClr val="4A4A4A"/>
                 </a:solidFill>
@@ -33257,20 +33349,20 @@
       </p:sp>
       <p:sp>
         <p:nvSpPr>
-          <p:cNvPr id="262" name="AccLine"/>
-          <p:cNvSpPr/>
-          <p:nvPr/>
-        </p:nvSpPr>
-        <p:spPr>
-          <a:xfrm>
-            <a:off x="548640" y="1520000"/>
-            <a:ext cx="10972800" cy="18000"/>
+          <p:cNvPr id="626" name="Line"/>
+          <p:cNvSpPr/>
+          <p:nvPr/>
+        </p:nvSpPr>
+        <p:spPr>
+          <a:xfrm>
+            <a:off x="548640" y="1530000"/>
+            <a:ext cx="10972800" cy="16000"/>
           </a:xfrm>
           <a:prstGeom prst="rect">
             <a:avLst/>
           </a:prstGeom>
           <a:solidFill>
-            <a:srgbClr val="E8EBF0"/>
+            <a:srgbClr val="E0E3E8"/>
           </a:solidFill>
           <a:ln>
             <a:noFill/>
@@ -33279,40 +33371,36 @@
       </p:sp>
       <p:sp>
         <p:nvSpPr>
-          <p:cNvPr id="263" name="CBg"/>
-          <p:cNvSpPr/>
-          <p:nvPr/>
-        </p:nvSpPr>
-        <p:spPr>
-          <a:xfrm>
-            <a:off x="280000" y="1640000"/>
-            <a:ext cx="5741000" cy="1219500"/>
-          </a:xfrm>
-          <a:prstGeom prst="roundRect">
-            <a:avLst>
-              <a:gd name="adj" fmla="val 10000"/>
-            </a:avLst>
+          <p:cNvPr id="627" name="SBg1"/>
+          <p:cNvSpPr/>
+          <p:nvPr/>
+        </p:nvSpPr>
+        <p:spPr>
+          <a:xfrm>
+            <a:off x="280000" y="1590000"/>
+            <a:ext cx="5741000" cy="1114500"/>
+          </a:xfrm>
+          <a:prstGeom prst="rect">
+            <a:avLst/>
           </a:prstGeom>
           <a:solidFill>
-            <a:srgbClr val="FFFFFF"/>
+            <a:srgbClr val="F0F2F5"/>
           </a:solidFill>
-          <a:ln w="9144">
-            <a:solidFill>
-              <a:srgbClr val="E8EBF0"/>
-            </a:solidFill>
+          <a:ln>
+            <a:noFill/>
           </a:ln>
         </p:spPr>
       </p:sp>
       <p:sp>
         <p:nvSpPr>
-          <p:cNvPr id="264" name="CLBar"/>
-          <p:cNvSpPr/>
-          <p:nvPr/>
-        </p:nvSpPr>
-        <p:spPr>
-          <a:xfrm>
-            <a:off x="280000" y="1640000"/>
-            <a:ext cx="220000" cy="1219500"/>
+          <p:cNvPr id="628" name="SLB1"/>
+          <p:cNvSpPr/>
+          <p:nvPr/>
+        </p:nvSpPr>
+        <p:spPr>
+          <a:xfrm>
+            <a:off x="280000" y="1590000"/>
+            <a:ext cx="220000" cy="1114500"/>
           </a:xfrm>
           <a:prstGeom prst="rect">
             <a:avLst/>
@@ -33327,14 +33415,14 @@
       </p:sp>
       <p:sp>
         <p:nvSpPr>
-          <p:cNvPr id="265" name="CNum"/>
-          <p:cNvSpPr/>
-          <p:nvPr/>
-        </p:nvSpPr>
-        <p:spPr>
-          <a:xfrm>
-            <a:off x="280000" y="1640000"/>
-            <a:ext cx="220000" cy="1219500"/>
+          <p:cNvPr id="629" name="SN1"/>
+          <p:cNvSpPr/>
+          <p:nvPr/>
+        </p:nvSpPr>
+        <p:spPr>
+          <a:xfrm>
+            <a:off x="280000" y="1590000"/>
+            <a:ext cx="220000" cy="1114500"/>
           </a:xfrm>
           <a:prstGeom prst="rect">
             <a:avLst/>
@@ -33348,11 +33436,11 @@
           <a:bodyPr wrap="square" lIns="0" tIns="0" rIns="0" bIns="0" rtlCol="0" anchor="ctr"/>
           <a:lstStyle/>
           <a:p>
-            <a:pPr algn="c" indent="0" marL="0">
-              <a:buNone/>
-            </a:pPr>
-            <a:r>
-              <a:rPr lang="vi-VN" sz="1500" b="1" i="0" kern="0" dirty="0">
+            <a:pPr algn="ctr" indent="0" marL="0">
+              <a:buNone/>
+            </a:pPr>
+            <a:r>
+              <a:rPr lang="vi-VN" sz="1500" b="1" kern="0" dirty="0">
                 <a:solidFill>
                   <a:srgbClr val="FFFFFF"/>
                 </a:solidFill>
@@ -33367,14 +33455,14 @@
       </p:sp>
       <p:sp>
         <p:nvSpPr>
-          <p:cNvPr id="266" name="CTitle"/>
-          <p:cNvSpPr/>
-          <p:nvPr/>
-        </p:nvSpPr>
-        <p:spPr>
-          <a:xfrm>
-            <a:off x="570000" y="1680000"/>
-            <a:ext cx="5431000" cy="472190"/>
+          <p:cNvPr id="630" name="ST1"/>
+          <p:cNvSpPr/>
+          <p:nvPr/>
+        </p:nvSpPr>
+        <p:spPr>
+          <a:xfrm>
+            <a:off x="570000" y="1620000"/>
+            <a:ext cx="5431000" cy="460380"/>
           </a:xfrm>
           <a:prstGeom prst="rect">
             <a:avLst/>
@@ -33392,7 +33480,7 @@
               <a:buNone/>
             </a:pPr>
             <a:r>
-              <a:rPr lang="vi-VN" sz="1000" b="1" i="0" kern="0" dirty="0">
+              <a:rPr lang="vi-VN" sz="1020" b="1" kern="0" dirty="0">
                 <a:solidFill>
                   <a:srgbClr val="1A1F36"/>
                 </a:solidFill>
@@ -33407,20 +33495,20 @@
       </p:sp>
       <p:sp>
         <p:nvSpPr>
-          <p:cNvPr id="267" name="CSep"/>
-          <p:cNvSpPr/>
-          <p:nvPr/>
-        </p:nvSpPr>
-        <p:spPr>
-          <a:xfrm>
-            <a:off x="570000" y="2152190"/>
-            <a:ext cx="5431000" cy="14000"/>
+          <p:cNvPr id="631" name="SS1"/>
+          <p:cNvSpPr/>
+          <p:nvPr/>
+        </p:nvSpPr>
+        <p:spPr>
+          <a:xfrm>
+            <a:off x="570000" y="2080380"/>
+            <a:ext cx="5431000" cy="12000"/>
           </a:xfrm>
           <a:prstGeom prst="rect">
             <a:avLst/>
           </a:prstGeom>
           <a:solidFill>
-            <a:srgbClr val="E8EBF0"/>
+            <a:srgbClr val="E0E3E8"/>
           </a:solidFill>
           <a:ln>
             <a:noFill/>
@@ -33429,14 +33517,14 @@
       </p:sp>
       <p:sp>
         <p:nvSpPr>
-          <p:cNvPr id="268" name="CAction"/>
-          <p:cNvSpPr/>
-          <p:nvPr/>
-        </p:nvSpPr>
-        <p:spPr>
-          <a:xfrm>
-            <a:off x="570000" y="2192190"/>
-            <a:ext cx="5431000" cy="647310"/>
+          <p:cNvPr id="632" name="SA1"/>
+          <p:cNvSpPr/>
+          <p:nvPr/>
+        </p:nvSpPr>
+        <p:spPr>
+          <a:xfrm>
+            <a:off x="570000" y="2110380"/>
+            <a:ext cx="5431000" cy="584120"/>
           </a:xfrm>
           <a:prstGeom prst="rect">
             <a:avLst/>
@@ -33454,7 +33542,7 @@
               <a:buNone/>
             </a:pPr>
             <a:r>
-              <a:rPr lang="vi-VN" sz="940" b="0" i="1" kern="0" dirty="0">
+              <a:rPr lang="vi-VN" sz="970" b="0" kern="0" dirty="0">
                 <a:solidFill>
                   <a:srgbClr val="4A4A4A"/>
                 </a:solidFill>
@@ -33462,47 +33550,43 @@
                 <a:ea typeface="Calibri" pitchFamily="34" charset="-122"/>
                 <a:cs typeface="Calibri" pitchFamily="34" charset="-120"/>
               </a:rPr>
-              <a:t>→ Không báo giá qua điện thoại. Mời KH đến xem xe thực tế rồi thương lượng giá trực tiếp.</a:t>
-            </a:r>
-          </a:p>
-        </p:txBody>
-      </p:sp>
-      <p:sp>
-        <p:nvSpPr>
-          <p:cNvPr id="269" name="CBg"/>
-          <p:cNvSpPr/>
-          <p:nvPr/>
-        </p:nvSpPr>
-        <p:spPr>
-          <a:xfrm>
-            <a:off x="6171000" y="1640000"/>
-            <a:ext cx="5741000" cy="1219500"/>
-          </a:xfrm>
-          <a:prstGeom prst="roundRect">
-            <a:avLst>
-              <a:gd name="adj" fmla="val 10000"/>
-            </a:avLst>
+              <a:t>→ Không báo giá qua điện thoại. Mời KH đến xem xe thực tế rồi thương lượng trực tiếp.</a:t>
+            </a:r>
+          </a:p>
+        </p:txBody>
+      </p:sp>
+      <p:sp>
+        <p:nvSpPr>
+          <p:cNvPr id="633" name="SBg2"/>
+          <p:cNvSpPr/>
+          <p:nvPr/>
+        </p:nvSpPr>
+        <p:spPr>
+          <a:xfrm>
+            <a:off x="6171000" y="1590000"/>
+            <a:ext cx="5741000" cy="1114500"/>
+          </a:xfrm>
+          <a:prstGeom prst="rect">
+            <a:avLst/>
           </a:prstGeom>
           <a:solidFill>
-            <a:srgbClr val="FFFFFF"/>
+            <a:srgbClr val="F0F2F5"/>
           </a:solidFill>
-          <a:ln w="9144">
-            <a:solidFill>
-              <a:srgbClr val="E8EBF0"/>
-            </a:solidFill>
+          <a:ln>
+            <a:noFill/>
           </a:ln>
         </p:spPr>
       </p:sp>
       <p:sp>
         <p:nvSpPr>
-          <p:cNvPr id="270" name="CLBar"/>
-          <p:cNvSpPr/>
-          <p:nvPr/>
-        </p:nvSpPr>
-        <p:spPr>
-          <a:xfrm>
-            <a:off x="6171000" y="1640000"/>
-            <a:ext cx="220000" cy="1219500"/>
+          <p:cNvPr id="634" name="SLB2"/>
+          <p:cNvSpPr/>
+          <p:nvPr/>
+        </p:nvSpPr>
+        <p:spPr>
+          <a:xfrm>
+            <a:off x="6171000" y="1590000"/>
+            <a:ext cx="220000" cy="1114500"/>
           </a:xfrm>
           <a:prstGeom prst="rect">
             <a:avLst/>
@@ -33517,14 +33601,14 @@
       </p:sp>
       <p:sp>
         <p:nvSpPr>
-          <p:cNvPr id="271" name="CNum"/>
-          <p:cNvSpPr/>
-          <p:nvPr/>
-        </p:nvSpPr>
-        <p:spPr>
-          <a:xfrm>
-            <a:off x="6171000" y="1640000"/>
-            <a:ext cx="220000" cy="1219500"/>
+          <p:cNvPr id="635" name="SN2"/>
+          <p:cNvSpPr/>
+          <p:nvPr/>
+        </p:nvSpPr>
+        <p:spPr>
+          <a:xfrm>
+            <a:off x="6171000" y="1590000"/>
+            <a:ext cx="220000" cy="1114500"/>
           </a:xfrm>
           <a:prstGeom prst="rect">
             <a:avLst/>
@@ -33538,11 +33622,11 @@
           <a:bodyPr wrap="square" lIns="0" tIns="0" rIns="0" bIns="0" rtlCol="0" anchor="ctr"/>
           <a:lstStyle/>
           <a:p>
-            <a:pPr algn="c" indent="0" marL="0">
-              <a:buNone/>
-            </a:pPr>
-            <a:r>
-              <a:rPr lang="vi-VN" sz="1500" b="1" i="0" kern="0" dirty="0">
+            <a:pPr algn="ctr" indent="0" marL="0">
+              <a:buNone/>
+            </a:pPr>
+            <a:r>
+              <a:rPr lang="vi-VN" sz="1500" b="1" kern="0" dirty="0">
                 <a:solidFill>
                   <a:srgbClr val="FFFFFF"/>
                 </a:solidFill>
@@ -33557,14 +33641,14 @@
       </p:sp>
       <p:sp>
         <p:nvSpPr>
-          <p:cNvPr id="272" name="CTitle"/>
-          <p:cNvSpPr/>
-          <p:nvPr/>
-        </p:nvSpPr>
-        <p:spPr>
-          <a:xfrm>
-            <a:off x="6461000" y="1680000"/>
-            <a:ext cx="5431000" cy="472190"/>
+          <p:cNvPr id="636" name="ST2"/>
+          <p:cNvSpPr/>
+          <p:nvPr/>
+        </p:nvSpPr>
+        <p:spPr>
+          <a:xfrm>
+            <a:off x="6461000" y="1620000"/>
+            <a:ext cx="5431000" cy="460380"/>
           </a:xfrm>
           <a:prstGeom prst="rect">
             <a:avLst/>
@@ -33582,7 +33666,7 @@
               <a:buNone/>
             </a:pPr>
             <a:r>
-              <a:rPr lang="vi-VN" sz="1000" b="1" i="0" kern="0" dirty="0">
+              <a:rPr lang="vi-VN" sz="1020" b="1" kern="0" dirty="0">
                 <a:solidFill>
                   <a:srgbClr val="1A1F36"/>
                 </a:solidFill>
@@ -33597,20 +33681,20 @@
       </p:sp>
       <p:sp>
         <p:nvSpPr>
-          <p:cNvPr id="273" name="CSep"/>
-          <p:cNvSpPr/>
-          <p:nvPr/>
-        </p:nvSpPr>
-        <p:spPr>
-          <a:xfrm>
-            <a:off x="6461000" y="2152190"/>
-            <a:ext cx="5431000" cy="14000"/>
+          <p:cNvPr id="637" name="SS2"/>
+          <p:cNvSpPr/>
+          <p:nvPr/>
+        </p:nvSpPr>
+        <p:spPr>
+          <a:xfrm>
+            <a:off x="6461000" y="2080380"/>
+            <a:ext cx="5431000" cy="12000"/>
           </a:xfrm>
           <a:prstGeom prst="rect">
             <a:avLst/>
           </a:prstGeom>
           <a:solidFill>
-            <a:srgbClr val="E8EBF0"/>
+            <a:srgbClr val="E0E3E8"/>
           </a:solidFill>
           <a:ln>
             <a:noFill/>
@@ -33619,14 +33703,14 @@
       </p:sp>
       <p:sp>
         <p:nvSpPr>
-          <p:cNvPr id="274" name="CAction"/>
-          <p:cNvSpPr/>
-          <p:nvPr/>
-        </p:nvSpPr>
-        <p:spPr>
-          <a:xfrm>
-            <a:off x="6461000" y="2192190"/>
-            <a:ext cx="5431000" cy="647310"/>
+          <p:cNvPr id="638" name="SA2"/>
+          <p:cNvSpPr/>
+          <p:nvPr/>
+        </p:nvSpPr>
+        <p:spPr>
+          <a:xfrm>
+            <a:off x="6461000" y="2110380"/>
+            <a:ext cx="5431000" cy="584120"/>
           </a:xfrm>
           <a:prstGeom prst="rect">
             <a:avLst/>
@@ -33644,7 +33728,7 @@
               <a:buNone/>
             </a:pPr>
             <a:r>
-              <a:rPr lang="vi-VN" sz="940" b="0" i="1" kern="0" dirty="0">
+              <a:rPr lang="vi-VN" sz="970" b="0" kern="0" dirty="0">
                 <a:solidFill>
                   <a:srgbClr val="4A4A4A"/>
                 </a:solidFill>
@@ -33659,40 +33743,36 @@
       </p:sp>
       <p:sp>
         <p:nvSpPr>
-          <p:cNvPr id="275" name="CBg"/>
-          <p:cNvSpPr/>
-          <p:nvPr/>
-        </p:nvSpPr>
-        <p:spPr>
-          <a:xfrm>
-            <a:off x="280000" y="3009500"/>
-            <a:ext cx="5741000" cy="1219500"/>
-          </a:xfrm>
-          <a:prstGeom prst="roundRect">
-            <a:avLst>
-              <a:gd name="adj" fmla="val 10000"/>
-            </a:avLst>
+          <p:cNvPr id="639" name="SBg3"/>
+          <p:cNvSpPr/>
+          <p:nvPr/>
+        </p:nvSpPr>
+        <p:spPr>
+          <a:xfrm>
+            <a:off x="280000" y="2854500"/>
+            <a:ext cx="5741000" cy="1114500"/>
+          </a:xfrm>
+          <a:prstGeom prst="rect">
+            <a:avLst/>
           </a:prstGeom>
           <a:solidFill>
-            <a:srgbClr val="FFFFFF"/>
+            <a:srgbClr val="F0F2F5"/>
           </a:solidFill>
-          <a:ln w="9144">
-            <a:solidFill>
-              <a:srgbClr val="E8EBF0"/>
-            </a:solidFill>
+          <a:ln>
+            <a:noFill/>
           </a:ln>
         </p:spPr>
       </p:sp>
       <p:sp>
         <p:nvSpPr>
-          <p:cNvPr id="276" name="CLBar"/>
-          <p:cNvSpPr/>
-          <p:nvPr/>
-        </p:nvSpPr>
-        <p:spPr>
-          <a:xfrm>
-            <a:off x="280000" y="3009500"/>
-            <a:ext cx="220000" cy="1219500"/>
+          <p:cNvPr id="640" name="SLB3"/>
+          <p:cNvSpPr/>
+          <p:nvPr/>
+        </p:nvSpPr>
+        <p:spPr>
+          <a:xfrm>
+            <a:off x="280000" y="2854500"/>
+            <a:ext cx="220000" cy="1114500"/>
           </a:xfrm>
           <a:prstGeom prst="rect">
             <a:avLst/>
@@ -33707,14 +33787,14 @@
       </p:sp>
       <p:sp>
         <p:nvSpPr>
-          <p:cNvPr id="277" name="CNum"/>
-          <p:cNvSpPr/>
-          <p:nvPr/>
-        </p:nvSpPr>
-        <p:spPr>
-          <a:xfrm>
-            <a:off x="280000" y="3009500"/>
-            <a:ext cx="220000" cy="1219500"/>
+          <p:cNvPr id="641" name="SN3"/>
+          <p:cNvSpPr/>
+          <p:nvPr/>
+        </p:nvSpPr>
+        <p:spPr>
+          <a:xfrm>
+            <a:off x="280000" y="2854500"/>
+            <a:ext cx="220000" cy="1114500"/>
           </a:xfrm>
           <a:prstGeom prst="rect">
             <a:avLst/>
@@ -33728,11 +33808,11 @@
           <a:bodyPr wrap="square" lIns="0" tIns="0" rIns="0" bIns="0" rtlCol="0" anchor="ctr"/>
           <a:lstStyle/>
           <a:p>
-            <a:pPr algn="c" indent="0" marL="0">
-              <a:buNone/>
-            </a:pPr>
-            <a:r>
-              <a:rPr lang="vi-VN" sz="1500" b="1" i="0" kern="0" dirty="0">
+            <a:pPr algn="ctr" indent="0" marL="0">
+              <a:buNone/>
+            </a:pPr>
+            <a:r>
+              <a:rPr lang="vi-VN" sz="1500" b="1" kern="0" dirty="0">
                 <a:solidFill>
                   <a:srgbClr val="FFFFFF"/>
                 </a:solidFill>
@@ -33747,14 +33827,14 @@
       </p:sp>
       <p:sp>
         <p:nvSpPr>
-          <p:cNvPr id="278" name="CTitle"/>
-          <p:cNvSpPr/>
-          <p:nvPr/>
-        </p:nvSpPr>
-        <p:spPr>
-          <a:xfrm>
-            <a:off x="570000" y="3049500"/>
-            <a:ext cx="5431000" cy="472190"/>
+          <p:cNvPr id="642" name="ST3"/>
+          <p:cNvSpPr/>
+          <p:nvPr/>
+        </p:nvSpPr>
+        <p:spPr>
+          <a:xfrm>
+            <a:off x="570000" y="2884500"/>
+            <a:ext cx="5431000" cy="460380"/>
           </a:xfrm>
           <a:prstGeom prst="rect">
             <a:avLst/>
@@ -33772,7 +33852,7 @@
               <a:buNone/>
             </a:pPr>
             <a:r>
-              <a:rPr lang="vi-VN" sz="1000" b="1" i="0" kern="0" dirty="0">
+              <a:rPr lang="vi-VN" sz="1020" b="1" kern="0" dirty="0">
                 <a:solidFill>
                   <a:srgbClr val="1A1F36"/>
                 </a:solidFill>
@@ -33787,20 +33867,20 @@
       </p:sp>
       <p:sp>
         <p:nvSpPr>
-          <p:cNvPr id="279" name="CSep"/>
-          <p:cNvSpPr/>
-          <p:nvPr/>
-        </p:nvSpPr>
-        <p:spPr>
-          <a:xfrm>
-            <a:off x="570000" y="3521690"/>
-            <a:ext cx="5431000" cy="14000"/>
+          <p:cNvPr id="643" name="SS3"/>
+          <p:cNvSpPr/>
+          <p:nvPr/>
+        </p:nvSpPr>
+        <p:spPr>
+          <a:xfrm>
+            <a:off x="570000" y="3344880"/>
+            <a:ext cx="5431000" cy="12000"/>
           </a:xfrm>
           <a:prstGeom prst="rect">
             <a:avLst/>
           </a:prstGeom>
           <a:solidFill>
-            <a:srgbClr val="E8EBF0"/>
+            <a:srgbClr val="E0E3E8"/>
           </a:solidFill>
           <a:ln>
             <a:noFill/>
@@ -33809,14 +33889,14 @@
       </p:sp>
       <p:sp>
         <p:nvSpPr>
-          <p:cNvPr id="280" name="CAction"/>
-          <p:cNvSpPr/>
-          <p:nvPr/>
-        </p:nvSpPr>
-        <p:spPr>
-          <a:xfrm>
-            <a:off x="570000" y="3561690"/>
-            <a:ext cx="5431000" cy="647310"/>
+          <p:cNvPr id="644" name="SA3"/>
+          <p:cNvSpPr/>
+          <p:nvPr/>
+        </p:nvSpPr>
+        <p:spPr>
+          <a:xfrm>
+            <a:off x="570000" y="3374880"/>
+            <a:ext cx="5431000" cy="584120"/>
           </a:xfrm>
           <a:prstGeom prst="rect">
             <a:avLst/>
@@ -33834,7 +33914,7 @@
               <a:buNone/>
             </a:pPr>
             <a:r>
-              <a:rPr lang="vi-VN" sz="940" b="0" i="1" kern="0" dirty="0">
+              <a:rPr lang="vi-VN" sz="970" b="0" kern="0" dirty="0">
                 <a:solidFill>
                   <a:srgbClr val="4A4A4A"/>
                 </a:solidFill>
@@ -33849,40 +33929,36 @@
       </p:sp>
       <p:sp>
         <p:nvSpPr>
-          <p:cNvPr id="281" name="CBg"/>
-          <p:cNvSpPr/>
-          <p:nvPr/>
-        </p:nvSpPr>
-        <p:spPr>
-          <a:xfrm>
-            <a:off x="6171000" y="3009500"/>
-            <a:ext cx="5741000" cy="1219500"/>
-          </a:xfrm>
-          <a:prstGeom prst="roundRect">
-            <a:avLst>
-              <a:gd name="adj" fmla="val 10000"/>
-            </a:avLst>
+          <p:cNvPr id="645" name="SBg4"/>
+          <p:cNvSpPr/>
+          <p:nvPr/>
+        </p:nvSpPr>
+        <p:spPr>
+          <a:xfrm>
+            <a:off x="6171000" y="2854500"/>
+            <a:ext cx="5741000" cy="1114500"/>
+          </a:xfrm>
+          <a:prstGeom prst="rect">
+            <a:avLst/>
           </a:prstGeom>
           <a:solidFill>
-            <a:srgbClr val="FFFFFF"/>
+            <a:srgbClr val="F0F2F5"/>
           </a:solidFill>
-          <a:ln w="9144">
-            <a:solidFill>
-              <a:srgbClr val="E8EBF0"/>
-            </a:solidFill>
+          <a:ln>
+            <a:noFill/>
           </a:ln>
         </p:spPr>
       </p:sp>
       <p:sp>
         <p:nvSpPr>
-          <p:cNvPr id="282" name="CLBar"/>
-          <p:cNvSpPr/>
-          <p:nvPr/>
-        </p:nvSpPr>
-        <p:spPr>
-          <a:xfrm>
-            <a:off x="6171000" y="3009500"/>
-            <a:ext cx="220000" cy="1219500"/>
+          <p:cNvPr id="646" name="SLB4"/>
+          <p:cNvSpPr/>
+          <p:nvPr/>
+        </p:nvSpPr>
+        <p:spPr>
+          <a:xfrm>
+            <a:off x="6171000" y="2854500"/>
+            <a:ext cx="220000" cy="1114500"/>
           </a:xfrm>
           <a:prstGeom prst="rect">
             <a:avLst/>
@@ -33897,14 +33973,14 @@
       </p:sp>
       <p:sp>
         <p:nvSpPr>
-          <p:cNvPr id="283" name="CNum"/>
-          <p:cNvSpPr/>
-          <p:nvPr/>
-        </p:nvSpPr>
-        <p:spPr>
-          <a:xfrm>
-            <a:off x="6171000" y="3009500"/>
-            <a:ext cx="220000" cy="1219500"/>
+          <p:cNvPr id="647" name="SN4"/>
+          <p:cNvSpPr/>
+          <p:nvPr/>
+        </p:nvSpPr>
+        <p:spPr>
+          <a:xfrm>
+            <a:off x="6171000" y="2854500"/>
+            <a:ext cx="220000" cy="1114500"/>
           </a:xfrm>
           <a:prstGeom prst="rect">
             <a:avLst/>
@@ -33918,11 +33994,11 @@
           <a:bodyPr wrap="square" lIns="0" tIns="0" rIns="0" bIns="0" rtlCol="0" anchor="ctr"/>
           <a:lstStyle/>
           <a:p>
-            <a:pPr algn="c" indent="0" marL="0">
-              <a:buNone/>
-            </a:pPr>
-            <a:r>
-              <a:rPr lang="vi-VN" sz="1500" b="1" i="0" kern="0" dirty="0">
+            <a:pPr algn="ctr" indent="0" marL="0">
+              <a:buNone/>
+            </a:pPr>
+            <a:r>
+              <a:rPr lang="vi-VN" sz="1500" b="1" kern="0" dirty="0">
                 <a:solidFill>
                   <a:srgbClr val="FFFFFF"/>
                 </a:solidFill>
@@ -33937,14 +34013,14 @@
       </p:sp>
       <p:sp>
         <p:nvSpPr>
-          <p:cNvPr id="284" name="CTitle"/>
-          <p:cNvSpPr/>
-          <p:nvPr/>
-        </p:nvSpPr>
-        <p:spPr>
-          <a:xfrm>
-            <a:off x="6461000" y="3049500"/>
-            <a:ext cx="5431000" cy="472190"/>
+          <p:cNvPr id="648" name="ST4"/>
+          <p:cNvSpPr/>
+          <p:nvPr/>
+        </p:nvSpPr>
+        <p:spPr>
+          <a:xfrm>
+            <a:off x="6461000" y="2884500"/>
+            <a:ext cx="5431000" cy="460380"/>
           </a:xfrm>
           <a:prstGeom prst="rect">
             <a:avLst/>
@@ -33962,7 +34038,7 @@
               <a:buNone/>
             </a:pPr>
             <a:r>
-              <a:rPr lang="vi-VN" sz="1000" b="1" i="0" kern="0" dirty="0">
+              <a:rPr lang="vi-VN" sz="1020" b="1" kern="0" dirty="0">
                 <a:solidFill>
                   <a:srgbClr val="1A1F36"/>
                 </a:solidFill>
@@ -33977,20 +34053,20 @@
       </p:sp>
       <p:sp>
         <p:nvSpPr>
-          <p:cNvPr id="285" name="CSep"/>
-          <p:cNvSpPr/>
-          <p:nvPr/>
-        </p:nvSpPr>
-        <p:spPr>
-          <a:xfrm>
-            <a:off x="6461000" y="3521690"/>
-            <a:ext cx="5431000" cy="14000"/>
+          <p:cNvPr id="649" name="SS4"/>
+          <p:cNvSpPr/>
+          <p:nvPr/>
+        </p:nvSpPr>
+        <p:spPr>
+          <a:xfrm>
+            <a:off x="6461000" y="3344880"/>
+            <a:ext cx="5431000" cy="12000"/>
           </a:xfrm>
           <a:prstGeom prst="rect">
             <a:avLst/>
           </a:prstGeom>
           <a:solidFill>
-            <a:srgbClr val="E8EBF0"/>
+            <a:srgbClr val="E0E3E8"/>
           </a:solidFill>
           <a:ln>
             <a:noFill/>
@@ -33999,14 +34075,14 @@
       </p:sp>
       <p:sp>
         <p:nvSpPr>
-          <p:cNvPr id="286" name="CAction"/>
-          <p:cNvSpPr/>
-          <p:nvPr/>
-        </p:nvSpPr>
-        <p:spPr>
-          <a:xfrm>
-            <a:off x="6461000" y="3561690"/>
-            <a:ext cx="5431000" cy="647310"/>
+          <p:cNvPr id="650" name="SA4"/>
+          <p:cNvSpPr/>
+          <p:nvPr/>
+        </p:nvSpPr>
+        <p:spPr>
+          <a:xfrm>
+            <a:off x="6461000" y="3374880"/>
+            <a:ext cx="5431000" cy="584120"/>
           </a:xfrm>
           <a:prstGeom prst="rect">
             <a:avLst/>
@@ -34024,7 +34100,7 @@
               <a:buNone/>
             </a:pPr>
             <a:r>
-              <a:rPr lang="vi-VN" sz="940" b="0" i="1" kern="0" dirty="0">
+              <a:rPr lang="vi-VN" sz="970" b="0" kern="0" dirty="0">
                 <a:solidFill>
                   <a:srgbClr val="4A4A4A"/>
                 </a:solidFill>
@@ -34039,40 +34115,36 @@
       </p:sp>
       <p:sp>
         <p:nvSpPr>
-          <p:cNvPr id="287" name="CBg"/>
-          <p:cNvSpPr/>
-          <p:nvPr/>
-        </p:nvSpPr>
-        <p:spPr>
-          <a:xfrm>
-            <a:off x="280000" y="4379000"/>
-            <a:ext cx="5741000" cy="1219500"/>
-          </a:xfrm>
-          <a:prstGeom prst="roundRect">
-            <a:avLst>
-              <a:gd name="adj" fmla="val 10000"/>
-            </a:avLst>
+          <p:cNvPr id="651" name="SBg5"/>
+          <p:cNvSpPr/>
+          <p:nvPr/>
+        </p:nvSpPr>
+        <p:spPr>
+          <a:xfrm>
+            <a:off x="280000" y="4119000"/>
+            <a:ext cx="5741000" cy="1114500"/>
+          </a:xfrm>
+          <a:prstGeom prst="rect">
+            <a:avLst/>
           </a:prstGeom>
           <a:solidFill>
-            <a:srgbClr val="FFFFFF"/>
+            <a:srgbClr val="F0F2F5"/>
           </a:solidFill>
-          <a:ln w="9144">
-            <a:solidFill>
-              <a:srgbClr val="E8EBF0"/>
-            </a:solidFill>
+          <a:ln>
+            <a:noFill/>
           </a:ln>
         </p:spPr>
       </p:sp>
       <p:sp>
         <p:nvSpPr>
-          <p:cNvPr id="288" name="CLBar"/>
-          <p:cNvSpPr/>
-          <p:nvPr/>
-        </p:nvSpPr>
-        <p:spPr>
-          <a:xfrm>
-            <a:off x="280000" y="4379000"/>
-            <a:ext cx="220000" cy="1219500"/>
+          <p:cNvPr id="652" name="SLB5"/>
+          <p:cNvSpPr/>
+          <p:nvPr/>
+        </p:nvSpPr>
+        <p:spPr>
+          <a:xfrm>
+            <a:off x="280000" y="4119000"/>
+            <a:ext cx="220000" cy="1114500"/>
           </a:xfrm>
           <a:prstGeom prst="rect">
             <a:avLst/>
@@ -34087,14 +34159,14 @@
       </p:sp>
       <p:sp>
         <p:nvSpPr>
-          <p:cNvPr id="289" name="CNum"/>
-          <p:cNvSpPr/>
-          <p:nvPr/>
-        </p:nvSpPr>
-        <p:spPr>
-          <a:xfrm>
-            <a:off x="280000" y="4379000"/>
-            <a:ext cx="220000" cy="1219500"/>
+          <p:cNvPr id="653" name="SN5"/>
+          <p:cNvSpPr/>
+          <p:nvPr/>
+        </p:nvSpPr>
+        <p:spPr>
+          <a:xfrm>
+            <a:off x="280000" y="4119000"/>
+            <a:ext cx="220000" cy="1114500"/>
           </a:xfrm>
           <a:prstGeom prst="rect">
             <a:avLst/>
@@ -34108,11 +34180,11 @@
           <a:bodyPr wrap="square" lIns="0" tIns="0" rIns="0" bIns="0" rtlCol="0" anchor="ctr"/>
           <a:lstStyle/>
           <a:p>
-            <a:pPr algn="c" indent="0" marL="0">
-              <a:buNone/>
-            </a:pPr>
-            <a:r>
-              <a:rPr lang="vi-VN" sz="1500" b="1" i="0" kern="0" dirty="0">
+            <a:pPr algn="ctr" indent="0" marL="0">
+              <a:buNone/>
+            </a:pPr>
+            <a:r>
+              <a:rPr lang="vi-VN" sz="1500" b="1" kern="0" dirty="0">
                 <a:solidFill>
                   <a:srgbClr val="FFFFFF"/>
                 </a:solidFill>
@@ -34127,14 +34199,14 @@
       </p:sp>
       <p:sp>
         <p:nvSpPr>
-          <p:cNvPr id="290" name="CTitle"/>
-          <p:cNvSpPr/>
-          <p:nvPr/>
-        </p:nvSpPr>
-        <p:spPr>
-          <a:xfrm>
-            <a:off x="570000" y="4419000"/>
-            <a:ext cx="5431000" cy="472190"/>
+          <p:cNvPr id="654" name="ST5"/>
+          <p:cNvSpPr/>
+          <p:nvPr/>
+        </p:nvSpPr>
+        <p:spPr>
+          <a:xfrm>
+            <a:off x="570000" y="4149000"/>
+            <a:ext cx="5431000" cy="460380"/>
           </a:xfrm>
           <a:prstGeom prst="rect">
             <a:avLst/>
@@ -34152,7 +34224,7 @@
               <a:buNone/>
             </a:pPr>
             <a:r>
-              <a:rPr lang="vi-VN" sz="1000" b="1" i="0" kern="0" dirty="0">
+              <a:rPr lang="vi-VN" sz="1020" b="1" kern="0" dirty="0">
                 <a:solidFill>
                   <a:srgbClr val="1A1F36"/>
                 </a:solidFill>
@@ -34167,20 +34239,20 @@
       </p:sp>
       <p:sp>
         <p:nvSpPr>
-          <p:cNvPr id="291" name="CSep"/>
-          <p:cNvSpPr/>
-          <p:nvPr/>
-        </p:nvSpPr>
-        <p:spPr>
-          <a:xfrm>
-            <a:off x="570000" y="4891190"/>
-            <a:ext cx="5431000" cy="14000"/>
+          <p:cNvPr id="655" name="SS5"/>
+          <p:cNvSpPr/>
+          <p:nvPr/>
+        </p:nvSpPr>
+        <p:spPr>
+          <a:xfrm>
+            <a:off x="570000" y="4609380"/>
+            <a:ext cx="5431000" cy="12000"/>
           </a:xfrm>
           <a:prstGeom prst="rect">
             <a:avLst/>
           </a:prstGeom>
           <a:solidFill>
-            <a:srgbClr val="E8EBF0"/>
+            <a:srgbClr val="E0E3E8"/>
           </a:solidFill>
           <a:ln>
             <a:noFill/>
@@ -34189,14 +34261,14 @@
       </p:sp>
       <p:sp>
         <p:nvSpPr>
-          <p:cNvPr id="292" name="CAction"/>
-          <p:cNvSpPr/>
-          <p:nvPr/>
-        </p:nvSpPr>
-        <p:spPr>
-          <a:xfrm>
-            <a:off x="570000" y="4931190"/>
-            <a:ext cx="5431000" cy="647310"/>
+          <p:cNvPr id="656" name="SA5"/>
+          <p:cNvSpPr/>
+          <p:nvPr/>
+        </p:nvSpPr>
+        <p:spPr>
+          <a:xfrm>
+            <a:off x="570000" y="4639380"/>
+            <a:ext cx="5431000" cy="584120"/>
           </a:xfrm>
           <a:prstGeom prst="rect">
             <a:avLst/>
@@ -34214,7 +34286,7 @@
               <a:buNone/>
             </a:pPr>
             <a:r>
-              <a:rPr lang="vi-VN" sz="940" b="0" i="1" kern="0" dirty="0">
+              <a:rPr lang="vi-VN" sz="970" b="0" kern="0" dirty="0">
                 <a:solidFill>
                   <a:srgbClr val="4A4A4A"/>
                 </a:solidFill>
@@ -34229,40 +34301,36 @@
       </p:sp>
       <p:sp>
         <p:nvSpPr>
-          <p:cNvPr id="293" name="CBg"/>
-          <p:cNvSpPr/>
-          <p:nvPr/>
-        </p:nvSpPr>
-        <p:spPr>
-          <a:xfrm>
-            <a:off x="6171000" y="4379000"/>
-            <a:ext cx="5741000" cy="1219500"/>
-          </a:xfrm>
-          <a:prstGeom prst="roundRect">
-            <a:avLst>
-              <a:gd name="adj" fmla="val 10000"/>
-            </a:avLst>
+          <p:cNvPr id="657" name="SBg6"/>
+          <p:cNvSpPr/>
+          <p:nvPr/>
+        </p:nvSpPr>
+        <p:spPr>
+          <a:xfrm>
+            <a:off x="6171000" y="4119000"/>
+            <a:ext cx="5741000" cy="1114500"/>
+          </a:xfrm>
+          <a:prstGeom prst="rect">
+            <a:avLst/>
           </a:prstGeom>
           <a:solidFill>
-            <a:srgbClr val="FFFFFF"/>
+            <a:srgbClr val="F0F2F5"/>
           </a:solidFill>
-          <a:ln w="9144">
-            <a:solidFill>
-              <a:srgbClr val="E8EBF0"/>
-            </a:solidFill>
+          <a:ln>
+            <a:noFill/>
           </a:ln>
         </p:spPr>
       </p:sp>
       <p:sp>
         <p:nvSpPr>
-          <p:cNvPr id="294" name="CLBar"/>
-          <p:cNvSpPr/>
-          <p:nvPr/>
-        </p:nvSpPr>
-        <p:spPr>
-          <a:xfrm>
-            <a:off x="6171000" y="4379000"/>
-            <a:ext cx="220000" cy="1219500"/>
+          <p:cNvPr id="658" name="SLB6"/>
+          <p:cNvSpPr/>
+          <p:nvPr/>
+        </p:nvSpPr>
+        <p:spPr>
+          <a:xfrm>
+            <a:off x="6171000" y="4119000"/>
+            <a:ext cx="220000" cy="1114500"/>
           </a:xfrm>
           <a:prstGeom prst="rect">
             <a:avLst/>
@@ -34277,14 +34345,14 @@
       </p:sp>
       <p:sp>
         <p:nvSpPr>
-          <p:cNvPr id="295" name="CNum"/>
-          <p:cNvSpPr/>
-          <p:nvPr/>
-        </p:nvSpPr>
-        <p:spPr>
-          <a:xfrm>
-            <a:off x="6171000" y="4379000"/>
-            <a:ext cx="220000" cy="1219500"/>
+          <p:cNvPr id="659" name="SN6"/>
+          <p:cNvSpPr/>
+          <p:nvPr/>
+        </p:nvSpPr>
+        <p:spPr>
+          <a:xfrm>
+            <a:off x="6171000" y="4119000"/>
+            <a:ext cx="220000" cy="1114500"/>
           </a:xfrm>
           <a:prstGeom prst="rect">
             <a:avLst/>
@@ -34298,11 +34366,11 @@
           <a:bodyPr wrap="square" lIns="0" tIns="0" rIns="0" bIns="0" rtlCol="0" anchor="ctr"/>
           <a:lstStyle/>
           <a:p>
-            <a:pPr algn="c" indent="0" marL="0">
-              <a:buNone/>
-            </a:pPr>
-            <a:r>
-              <a:rPr lang="vi-VN" sz="1500" b="1" i="0" kern="0" dirty="0">
+            <a:pPr algn="ctr" indent="0" marL="0">
+              <a:buNone/>
+            </a:pPr>
+            <a:r>
+              <a:rPr lang="vi-VN" sz="1500" b="1" kern="0" dirty="0">
                 <a:solidFill>
                   <a:srgbClr val="FFFFFF"/>
                 </a:solidFill>
@@ -34317,14 +34385,14 @@
       </p:sp>
       <p:sp>
         <p:nvSpPr>
-          <p:cNvPr id="296" name="CTitle"/>
-          <p:cNvSpPr/>
-          <p:nvPr/>
-        </p:nvSpPr>
-        <p:spPr>
-          <a:xfrm>
-            <a:off x="6461000" y="4419000"/>
-            <a:ext cx="5431000" cy="472190"/>
+          <p:cNvPr id="660" name="ST6"/>
+          <p:cNvSpPr/>
+          <p:nvPr/>
+        </p:nvSpPr>
+        <p:spPr>
+          <a:xfrm>
+            <a:off x="6461000" y="4149000"/>
+            <a:ext cx="5431000" cy="460380"/>
           </a:xfrm>
           <a:prstGeom prst="rect">
             <a:avLst/>
@@ -34342,7 +34410,7 @@
               <a:buNone/>
             </a:pPr>
             <a:r>
-              <a:rPr lang="vi-VN" sz="1000" b="1" i="0" kern="0" dirty="0">
+              <a:rPr lang="vi-VN" sz="1020" b="1" kern="0" dirty="0">
                 <a:solidFill>
                   <a:srgbClr val="1A1F36"/>
                 </a:solidFill>
@@ -34357,20 +34425,20 @@
       </p:sp>
       <p:sp>
         <p:nvSpPr>
-          <p:cNvPr id="297" name="CSep"/>
-          <p:cNvSpPr/>
-          <p:nvPr/>
-        </p:nvSpPr>
-        <p:spPr>
-          <a:xfrm>
-            <a:off x="6461000" y="4891190"/>
-            <a:ext cx="5431000" cy="14000"/>
+          <p:cNvPr id="661" name="SS6"/>
+          <p:cNvSpPr/>
+          <p:nvPr/>
+        </p:nvSpPr>
+        <p:spPr>
+          <a:xfrm>
+            <a:off x="6461000" y="4609380"/>
+            <a:ext cx="5431000" cy="12000"/>
           </a:xfrm>
           <a:prstGeom prst="rect">
             <a:avLst/>
           </a:prstGeom>
           <a:solidFill>
-            <a:srgbClr val="E8EBF0"/>
+            <a:srgbClr val="E0E3E8"/>
           </a:solidFill>
           <a:ln>
             <a:noFill/>
@@ -34379,14 +34447,14 @@
       </p:sp>
       <p:sp>
         <p:nvSpPr>
-          <p:cNvPr id="298" name="CAction"/>
-          <p:cNvSpPr/>
-          <p:nvPr/>
-        </p:nvSpPr>
-        <p:spPr>
-          <a:xfrm>
-            <a:off x="6461000" y="4931190"/>
-            <a:ext cx="5431000" cy="647310"/>
+          <p:cNvPr id="662" name="SA6"/>
+          <p:cNvSpPr/>
+          <p:nvPr/>
+        </p:nvSpPr>
+        <p:spPr>
+          <a:xfrm>
+            <a:off x="6461000" y="4639380"/>
+            <a:ext cx="5431000" cy="584120"/>
           </a:xfrm>
           <a:prstGeom prst="rect">
             <a:avLst/>
@@ -34404,7 +34472,7 @@
               <a:buNone/>
             </a:pPr>
             <a:r>
-              <a:rPr lang="vi-VN" sz="940" b="0" i="1" kern="0" dirty="0">
+              <a:rPr lang="vi-VN" sz="970" b="0" kern="0" dirty="0">
                 <a:solidFill>
                   <a:srgbClr val="4A4A4A"/>
                 </a:solidFill>
@@ -34419,40 +34487,36 @@
       </p:sp>
       <p:sp>
         <p:nvSpPr>
-          <p:cNvPr id="299" name="CBg"/>
-          <p:cNvSpPr/>
-          <p:nvPr/>
-        </p:nvSpPr>
-        <p:spPr>
-          <a:xfrm>
-            <a:off x="280000" y="5748500"/>
-            <a:ext cx="5741000" cy="1219500"/>
-          </a:xfrm>
-          <a:prstGeom prst="roundRect">
-            <a:avLst>
-              <a:gd name="adj" fmla="val 10000"/>
-            </a:avLst>
+          <p:cNvPr id="663" name="SBg7"/>
+          <p:cNvSpPr/>
+          <p:nvPr/>
+        </p:nvSpPr>
+        <p:spPr>
+          <a:xfrm>
+            <a:off x="280000" y="5383500"/>
+            <a:ext cx="5741000" cy="1114500"/>
+          </a:xfrm>
+          <a:prstGeom prst="rect">
+            <a:avLst/>
           </a:prstGeom>
           <a:solidFill>
-            <a:srgbClr val="FFFFFF"/>
+            <a:srgbClr val="F0F2F5"/>
           </a:solidFill>
-          <a:ln w="9144">
-            <a:solidFill>
-              <a:srgbClr val="E8EBF0"/>
-            </a:solidFill>
+          <a:ln>
+            <a:noFill/>
           </a:ln>
         </p:spPr>
       </p:sp>
       <p:sp>
         <p:nvSpPr>
-          <p:cNvPr id="300" name="CLBar"/>
-          <p:cNvSpPr/>
-          <p:nvPr/>
-        </p:nvSpPr>
-        <p:spPr>
-          <a:xfrm>
-            <a:off x="280000" y="5748500"/>
-            <a:ext cx="220000" cy="1219500"/>
+          <p:cNvPr id="664" name="SLB7"/>
+          <p:cNvSpPr/>
+          <p:nvPr/>
+        </p:nvSpPr>
+        <p:spPr>
+          <a:xfrm>
+            <a:off x="280000" y="5383500"/>
+            <a:ext cx="220000" cy="1114500"/>
           </a:xfrm>
           <a:prstGeom prst="rect">
             <a:avLst/>
@@ -34467,14 +34531,14 @@
       </p:sp>
       <p:sp>
         <p:nvSpPr>
-          <p:cNvPr id="301" name="CNum"/>
-          <p:cNvSpPr/>
-          <p:nvPr/>
-        </p:nvSpPr>
-        <p:spPr>
-          <a:xfrm>
-            <a:off x="280000" y="5748500"/>
-            <a:ext cx="220000" cy="1219500"/>
+          <p:cNvPr id="665" name="SN7"/>
+          <p:cNvSpPr/>
+          <p:nvPr/>
+        </p:nvSpPr>
+        <p:spPr>
+          <a:xfrm>
+            <a:off x="280000" y="5383500"/>
+            <a:ext cx="220000" cy="1114500"/>
           </a:xfrm>
           <a:prstGeom prst="rect">
             <a:avLst/>
@@ -34488,11 +34552,11 @@
           <a:bodyPr wrap="square" lIns="0" tIns="0" rIns="0" bIns="0" rtlCol="0" anchor="ctr"/>
           <a:lstStyle/>
           <a:p>
-            <a:pPr algn="c" indent="0" marL="0">
-              <a:buNone/>
-            </a:pPr>
-            <a:r>
-              <a:rPr lang="vi-VN" sz="1500" b="1" i="0" kern="0" dirty="0">
+            <a:pPr algn="ctr" indent="0" marL="0">
+              <a:buNone/>
+            </a:pPr>
+            <a:r>
+              <a:rPr lang="vi-VN" sz="1500" b="1" kern="0" dirty="0">
                 <a:solidFill>
                   <a:srgbClr val="FFFFFF"/>
                 </a:solidFill>
@@ -34507,14 +34571,14 @@
       </p:sp>
       <p:sp>
         <p:nvSpPr>
-          <p:cNvPr id="302" name="CTitle"/>
-          <p:cNvSpPr/>
-          <p:nvPr/>
-        </p:nvSpPr>
-        <p:spPr>
-          <a:xfrm>
-            <a:off x="570000" y="5788500"/>
-            <a:ext cx="5431000" cy="472190"/>
+          <p:cNvPr id="666" name="ST7"/>
+          <p:cNvSpPr/>
+          <p:nvPr/>
+        </p:nvSpPr>
+        <p:spPr>
+          <a:xfrm>
+            <a:off x="570000" y="5413500"/>
+            <a:ext cx="5431000" cy="460380"/>
           </a:xfrm>
           <a:prstGeom prst="rect">
             <a:avLst/>
@@ -34532,7 +34596,7 @@
               <a:buNone/>
             </a:pPr>
             <a:r>
-              <a:rPr lang="vi-VN" sz="1000" b="1" i="0" kern="0" dirty="0">
+              <a:rPr lang="vi-VN" sz="1020" b="1" kern="0" dirty="0">
                 <a:solidFill>
                   <a:srgbClr val="1A1F36"/>
                 </a:solidFill>
@@ -34547,20 +34611,20 @@
       </p:sp>
       <p:sp>
         <p:nvSpPr>
-          <p:cNvPr id="303" name="CSep"/>
-          <p:cNvSpPr/>
-          <p:nvPr/>
-        </p:nvSpPr>
-        <p:spPr>
-          <a:xfrm>
-            <a:off x="570000" y="6260690"/>
-            <a:ext cx="5431000" cy="14000"/>
+          <p:cNvPr id="667" name="SS7"/>
+          <p:cNvSpPr/>
+          <p:nvPr/>
+        </p:nvSpPr>
+        <p:spPr>
+          <a:xfrm>
+            <a:off x="570000" y="5873880"/>
+            <a:ext cx="5431000" cy="12000"/>
           </a:xfrm>
           <a:prstGeom prst="rect">
             <a:avLst/>
           </a:prstGeom>
           <a:solidFill>
-            <a:srgbClr val="E8EBF0"/>
+            <a:srgbClr val="E0E3E8"/>
           </a:solidFill>
           <a:ln>
             <a:noFill/>
@@ -34569,14 +34633,14 @@
       </p:sp>
       <p:sp>
         <p:nvSpPr>
-          <p:cNvPr id="304" name="CAction"/>
-          <p:cNvSpPr/>
-          <p:nvPr/>
-        </p:nvSpPr>
-        <p:spPr>
-          <a:xfrm>
-            <a:off x="570000" y="6300690"/>
-            <a:ext cx="5431000" cy="647310"/>
+          <p:cNvPr id="668" name="SA7"/>
+          <p:cNvSpPr/>
+          <p:nvPr/>
+        </p:nvSpPr>
+        <p:spPr>
+          <a:xfrm>
+            <a:off x="570000" y="5903880"/>
+            <a:ext cx="5431000" cy="584120"/>
           </a:xfrm>
           <a:prstGeom prst="rect">
             <a:avLst/>
@@ -34594,7 +34658,7 @@
               <a:buNone/>
             </a:pPr>
             <a:r>
-              <a:rPr lang="vi-VN" sz="940" b="0" i="1" kern="0" dirty="0">
+              <a:rPr lang="vi-VN" sz="970" b="0" kern="0" dirty="0">
                 <a:solidFill>
                   <a:srgbClr val="4A4A4A"/>
                 </a:solidFill>
@@ -34609,40 +34673,36 @@
       </p:sp>
       <p:sp>
         <p:nvSpPr>
-          <p:cNvPr id="305" name="CBg"/>
-          <p:cNvSpPr/>
-          <p:nvPr/>
-        </p:nvSpPr>
-        <p:spPr>
-          <a:xfrm>
-            <a:off x="6171000" y="5748500"/>
-            <a:ext cx="5741000" cy="1219500"/>
-          </a:xfrm>
-          <a:prstGeom prst="roundRect">
-            <a:avLst>
-              <a:gd name="adj" fmla="val 10000"/>
-            </a:avLst>
+          <p:cNvPr id="669" name="SBg8"/>
+          <p:cNvSpPr/>
+          <p:nvPr/>
+        </p:nvSpPr>
+        <p:spPr>
+          <a:xfrm>
+            <a:off x="6171000" y="5383500"/>
+            <a:ext cx="5741000" cy="1114500"/>
+          </a:xfrm>
+          <a:prstGeom prst="rect">
+            <a:avLst/>
           </a:prstGeom>
           <a:solidFill>
-            <a:srgbClr val="FFFFFF"/>
+            <a:srgbClr val="F0F2F5"/>
           </a:solidFill>
-          <a:ln w="9144">
-            <a:solidFill>
-              <a:srgbClr val="E8EBF0"/>
-            </a:solidFill>
+          <a:ln>
+            <a:noFill/>
           </a:ln>
         </p:spPr>
       </p:sp>
       <p:sp>
         <p:nvSpPr>
-          <p:cNvPr id="306" name="CLBar"/>
-          <p:cNvSpPr/>
-          <p:nvPr/>
-        </p:nvSpPr>
-        <p:spPr>
-          <a:xfrm>
-            <a:off x="6171000" y="5748500"/>
-            <a:ext cx="220000" cy="1219500"/>
+          <p:cNvPr id="670" name="SLB8"/>
+          <p:cNvSpPr/>
+          <p:nvPr/>
+        </p:nvSpPr>
+        <p:spPr>
+          <a:xfrm>
+            <a:off x="6171000" y="5383500"/>
+            <a:ext cx="220000" cy="1114500"/>
           </a:xfrm>
           <a:prstGeom prst="rect">
             <a:avLst/>
@@ -34657,14 +34717,14 @@
       </p:sp>
       <p:sp>
         <p:nvSpPr>
-          <p:cNvPr id="307" name="CNum"/>
-          <p:cNvSpPr/>
-          <p:nvPr/>
-        </p:nvSpPr>
-        <p:spPr>
-          <a:xfrm>
-            <a:off x="6171000" y="5748500"/>
-            <a:ext cx="220000" cy="1219500"/>
+          <p:cNvPr id="671" name="SN8"/>
+          <p:cNvSpPr/>
+          <p:nvPr/>
+        </p:nvSpPr>
+        <p:spPr>
+          <a:xfrm>
+            <a:off x="6171000" y="5383500"/>
+            <a:ext cx="220000" cy="1114500"/>
           </a:xfrm>
           <a:prstGeom prst="rect">
             <a:avLst/>
@@ -34678,11 +34738,11 @@
           <a:bodyPr wrap="square" lIns="0" tIns="0" rIns="0" bIns="0" rtlCol="0" anchor="ctr"/>
           <a:lstStyle/>
           <a:p>
-            <a:pPr algn="c" indent="0" marL="0">
-              <a:buNone/>
-            </a:pPr>
-            <a:r>
-              <a:rPr lang="vi-VN" sz="1500" b="1" i="0" kern="0" dirty="0">
+            <a:pPr algn="ctr" indent="0" marL="0">
+              <a:buNone/>
+            </a:pPr>
+            <a:r>
+              <a:rPr lang="vi-VN" sz="1500" b="1" kern="0" dirty="0">
                 <a:solidFill>
                   <a:srgbClr val="FFFFFF"/>
                 </a:solidFill>
@@ -34697,14 +34757,14 @@
       </p:sp>
       <p:sp>
         <p:nvSpPr>
-          <p:cNvPr id="308" name="CTitle"/>
-          <p:cNvSpPr/>
-          <p:nvPr/>
-        </p:nvSpPr>
-        <p:spPr>
-          <a:xfrm>
-            <a:off x="6461000" y="5788500"/>
-            <a:ext cx="5431000" cy="472190"/>
+          <p:cNvPr id="672" name="ST8"/>
+          <p:cNvSpPr/>
+          <p:nvPr/>
+        </p:nvSpPr>
+        <p:spPr>
+          <a:xfrm>
+            <a:off x="6461000" y="5413500"/>
+            <a:ext cx="5431000" cy="460380"/>
           </a:xfrm>
           <a:prstGeom prst="rect">
             <a:avLst/>
@@ -34722,7 +34782,7 @@
               <a:buNone/>
             </a:pPr>
             <a:r>
-              <a:rPr lang="vi-VN" sz="1000" b="1" i="0" kern="0" dirty="0">
+              <a:rPr lang="vi-VN" sz="1020" b="1" kern="0" dirty="0">
                 <a:solidFill>
                   <a:srgbClr val="1A1F36"/>
                 </a:solidFill>
@@ -34737,20 +34797,20 @@
       </p:sp>
       <p:sp>
         <p:nvSpPr>
-          <p:cNvPr id="309" name="CSep"/>
-          <p:cNvSpPr/>
-          <p:nvPr/>
-        </p:nvSpPr>
-        <p:spPr>
-          <a:xfrm>
-            <a:off x="6461000" y="6260690"/>
-            <a:ext cx="5431000" cy="14000"/>
+          <p:cNvPr id="673" name="SS8"/>
+          <p:cNvSpPr/>
+          <p:nvPr/>
+        </p:nvSpPr>
+        <p:spPr>
+          <a:xfrm>
+            <a:off x="6461000" y="5873880"/>
+            <a:ext cx="5431000" cy="12000"/>
           </a:xfrm>
           <a:prstGeom prst="rect">
             <a:avLst/>
           </a:prstGeom>
           <a:solidFill>
-            <a:srgbClr val="E8EBF0"/>
+            <a:srgbClr val="E0E3E8"/>
           </a:solidFill>
           <a:ln>
             <a:noFill/>
@@ -34759,14 +34819,14 @@
       </p:sp>
       <p:sp>
         <p:nvSpPr>
-          <p:cNvPr id="310" name="CAction"/>
-          <p:cNvSpPr/>
-          <p:nvPr/>
-        </p:nvSpPr>
-        <p:spPr>
-          <a:xfrm>
-            <a:off x="6461000" y="6300690"/>
-            <a:ext cx="5431000" cy="647310"/>
+          <p:cNvPr id="674" name="SA8"/>
+          <p:cNvSpPr/>
+          <p:nvPr/>
+        </p:nvSpPr>
+        <p:spPr>
+          <a:xfrm>
+            <a:off x="6461000" y="5903880"/>
+            <a:ext cx="5431000" cy="584120"/>
           </a:xfrm>
           <a:prstGeom prst="rect">
             <a:avLst/>
@@ -34784,7 +34844,7 @@
               <a:buNone/>
             </a:pPr>
             <a:r>
-              <a:rPr lang="vi-VN" sz="940" b="0" i="1" kern="0" dirty="0">
+              <a:rPr lang="vi-VN" sz="970" b="0" kern="0" dirty="0">
                 <a:solidFill>
                   <a:srgbClr val="4A4A4A"/>
                 </a:solidFill>
@@ -34799,7 +34859,7 @@
       </p:sp>
       <p:sp>
         <p:nvSpPr>
-          <p:cNvPr id="311" name="FBar"/>
+          <p:cNvPr id="675" name="FBar"/>
           <p:cNvSpPr/>
           <p:nvPr/>
         </p:nvSpPr>
@@ -34821,7 +34881,7 @@
       </p:sp>
       <p:sp>
         <p:nvSpPr>
-          <p:cNvPr id="312" name="FTxt"/>
+          <p:cNvPr id="676" name="FTxt"/>
           <p:cNvSpPr/>
           <p:nvPr/>
         </p:nvSpPr>
@@ -34846,7 +34906,7 @@
               <a:buNone/>
             </a:pPr>
             <a:r>
-              <a:rPr lang="vi-VN" sz="1000" b="0" i="0" kern="0" dirty="0">
+              <a:rPr lang="vi-VN" sz="1000" b="0" kern="0" dirty="0">
                 <a:solidFill>
                   <a:srgbClr val="4A4A4A"/>
                 </a:solidFill>
@@ -34861,7 +34921,7 @@
       </p:sp>
       <p:sp>
         <p:nvSpPr>
-          <p:cNvPr id="313" name="FPg"/>
+          <p:cNvPr id="677" name="FPg"/>
           <p:cNvSpPr/>
           <p:nvPr/>
         </p:nvSpPr>
@@ -34886,7 +34946,7 @@
               <a:buNone/>
             </a:pPr>
             <a:r>
-              <a:rPr lang="vi-VN" sz="1000" b="0" i="0" kern="0" dirty="0">
+              <a:rPr lang="vi-VN" sz="1000" b="0" kern="0" dirty="0">
                 <a:solidFill>
                   <a:srgbClr val="B8BDC4"/>
                 </a:solidFill>
@@ -35197,7 +35257,7 @@
       <p:grpSpPr/>
       <p:sp>
         <p:nvSpPr>
-          <p:cNvPr id="314" name="RedBar"/>
+          <p:cNvPr id="678" name="RedBar"/>
           <p:cNvSpPr/>
           <p:nvPr/>
         </p:nvSpPr>
@@ -35219,7 +35279,7 @@
       </p:sp>
       <p:sp>
         <p:nvSpPr>
-          <p:cNvPr id="315" name="PhanLbl"/>
+          <p:cNvPr id="679" name="Phan"/>
           <p:cNvSpPr/>
           <p:nvPr/>
         </p:nvSpPr>
@@ -35244,7 +35304,7 @@
               <a:buNone/>
             </a:pPr>
             <a:r>
-              <a:rPr lang="vi-VN" sz="1200" b="1" i="0" kern="0" dirty="0">
+              <a:rPr lang="vi-VN" sz="1200" b="1" kern="0" dirty="0">
                 <a:solidFill>
                   <a:srgbClr val="E60012"/>
                 </a:solidFill>
@@ -35259,7 +35319,7 @@
       </p:sp>
       <p:sp>
         <p:nvSpPr>
-          <p:cNvPr id="316" name="Title"/>
+          <p:cNvPr id="680" name="Title"/>
           <p:cNvSpPr/>
           <p:nvPr/>
         </p:nvSpPr>
@@ -35284,7 +35344,7 @@
               <a:buNone/>
             </a:pPr>
             <a:r>
-              <a:rPr lang="vi-VN" sz="2800" b="1" i="0" kern="0" dirty="0">
+              <a:rPr lang="vi-VN" sz="2800" b="1" kern="0" dirty="0">
                 <a:solidFill>
                   <a:srgbClr val="1A1F36"/>
                 </a:solidFill>
@@ -35299,7 +35359,7 @@
       </p:sp>
       <p:sp>
         <p:nvSpPr>
-          <p:cNvPr id="317" name="Sub"/>
+          <p:cNvPr id="681" name="Sub"/>
           <p:cNvSpPr/>
           <p:nvPr/>
         </p:nvSpPr>
@@ -35324,7 +35384,7 @@
               <a:buNone/>
             </a:pPr>
             <a:r>
-              <a:rPr lang="vi-VN" sz="1200" b="0" i="0" kern="0" dirty="0">
+              <a:rPr lang="vi-VN" sz="1200" b="0" kern="0" dirty="0">
                 <a:solidFill>
                   <a:srgbClr val="4A4A4A"/>
                 </a:solidFill>
@@ -35339,20 +35399,20 @@
       </p:sp>
       <p:sp>
         <p:nvSpPr>
-          <p:cNvPr id="318" name="AccLine"/>
-          <p:cNvSpPr/>
-          <p:nvPr/>
-        </p:nvSpPr>
-        <p:spPr>
-          <a:xfrm>
-            <a:off x="548640" y="1520000"/>
-            <a:ext cx="10972800" cy="18000"/>
+          <p:cNvPr id="682" name="Line"/>
+          <p:cNvSpPr/>
+          <p:nvPr/>
+        </p:nvSpPr>
+        <p:spPr>
+          <a:xfrm>
+            <a:off x="548640" y="1530000"/>
+            <a:ext cx="10972800" cy="16000"/>
           </a:xfrm>
           <a:prstGeom prst="rect">
             <a:avLst/>
           </a:prstGeom>
           <a:solidFill>
-            <a:srgbClr val="E8EBF0"/>
+            <a:srgbClr val="E0E3E8"/>
           </a:solidFill>
           <a:ln>
             <a:noFill/>
@@ -35361,40 +35421,36 @@
       </p:sp>
       <p:sp>
         <p:nvSpPr>
-          <p:cNvPr id="319" name="ABg"/>
-          <p:cNvSpPr/>
-          <p:nvPr/>
-        </p:nvSpPr>
-        <p:spPr>
-          <a:xfrm>
-            <a:off x="300000" y="1640000"/>
-            <a:ext cx="11592000" cy="895600"/>
-          </a:xfrm>
-          <a:prstGeom prst="roundRect">
-            <a:avLst>
-              <a:gd name="adj" fmla="val 12000"/>
-            </a:avLst>
+          <p:cNvPr id="683" name="AB🔍"/>
+          <p:cNvSpPr/>
+          <p:nvPr/>
+        </p:nvSpPr>
+        <p:spPr>
+          <a:xfrm>
+            <a:off x="300000" y="1590000"/>
+            <a:ext cx="11592000" cy="933600"/>
+          </a:xfrm>
+          <a:prstGeom prst="rect">
+            <a:avLst/>
           </a:prstGeom>
           <a:solidFill>
-            <a:srgbClr val="F5F7FA"/>
+            <a:srgbClr val="F0F2F5"/>
           </a:solidFill>
-          <a:ln w="9144">
-            <a:solidFill>
-              <a:srgbClr val="E8EBF0"/>
-            </a:solidFill>
+          <a:ln>
+            <a:noFill/>
           </a:ln>
         </p:spPr>
       </p:sp>
       <p:sp>
         <p:nvSpPr>
-          <p:cNvPr id="320" name="IBox"/>
-          <p:cNvSpPr/>
-          <p:nvPr/>
-        </p:nvSpPr>
-        <p:spPr>
-          <a:xfrm>
-            <a:off x="300000" y="1640000"/>
-            <a:ext cx="460000" cy="895600"/>
+          <p:cNvPr id="684" name="AIB🔍"/>
+          <p:cNvSpPr/>
+          <p:nvPr/>
+        </p:nvSpPr>
+        <p:spPr>
+          <a:xfrm>
+            <a:off x="300000" y="1590000"/>
+            <a:ext cx="420000" cy="933600"/>
           </a:xfrm>
           <a:prstGeom prst="rect">
             <a:avLst/>
@@ -35409,14 +35465,14 @@
       </p:sp>
       <p:sp>
         <p:nvSpPr>
-          <p:cNvPr id="321" name="Icon"/>
-          <p:cNvSpPr/>
-          <p:nvPr/>
-        </p:nvSpPr>
-        <p:spPr>
-          <a:xfrm>
-            <a:off x="300000" y="1640000"/>
-            <a:ext cx="460000" cy="895600"/>
+          <p:cNvPr id="685" name="AIC🔍"/>
+          <p:cNvSpPr/>
+          <p:nvPr/>
+        </p:nvSpPr>
+        <p:spPr>
+          <a:xfrm>
+            <a:off x="300000" y="1590000"/>
+            <a:ext cx="420000" cy="933600"/>
           </a:xfrm>
           <a:prstGeom prst="rect">
             <a:avLst/>
@@ -35430,11 +35486,11 @@
           <a:bodyPr wrap="square" lIns="0" tIns="0" rIns="0" bIns="0" rtlCol="0" anchor="ctr"/>
           <a:lstStyle/>
           <a:p>
-            <a:pPr algn="c" indent="0" marL="0">
-              <a:buNone/>
-            </a:pPr>
-            <a:r>
-              <a:rPr lang="vi-VN" sz="2200" b="0" i="0" kern="0" dirty="0">
+            <a:pPr algn="ctr" indent="0" marL="0">
+              <a:buNone/>
+            </a:pPr>
+            <a:r>
+              <a:rPr lang="vi-VN" sz="2000" b="0" kern="0" dirty="0">
                 <a:solidFill>
                   <a:srgbClr val="FFFFFF"/>
                 </a:solidFill>
@@ -35449,14 +35505,14 @@
       </p:sp>
       <p:sp>
         <p:nvSpPr>
-          <p:cNvPr id="322" name="ATitle"/>
-          <p:cNvSpPr/>
-          <p:nvPr/>
-        </p:nvSpPr>
-        <p:spPr>
-          <a:xfrm>
-            <a:off x="880000" y="1700000"/>
-            <a:ext cx="10972000" cy="358240"/>
+          <p:cNvPr id="686" name="ATL🔍"/>
+          <p:cNvSpPr/>
+          <p:nvPr/>
+        </p:nvSpPr>
+        <p:spPr>
+          <a:xfrm>
+            <a:off x="820000" y="1590000"/>
+            <a:ext cx="11052000" cy="466800"/>
           </a:xfrm>
           <a:prstGeom prst="rect">
             <a:avLst/>
@@ -35474,7 +35530,7 @@
               <a:buNone/>
             </a:pPr>
             <a:r>
-              <a:rPr lang="vi-VN" sz="1300" b="1" i="0" kern="0" dirty="0">
+              <a:rPr lang="vi-VN" sz="1300" b="1" kern="0" dirty="0">
                 <a:solidFill>
                   <a:srgbClr val="1A1F36"/>
                 </a:solidFill>
@@ -35489,14 +35545,14 @@
       </p:sp>
       <p:sp>
         <p:nvSpPr>
-          <p:cNvPr id="323" name="ADesc"/>
-          <p:cNvSpPr/>
-          <p:nvPr/>
-        </p:nvSpPr>
-        <p:spPr>
-          <a:xfrm>
-            <a:off x="880000" y="2038240"/>
-            <a:ext cx="10972000" cy="477360"/>
+          <p:cNvPr id="687" name="ADC🔍"/>
+          <p:cNvSpPr/>
+          <p:nvPr/>
+        </p:nvSpPr>
+        <p:spPr>
+          <a:xfrm>
+            <a:off x="820000" y="2056800"/>
+            <a:ext cx="11052000" cy="466800"/>
           </a:xfrm>
           <a:prstGeom prst="rect">
             <a:avLst/>
@@ -35514,55 +35570,73 @@
               <a:buNone/>
             </a:pPr>
             <a:r>
-              <a:rPr lang="vi-VN" sz="1080" b="0" i="0" kern="0" dirty="0">
-                <a:solidFill>
-                  <a:srgbClr val="4A4A4A"/>
-                </a:solidFill>
-                <a:latin typeface="Calibri" pitchFamily="34" charset="0"/>
-                <a:ea typeface="Calibri" pitchFamily="34" charset="-122"/>
-                <a:cs typeface="Calibri" pitchFamily="34" charset="-120"/>
-              </a:rPr>
-              <a:t>Học thuộc 21 điểm về mỗi xe đang có trong kho. Không biết xe → không tư vấn được → không có deal.</a:t>
-            </a:r>
-          </a:p>
-        </p:txBody>
-      </p:sp>
-      <p:sp>
-        <p:nvSpPr>
-          <p:cNvPr id="324" name="ABg"/>
-          <p:cNvSpPr/>
-          <p:nvPr/>
-        </p:nvSpPr>
-        <p:spPr>
-          <a:xfrm>
-            <a:off x="300000" y="2615600"/>
-            <a:ext cx="11592000" cy="895600"/>
-          </a:xfrm>
-          <a:prstGeom prst="roundRect">
-            <a:avLst>
-              <a:gd name="adj" fmla="val 12000"/>
-            </a:avLst>
+              <a:rPr lang="vi-VN" sz="1080" b="0" kern="0" dirty="0">
+                <a:solidFill>
+                  <a:srgbClr val="2C2C2C"/>
+                </a:solidFill>
+                <a:latin typeface="Calibri" pitchFamily="34" charset="0"/>
+                <a:ea typeface="Calibri" pitchFamily="34" charset="-122"/>
+                <a:cs typeface="Calibri" pitchFamily="34" charset="-120"/>
+              </a:rPr>
+              <a:t>Học thuộc 21 điểm về mỗi xe trong kho. Không biết xe → không tư vấn được → không có deal.</a:t>
+            </a:r>
+          </a:p>
+        </p:txBody>
+      </p:sp>
+      <p:sp>
+        <p:nvSpPr>
+          <p:cNvPr id="688" name="ASep🔍"/>
+          <p:cNvSpPr/>
+          <p:nvPr/>
+        </p:nvSpPr>
+        <p:spPr>
+          <a:xfrm>
+            <a:off x="300000" y="2513600"/>
+            <a:ext cx="11592000" cy="10000"/>
+          </a:xfrm>
+          <a:prstGeom prst="rect">
+            <a:avLst/>
           </a:prstGeom>
           <a:solidFill>
-            <a:srgbClr val="F5F7FA"/>
+            <a:srgbClr val="E0E3E8"/>
           </a:solidFill>
-          <a:ln w="9144">
-            <a:solidFill>
-              <a:srgbClr val="E8EBF0"/>
-            </a:solidFill>
+          <a:ln>
+            <a:noFill/>
           </a:ln>
         </p:spPr>
       </p:sp>
       <p:sp>
         <p:nvSpPr>
-          <p:cNvPr id="325" name="IBox"/>
-          <p:cNvSpPr/>
-          <p:nvPr/>
-        </p:nvSpPr>
-        <p:spPr>
-          <a:xfrm>
-            <a:off x="300000" y="2615600"/>
-            <a:ext cx="460000" cy="895600"/>
+          <p:cNvPr id="689" name="AB📱"/>
+          <p:cNvSpPr/>
+          <p:nvPr/>
+        </p:nvSpPr>
+        <p:spPr>
+          <a:xfrm>
+            <a:off x="300000" y="2583600"/>
+            <a:ext cx="11592000" cy="933600"/>
+          </a:xfrm>
+          <a:prstGeom prst="rect">
+            <a:avLst/>
+          </a:prstGeom>
+          <a:solidFill>
+            <a:srgbClr val="F0F2F5"/>
+          </a:solidFill>
+          <a:ln>
+            <a:noFill/>
+          </a:ln>
+        </p:spPr>
+      </p:sp>
+      <p:sp>
+        <p:nvSpPr>
+          <p:cNvPr id="690" name="AIB📱"/>
+          <p:cNvSpPr/>
+          <p:nvPr/>
+        </p:nvSpPr>
+        <p:spPr>
+          <a:xfrm>
+            <a:off x="300000" y="2583600"/>
+            <a:ext cx="420000" cy="933600"/>
           </a:xfrm>
           <a:prstGeom prst="rect">
             <a:avLst/>
@@ -35577,14 +35651,14 @@
       </p:sp>
       <p:sp>
         <p:nvSpPr>
-          <p:cNvPr id="326" name="Icon"/>
-          <p:cNvSpPr/>
-          <p:nvPr/>
-        </p:nvSpPr>
-        <p:spPr>
-          <a:xfrm>
-            <a:off x="300000" y="2615600"/>
-            <a:ext cx="460000" cy="895600"/>
+          <p:cNvPr id="691" name="AIC📱"/>
+          <p:cNvSpPr/>
+          <p:nvPr/>
+        </p:nvSpPr>
+        <p:spPr>
+          <a:xfrm>
+            <a:off x="300000" y="2583600"/>
+            <a:ext cx="420000" cy="933600"/>
           </a:xfrm>
           <a:prstGeom prst="rect">
             <a:avLst/>
@@ -35598,11 +35672,11 @@
           <a:bodyPr wrap="square" lIns="0" tIns="0" rIns="0" bIns="0" rtlCol="0" anchor="ctr"/>
           <a:lstStyle/>
           <a:p>
-            <a:pPr algn="c" indent="0" marL="0">
-              <a:buNone/>
-            </a:pPr>
-            <a:r>
-              <a:rPr lang="vi-VN" sz="2200" b="0" i="0" kern="0" dirty="0">
+            <a:pPr algn="ctr" indent="0" marL="0">
+              <a:buNone/>
+            </a:pPr>
+            <a:r>
+              <a:rPr lang="vi-VN" sz="2000" b="0" kern="0" dirty="0">
                 <a:solidFill>
                   <a:srgbClr val="FFFFFF"/>
                 </a:solidFill>
@@ -35617,14 +35691,14 @@
       </p:sp>
       <p:sp>
         <p:nvSpPr>
-          <p:cNvPr id="327" name="ATitle"/>
-          <p:cNvSpPr/>
-          <p:nvPr/>
-        </p:nvSpPr>
-        <p:spPr>
-          <a:xfrm>
-            <a:off x="880000" y="2675600"/>
-            <a:ext cx="10972000" cy="358240"/>
+          <p:cNvPr id="692" name="ATL📱"/>
+          <p:cNvSpPr/>
+          <p:nvPr/>
+        </p:nvSpPr>
+        <p:spPr>
+          <a:xfrm>
+            <a:off x="820000" y="2583600"/>
+            <a:ext cx="11052000" cy="466800"/>
           </a:xfrm>
           <a:prstGeom prst="rect">
             <a:avLst/>
@@ -35642,7 +35716,7 @@
               <a:buNone/>
             </a:pPr>
             <a:r>
-              <a:rPr lang="vi-VN" sz="1300" b="1" i="0" kern="0" dirty="0">
+              <a:rPr lang="vi-VN" sz="1300" b="1" kern="0" dirty="0">
                 <a:solidFill>
                   <a:srgbClr val="1A1F36"/>
                 </a:solidFill>
@@ -35657,14 +35731,14 @@
       </p:sp>
       <p:sp>
         <p:nvSpPr>
-          <p:cNvPr id="328" name="ADesc"/>
-          <p:cNvSpPr/>
-          <p:nvPr/>
-        </p:nvSpPr>
-        <p:spPr>
-          <a:xfrm>
-            <a:off x="880000" y="3013840"/>
-            <a:ext cx="10972000" cy="477360"/>
+          <p:cNvPr id="693" name="ADC📱"/>
+          <p:cNvSpPr/>
+          <p:nvPr/>
+        </p:nvSpPr>
+        <p:spPr>
+          <a:xfrm>
+            <a:off x="820000" y="3050400"/>
+            <a:ext cx="11052000" cy="466800"/>
           </a:xfrm>
           <a:prstGeom prst="rect">
             <a:avLst/>
@@ -35682,55 +35756,73 @@
               <a:buNone/>
             </a:pPr>
             <a:r>
-              <a:rPr lang="vi-VN" sz="1080" b="0" i="0" kern="0" dirty="0">
-                <a:solidFill>
-                  <a:srgbClr val="4A4A4A"/>
-                </a:solidFill>
-                <a:latin typeface="Calibri" pitchFamily="34" charset="0"/>
-                <a:ea typeface="Calibri" pitchFamily="34" charset="-122"/>
-                <a:cs typeface="Calibri" pitchFamily="34" charset="-120"/>
-              </a:rPr>
-              <a:t>Đăng ngay lên Chợ Tốt, Bonbanh, Facebook – chọn nhiều khu vực, nhiều tỉnh để tối đa lượng tiếp cận.</a:t>
-            </a:r>
-          </a:p>
-        </p:txBody>
-      </p:sp>
-      <p:sp>
-        <p:nvSpPr>
-          <p:cNvPr id="329" name="ABg"/>
-          <p:cNvSpPr/>
-          <p:nvPr/>
-        </p:nvSpPr>
-        <p:spPr>
-          <a:xfrm>
-            <a:off x="300000" y="3591200"/>
-            <a:ext cx="11592000" cy="895600"/>
-          </a:xfrm>
-          <a:prstGeom prst="roundRect">
-            <a:avLst>
-              <a:gd name="adj" fmla="val 12000"/>
-            </a:avLst>
+              <a:rPr lang="vi-VN" sz="1080" b="0" kern="0" dirty="0">
+                <a:solidFill>
+                  <a:srgbClr val="2C2C2C"/>
+                </a:solidFill>
+                <a:latin typeface="Calibri" pitchFamily="34" charset="0"/>
+                <a:ea typeface="Calibri" pitchFamily="34" charset="-122"/>
+                <a:cs typeface="Calibri" pitchFamily="34" charset="-120"/>
+              </a:rPr>
+              <a:t>Đăng ngay lên Chợ Tốt, Bonbanh, Facebook – chọn nhiều khu vực, nhiều tỉnh để tối đa tiếp cận.</a:t>
+            </a:r>
+          </a:p>
+        </p:txBody>
+      </p:sp>
+      <p:sp>
+        <p:nvSpPr>
+          <p:cNvPr id="694" name="ASep📱"/>
+          <p:cNvSpPr/>
+          <p:nvPr/>
+        </p:nvSpPr>
+        <p:spPr>
+          <a:xfrm>
+            <a:off x="300000" y="3507200"/>
+            <a:ext cx="11592000" cy="10000"/>
+          </a:xfrm>
+          <a:prstGeom prst="rect">
+            <a:avLst/>
           </a:prstGeom>
           <a:solidFill>
-            <a:srgbClr val="F5F7FA"/>
+            <a:srgbClr val="E0E3E8"/>
           </a:solidFill>
-          <a:ln w="9144">
-            <a:solidFill>
-              <a:srgbClr val="E8EBF0"/>
-            </a:solidFill>
+          <a:ln>
+            <a:noFill/>
           </a:ln>
         </p:spPr>
       </p:sp>
       <p:sp>
         <p:nvSpPr>
-          <p:cNvPr id="330" name="IBox"/>
-          <p:cNvSpPr/>
-          <p:nvPr/>
-        </p:nvSpPr>
-        <p:spPr>
-          <a:xfrm>
-            <a:off x="300000" y="3591200"/>
-            <a:ext cx="460000" cy="895600"/>
+          <p:cNvPr id="695" name="AB🎬"/>
+          <p:cNvSpPr/>
+          <p:nvPr/>
+        </p:nvSpPr>
+        <p:spPr>
+          <a:xfrm>
+            <a:off x="300000" y="3577200"/>
+            <a:ext cx="11592000" cy="933600"/>
+          </a:xfrm>
+          <a:prstGeom prst="rect">
+            <a:avLst/>
+          </a:prstGeom>
+          <a:solidFill>
+            <a:srgbClr val="F0F2F5"/>
+          </a:solidFill>
+          <a:ln>
+            <a:noFill/>
+          </a:ln>
+        </p:spPr>
+      </p:sp>
+      <p:sp>
+        <p:nvSpPr>
+          <p:cNvPr id="696" name="AIB🎬"/>
+          <p:cNvSpPr/>
+          <p:nvPr/>
+        </p:nvSpPr>
+        <p:spPr>
+          <a:xfrm>
+            <a:off x="300000" y="3577200"/>
+            <a:ext cx="420000" cy="933600"/>
           </a:xfrm>
           <a:prstGeom prst="rect">
             <a:avLst/>
@@ -35745,14 +35837,14 @@
       </p:sp>
       <p:sp>
         <p:nvSpPr>
-          <p:cNvPr id="331" name="Icon"/>
-          <p:cNvSpPr/>
-          <p:nvPr/>
-        </p:nvSpPr>
-        <p:spPr>
-          <a:xfrm>
-            <a:off x="300000" y="3591200"/>
-            <a:ext cx="460000" cy="895600"/>
+          <p:cNvPr id="697" name="AIC🎬"/>
+          <p:cNvSpPr/>
+          <p:nvPr/>
+        </p:nvSpPr>
+        <p:spPr>
+          <a:xfrm>
+            <a:off x="300000" y="3577200"/>
+            <a:ext cx="420000" cy="933600"/>
           </a:xfrm>
           <a:prstGeom prst="rect">
             <a:avLst/>
@@ -35766,11 +35858,11 @@
           <a:bodyPr wrap="square" lIns="0" tIns="0" rIns="0" bIns="0" rtlCol="0" anchor="ctr"/>
           <a:lstStyle/>
           <a:p>
-            <a:pPr algn="c" indent="0" marL="0">
-              <a:buNone/>
-            </a:pPr>
-            <a:r>
-              <a:rPr lang="vi-VN" sz="2200" b="0" i="0" kern="0" dirty="0">
+            <a:pPr algn="ctr" indent="0" marL="0">
+              <a:buNone/>
+            </a:pPr>
+            <a:r>
+              <a:rPr lang="vi-VN" sz="2000" b="0" kern="0" dirty="0">
                 <a:solidFill>
                   <a:srgbClr val="FFFFFF"/>
                 </a:solidFill>
@@ -35785,14 +35877,14 @@
       </p:sp>
       <p:sp>
         <p:nvSpPr>
-          <p:cNvPr id="332" name="ATitle"/>
-          <p:cNvSpPr/>
-          <p:nvPr/>
-        </p:nvSpPr>
-        <p:spPr>
-          <a:xfrm>
-            <a:off x="880000" y="3651200"/>
-            <a:ext cx="10972000" cy="358240"/>
+          <p:cNvPr id="698" name="ATL🎬"/>
+          <p:cNvSpPr/>
+          <p:nvPr/>
+        </p:nvSpPr>
+        <p:spPr>
+          <a:xfrm>
+            <a:off x="820000" y="3577200"/>
+            <a:ext cx="11052000" cy="466800"/>
           </a:xfrm>
           <a:prstGeom prst="rect">
             <a:avLst/>
@@ -35810,7 +35902,7 @@
               <a:buNone/>
             </a:pPr>
             <a:r>
-              <a:rPr lang="vi-VN" sz="1300" b="1" i="0" kern="0" dirty="0">
+              <a:rPr lang="vi-VN" sz="1300" b="1" kern="0" dirty="0">
                 <a:solidFill>
                   <a:srgbClr val="1A1F36"/>
                 </a:solidFill>
@@ -35825,14 +35917,14 @@
       </p:sp>
       <p:sp>
         <p:nvSpPr>
-          <p:cNvPr id="333" name="ADesc"/>
-          <p:cNvSpPr/>
-          <p:nvPr/>
-        </p:nvSpPr>
-        <p:spPr>
-          <a:xfrm>
-            <a:off x="880000" y="3989440"/>
-            <a:ext cx="10972000" cy="477360"/>
+          <p:cNvPr id="699" name="ADC🎬"/>
+          <p:cNvSpPr/>
+          <p:nvPr/>
+        </p:nvSpPr>
+        <p:spPr>
+          <a:xfrm>
+            <a:off x="820000" y="4044000"/>
+            <a:ext cx="11052000" cy="466800"/>
           </a:xfrm>
           <a:prstGeom prst="rect">
             <a:avLst/>
@@ -35850,55 +35942,73 @@
               <a:buNone/>
             </a:pPr>
             <a:r>
-              <a:rPr lang="vi-VN" sz="1080" b="0" i="0" kern="0" dirty="0">
-                <a:solidFill>
-                  <a:srgbClr val="4A4A4A"/>
-                </a:solidFill>
-                <a:latin typeface="Calibri" pitchFamily="34" charset="0"/>
-                <a:ea typeface="Calibri" pitchFamily="34" charset="-122"/>
-                <a:cs typeface="Calibri" pitchFamily="34" charset="-120"/>
-              </a:rPr>
-              <a:t>Video xe cũ có lượng xem tự nhiên rất lớn – đây là kênh tìm kiếm KH bền vững và miễn phí nhất hiện nay.</a:t>
-            </a:r>
-          </a:p>
-        </p:txBody>
-      </p:sp>
-      <p:sp>
-        <p:nvSpPr>
-          <p:cNvPr id="334" name="ABg"/>
-          <p:cNvSpPr/>
-          <p:nvPr/>
-        </p:nvSpPr>
-        <p:spPr>
-          <a:xfrm>
-            <a:off x="300000" y="4566800"/>
-            <a:ext cx="11592000" cy="895600"/>
-          </a:xfrm>
-          <a:prstGeom prst="roundRect">
-            <a:avLst>
-              <a:gd name="adj" fmla="val 12000"/>
-            </a:avLst>
+              <a:rPr lang="vi-VN" sz="1080" b="0" kern="0" dirty="0">
+                <a:solidFill>
+                  <a:srgbClr val="2C2C2C"/>
+                </a:solidFill>
+                <a:latin typeface="Calibri" pitchFamily="34" charset="0"/>
+                <a:ea typeface="Calibri" pitchFamily="34" charset="-122"/>
+                <a:cs typeface="Calibri" pitchFamily="34" charset="-120"/>
+              </a:rPr>
+              <a:t>Video xe cũ có lượng xem tự nhiên rất lớn – đây là kênh tìm kiếm KH bền vững nhất hiện nay.</a:t>
+            </a:r>
+          </a:p>
+        </p:txBody>
+      </p:sp>
+      <p:sp>
+        <p:nvSpPr>
+          <p:cNvPr id="700" name="ASep🎬"/>
+          <p:cNvSpPr/>
+          <p:nvPr/>
+        </p:nvSpPr>
+        <p:spPr>
+          <a:xfrm>
+            <a:off x="300000" y="4500800"/>
+            <a:ext cx="11592000" cy="10000"/>
+          </a:xfrm>
+          <a:prstGeom prst="rect">
+            <a:avLst/>
           </a:prstGeom>
           <a:solidFill>
-            <a:srgbClr val="F5F7FA"/>
+            <a:srgbClr val="E0E3E8"/>
           </a:solidFill>
-          <a:ln w="9144">
-            <a:solidFill>
-              <a:srgbClr val="E8EBF0"/>
-            </a:solidFill>
+          <a:ln>
+            <a:noFill/>
           </a:ln>
         </p:spPr>
       </p:sp>
       <p:sp>
         <p:nvSpPr>
-          <p:cNvPr id="335" name="IBox"/>
-          <p:cNvSpPr/>
-          <p:nvPr/>
-        </p:nvSpPr>
-        <p:spPr>
-          <a:xfrm>
-            <a:off x="300000" y="4566800"/>
-            <a:ext cx="460000" cy="895600"/>
+          <p:cNvPr id="701" name="AB📞"/>
+          <p:cNvSpPr/>
+          <p:nvPr/>
+        </p:nvSpPr>
+        <p:spPr>
+          <a:xfrm>
+            <a:off x="300000" y="4570800"/>
+            <a:ext cx="11592000" cy="933600"/>
+          </a:xfrm>
+          <a:prstGeom prst="rect">
+            <a:avLst/>
+          </a:prstGeom>
+          <a:solidFill>
+            <a:srgbClr val="F0F2F5"/>
+          </a:solidFill>
+          <a:ln>
+            <a:noFill/>
+          </a:ln>
+        </p:spPr>
+      </p:sp>
+      <p:sp>
+        <p:nvSpPr>
+          <p:cNvPr id="702" name="AIB📞"/>
+          <p:cNvSpPr/>
+          <p:nvPr/>
+        </p:nvSpPr>
+        <p:spPr>
+          <a:xfrm>
+            <a:off x="300000" y="4570800"/>
+            <a:ext cx="420000" cy="933600"/>
           </a:xfrm>
           <a:prstGeom prst="rect">
             <a:avLst/>
@@ -35913,14 +36023,14 @@
       </p:sp>
       <p:sp>
         <p:nvSpPr>
-          <p:cNvPr id="336" name="Icon"/>
-          <p:cNvSpPr/>
-          <p:nvPr/>
-        </p:nvSpPr>
-        <p:spPr>
-          <a:xfrm>
-            <a:off x="300000" y="4566800"/>
-            <a:ext cx="460000" cy="895600"/>
+          <p:cNvPr id="703" name="AIC📞"/>
+          <p:cNvSpPr/>
+          <p:nvPr/>
+        </p:nvSpPr>
+        <p:spPr>
+          <a:xfrm>
+            <a:off x="300000" y="4570800"/>
+            <a:ext cx="420000" cy="933600"/>
           </a:xfrm>
           <a:prstGeom prst="rect">
             <a:avLst/>
@@ -35934,11 +36044,11 @@
           <a:bodyPr wrap="square" lIns="0" tIns="0" rIns="0" bIns="0" rtlCol="0" anchor="ctr"/>
           <a:lstStyle/>
           <a:p>
-            <a:pPr algn="c" indent="0" marL="0">
-              <a:buNone/>
-            </a:pPr>
-            <a:r>
-              <a:rPr lang="vi-VN" sz="2200" b="0" i="0" kern="0" dirty="0">
+            <a:pPr algn="ctr" indent="0" marL="0">
+              <a:buNone/>
+            </a:pPr>
+            <a:r>
+              <a:rPr lang="vi-VN" sz="2000" b="0" kern="0" dirty="0">
                 <a:solidFill>
                   <a:srgbClr val="FFFFFF"/>
                 </a:solidFill>
@@ -35953,14 +36063,14 @@
       </p:sp>
       <p:sp>
         <p:nvSpPr>
-          <p:cNvPr id="337" name="ATitle"/>
-          <p:cNvSpPr/>
-          <p:nvPr/>
-        </p:nvSpPr>
-        <p:spPr>
-          <a:xfrm>
-            <a:off x="880000" y="4626800"/>
-            <a:ext cx="10972000" cy="358240"/>
+          <p:cNvPr id="704" name="ATL📞"/>
+          <p:cNvSpPr/>
+          <p:nvPr/>
+        </p:nvSpPr>
+        <p:spPr>
+          <a:xfrm>
+            <a:off x="820000" y="4570800"/>
+            <a:ext cx="11052000" cy="466800"/>
           </a:xfrm>
           <a:prstGeom prst="rect">
             <a:avLst/>
@@ -35978,7 +36088,7 @@
               <a:buNone/>
             </a:pPr>
             <a:r>
-              <a:rPr lang="vi-VN" sz="1300" b="1" i="0" kern="0" dirty="0">
+              <a:rPr lang="vi-VN" sz="1300" b="1" kern="0" dirty="0">
                 <a:solidFill>
                   <a:srgbClr val="1A1F36"/>
                 </a:solidFill>
@@ -35993,14 +36103,14 @@
       </p:sp>
       <p:sp>
         <p:nvSpPr>
-          <p:cNvPr id="338" name="ADesc"/>
-          <p:cNvSpPr/>
-          <p:nvPr/>
-        </p:nvSpPr>
-        <p:spPr>
-          <a:xfrm>
-            <a:off x="880000" y="4965040"/>
-            <a:ext cx="10972000" cy="477360"/>
+          <p:cNvPr id="705" name="ADC📞"/>
+          <p:cNvSpPr/>
+          <p:nvPr/>
+        </p:nvSpPr>
+        <p:spPr>
+          <a:xfrm>
+            <a:off x="820000" y="5037600"/>
+            <a:ext cx="11052000" cy="466800"/>
           </a:xfrm>
           <a:prstGeom prst="rect">
             <a:avLst/>
@@ -36018,9 +36128,9 @@
               <a:buNone/>
             </a:pPr>
             <a:r>
-              <a:rPr lang="vi-VN" sz="1080" b="0" i="0" kern="0" dirty="0">
-                <a:solidFill>
-                  <a:srgbClr val="4A4A4A"/>
+              <a:rPr lang="vi-VN" sz="1080" b="0" kern="0" dirty="0">
+                <a:solidFill>
+                  <a:srgbClr val="2C2C2C"/>
                 </a:solidFill>
                 <a:latin typeface="Calibri" pitchFamily="34" charset="0"/>
                 <a:ea typeface="Calibri" pitchFamily="34" charset="-122"/>
@@ -36033,40 +36143,58 @@
       </p:sp>
       <p:sp>
         <p:nvSpPr>
-          <p:cNvPr id="339" name="ABg"/>
-          <p:cNvSpPr/>
-          <p:nvPr/>
-        </p:nvSpPr>
-        <p:spPr>
-          <a:xfrm>
-            <a:off x="300000" y="5542400"/>
-            <a:ext cx="11592000" cy="895600"/>
-          </a:xfrm>
-          <a:prstGeom prst="roundRect">
-            <a:avLst>
-              <a:gd name="adj" fmla="val 12000"/>
-            </a:avLst>
+          <p:cNvPr id="706" name="ASep📞"/>
+          <p:cNvSpPr/>
+          <p:nvPr/>
+        </p:nvSpPr>
+        <p:spPr>
+          <a:xfrm>
+            <a:off x="300000" y="5494400"/>
+            <a:ext cx="11592000" cy="10000"/>
+          </a:xfrm>
+          <a:prstGeom prst="rect">
+            <a:avLst/>
           </a:prstGeom>
           <a:solidFill>
-            <a:srgbClr val="F5F7FA"/>
+            <a:srgbClr val="E0E3E8"/>
           </a:solidFill>
-          <a:ln w="9144">
-            <a:solidFill>
-              <a:srgbClr val="E8EBF0"/>
-            </a:solidFill>
+          <a:ln>
+            <a:noFill/>
           </a:ln>
         </p:spPr>
       </p:sp>
       <p:sp>
         <p:nvSpPr>
-          <p:cNvPr id="340" name="IBox"/>
-          <p:cNvSpPr/>
-          <p:nvPr/>
-        </p:nvSpPr>
-        <p:spPr>
-          <a:xfrm>
-            <a:off x="300000" y="5542400"/>
-            <a:ext cx="460000" cy="895600"/>
+          <p:cNvPr id="707" name="AB🧠"/>
+          <p:cNvSpPr/>
+          <p:nvPr/>
+        </p:nvSpPr>
+        <p:spPr>
+          <a:xfrm>
+            <a:off x="300000" y="5564400"/>
+            <a:ext cx="11592000" cy="933600"/>
+          </a:xfrm>
+          <a:prstGeom prst="rect">
+            <a:avLst/>
+          </a:prstGeom>
+          <a:solidFill>
+            <a:srgbClr val="F0F2F5"/>
+          </a:solidFill>
+          <a:ln>
+            <a:noFill/>
+          </a:ln>
+        </p:spPr>
+      </p:sp>
+      <p:sp>
+        <p:nvSpPr>
+          <p:cNvPr id="708" name="AIB🧠"/>
+          <p:cNvSpPr/>
+          <p:nvPr/>
+        </p:nvSpPr>
+        <p:spPr>
+          <a:xfrm>
+            <a:off x="300000" y="5564400"/>
+            <a:ext cx="420000" cy="933600"/>
           </a:xfrm>
           <a:prstGeom prst="rect">
             <a:avLst/>
@@ -36081,14 +36209,14 @@
       </p:sp>
       <p:sp>
         <p:nvSpPr>
-          <p:cNvPr id="341" name="Icon"/>
-          <p:cNvSpPr/>
-          <p:nvPr/>
-        </p:nvSpPr>
-        <p:spPr>
-          <a:xfrm>
-            <a:off x="300000" y="5542400"/>
-            <a:ext cx="460000" cy="895600"/>
+          <p:cNvPr id="709" name="AIC🧠"/>
+          <p:cNvSpPr/>
+          <p:nvPr/>
+        </p:nvSpPr>
+        <p:spPr>
+          <a:xfrm>
+            <a:off x="300000" y="5564400"/>
+            <a:ext cx="420000" cy="933600"/>
           </a:xfrm>
           <a:prstGeom prst="rect">
             <a:avLst/>
@@ -36102,11 +36230,11 @@
           <a:bodyPr wrap="square" lIns="0" tIns="0" rIns="0" bIns="0" rtlCol="0" anchor="ctr"/>
           <a:lstStyle/>
           <a:p>
-            <a:pPr algn="c" indent="0" marL="0">
-              <a:buNone/>
-            </a:pPr>
-            <a:r>
-              <a:rPr lang="vi-VN" sz="2200" b="0" i="0" kern="0" dirty="0">
+            <a:pPr algn="ctr" indent="0" marL="0">
+              <a:buNone/>
+            </a:pPr>
+            <a:r>
+              <a:rPr lang="vi-VN" sz="2000" b="0" kern="0" dirty="0">
                 <a:solidFill>
                   <a:srgbClr val="FFFFFF"/>
                 </a:solidFill>
@@ -36121,14 +36249,14 @@
       </p:sp>
       <p:sp>
         <p:nvSpPr>
-          <p:cNvPr id="342" name="ATitle"/>
-          <p:cNvSpPr/>
-          <p:nvPr/>
-        </p:nvSpPr>
-        <p:spPr>
-          <a:xfrm>
-            <a:off x="880000" y="5602400"/>
-            <a:ext cx="10972000" cy="358240"/>
+          <p:cNvPr id="710" name="ATL🧠"/>
+          <p:cNvSpPr/>
+          <p:nvPr/>
+        </p:nvSpPr>
+        <p:spPr>
+          <a:xfrm>
+            <a:off x="820000" y="5564400"/>
+            <a:ext cx="11052000" cy="466800"/>
           </a:xfrm>
           <a:prstGeom prst="rect">
             <a:avLst/>
@@ -36146,7 +36274,7 @@
               <a:buNone/>
             </a:pPr>
             <a:r>
-              <a:rPr lang="vi-VN" sz="1300" b="1" i="0" kern="0" dirty="0">
+              <a:rPr lang="vi-VN" sz="1300" b="1" kern="0" dirty="0">
                 <a:solidFill>
                   <a:srgbClr val="1A1F36"/>
                 </a:solidFill>
@@ -36161,14 +36289,14 @@
       </p:sp>
       <p:sp>
         <p:nvSpPr>
-          <p:cNvPr id="343" name="ADesc"/>
-          <p:cNvSpPr/>
-          <p:nvPr/>
-        </p:nvSpPr>
-        <p:spPr>
-          <a:xfrm>
-            <a:off x="880000" y="5940640"/>
-            <a:ext cx="10972000" cy="477360"/>
+          <p:cNvPr id="711" name="ADC🧠"/>
+          <p:cNvSpPr/>
+          <p:nvPr/>
+        </p:nvSpPr>
+        <p:spPr>
+          <a:xfrm>
+            <a:off x="820000" y="6031200"/>
+            <a:ext cx="11052000" cy="466800"/>
           </a:xfrm>
           <a:prstGeom prst="rect">
             <a:avLst/>
@@ -36186,9 +36314,9 @@
               <a:buNone/>
             </a:pPr>
             <a:r>
-              <a:rPr lang="vi-VN" sz="1080" b="0" i="0" kern="0" dirty="0">
-                <a:solidFill>
-                  <a:srgbClr val="4A4A4A"/>
+              <a:rPr lang="vi-VN" sz="1080" b="0" kern="0" dirty="0">
+                <a:solidFill>
+                  <a:srgbClr val="2C2C2C"/>
                 </a:solidFill>
                 <a:latin typeface="Calibri" pitchFamily="34" charset="0"/>
                 <a:ea typeface="Calibri" pitchFamily="34" charset="-122"/>
@@ -36201,7 +36329,29 @@
       </p:sp>
       <p:sp>
         <p:nvSpPr>
-          <p:cNvPr id="344" name="FBar"/>
+          <p:cNvPr id="712" name="ASep🧠"/>
+          <p:cNvSpPr/>
+          <p:nvPr/>
+        </p:nvSpPr>
+        <p:spPr>
+          <a:xfrm>
+            <a:off x="300000" y="6488000"/>
+            <a:ext cx="11592000" cy="10000"/>
+          </a:xfrm>
+          <a:prstGeom prst="rect">
+            <a:avLst/>
+          </a:prstGeom>
+          <a:solidFill>
+            <a:srgbClr val="E0E3E8"/>
+          </a:solidFill>
+          <a:ln>
+            <a:noFill/>
+          </a:ln>
+        </p:spPr>
+      </p:sp>
+      <p:sp>
+        <p:nvSpPr>
+          <p:cNvPr id="713" name="FBar"/>
           <p:cNvSpPr/>
           <p:nvPr/>
         </p:nvSpPr>
@@ -36223,7 +36373,7 @@
       </p:sp>
       <p:sp>
         <p:nvSpPr>
-          <p:cNvPr id="345" name="FTxt"/>
+          <p:cNvPr id="714" name="FTxt"/>
           <p:cNvSpPr/>
           <p:nvPr/>
         </p:nvSpPr>
@@ -36248,7 +36398,7 @@
               <a:buNone/>
             </a:pPr>
             <a:r>
-              <a:rPr lang="vi-VN" sz="1000" b="0" i="0" kern="0" dirty="0">
+              <a:rPr lang="vi-VN" sz="1000" b="0" kern="0" dirty="0">
                 <a:solidFill>
                   <a:srgbClr val="4A4A4A"/>
                 </a:solidFill>
@@ -36263,7 +36413,7 @@
       </p:sp>
       <p:sp>
         <p:nvSpPr>
-          <p:cNvPr id="346" name="FPg"/>
+          <p:cNvPr id="715" name="FPg"/>
           <p:cNvSpPr/>
           <p:nvPr/>
         </p:nvSpPr>
@@ -36288,7 +36438,7 @@
               <a:buNone/>
             </a:pPr>
             <a:r>
-              <a:rPr lang="vi-VN" sz="1000" b="0" i="0" kern="0" dirty="0">
+              <a:rPr lang="vi-VN" sz="1000" b="0" kern="0" dirty="0">
                 <a:solidFill>
                   <a:srgbClr val="B8BDC4"/>
                 </a:solidFill>
